--- a/Slide.pptx
+++ b/Slide.pptx
@@ -6,6 +6,21 @@
   </p:sldMasterIdLst>
   <p:sldIdLst>
     <p:sldId id="256" r:id="rId2"/>
+    <p:sldId id="257" r:id="rId3"/>
+    <p:sldId id="258" r:id="rId4"/>
+    <p:sldId id="259" r:id="rId5"/>
+    <p:sldId id="260" r:id="rId6"/>
+    <p:sldId id="261" r:id="rId7"/>
+    <p:sldId id="262" r:id="rId8"/>
+    <p:sldId id="263" r:id="rId9"/>
+    <p:sldId id="264" r:id="rId10"/>
+    <p:sldId id="266" r:id="rId11"/>
+    <p:sldId id="267" r:id="rId12"/>
+    <p:sldId id="265" r:id="rId13"/>
+    <p:sldId id="268" r:id="rId14"/>
+    <p:sldId id="269" r:id="rId15"/>
+    <p:sldId id="270" r:id="rId16"/>
+    <p:sldId id="271" r:id="rId17"/>
   </p:sldIdLst>
   <p:sldSz cx="12192000" cy="6858000"/>
   <p:notesSz cx="6858000" cy="9144000"/>
@@ -104,6 +119,11 @@
       </a:defRPr>
     </a:lvl9pPr>
   </p:defaultTextStyle>
+  <p:extLst>
+    <p:ext uri="{EFAFB233-063F-42B5-8137-9DF3F51BA10A}">
+      <p15:sldGuideLst xmlns:p15="http://schemas.microsoft.com/office/powerpoint/2012/main"/>
+    </p:ext>
+  </p:extLst>
 </p:presentation>
 </file>
 
@@ -254,7 +274,7 @@
           <a:p>
             <a:fld id="{7C37183A-56AE-4684-9C95-5FB84A65F4E3}" type="datetimeFigureOut">
               <a:rPr lang="ko-KR" altLang="en-US" smtClean="0"/>
-              <a:t>2026-06-09</a:t>
+              <a:t>2026-06-11</a:t>
             </a:fld>
             <a:endParaRPr lang="ko-KR" altLang="en-US"/>
           </a:p>
@@ -452,7 +472,7 @@
           <a:p>
             <a:fld id="{7C37183A-56AE-4684-9C95-5FB84A65F4E3}" type="datetimeFigureOut">
               <a:rPr lang="ko-KR" altLang="en-US" smtClean="0"/>
-              <a:t>2026-06-09</a:t>
+              <a:t>2026-06-11</a:t>
             </a:fld>
             <a:endParaRPr lang="ko-KR" altLang="en-US"/>
           </a:p>
@@ -660,7 +680,7 @@
           <a:p>
             <a:fld id="{7C37183A-56AE-4684-9C95-5FB84A65F4E3}" type="datetimeFigureOut">
               <a:rPr lang="ko-KR" altLang="en-US" smtClean="0"/>
-              <a:t>2026-06-09</a:t>
+              <a:t>2026-06-11</a:t>
             </a:fld>
             <a:endParaRPr lang="ko-KR" altLang="en-US"/>
           </a:p>
@@ -772,7 +792,7 @@
           <a:lstStyle/>
           <a:p>
             <a:r>
-              <a:rPr lang="ko-KR" altLang="en-US"/>
+              <a:rPr lang="ko-KR" altLang="en-US" dirty="0"/>
               <a:t>마스터 제목 스타일 편집</a:t>
             </a:r>
           </a:p>
@@ -858,7 +878,7 @@
           <a:p>
             <a:fld id="{7C37183A-56AE-4684-9C95-5FB84A65F4E3}" type="datetimeFigureOut">
               <a:rPr lang="ko-KR" altLang="en-US" smtClean="0"/>
-              <a:t>2026-06-09</a:t>
+              <a:t>2026-06-11</a:t>
             </a:fld>
             <a:endParaRPr lang="ko-KR" altLang="en-US"/>
           </a:p>
@@ -914,7 +934,7 @@
               <a:rPr lang="ko-KR" altLang="en-US" smtClean="0"/>
               <a:t>‹#›</a:t>
             </a:fld>
-            <a:endParaRPr lang="ko-KR" altLang="en-US"/>
+            <a:endParaRPr lang="ko-KR" altLang="en-US" dirty="0"/>
           </a:p>
         </p:txBody>
       </p:sp>
@@ -1133,7 +1153,7 @@
           <a:p>
             <a:fld id="{7C37183A-56AE-4684-9C95-5FB84A65F4E3}" type="datetimeFigureOut">
               <a:rPr lang="ko-KR" altLang="en-US" smtClean="0"/>
-              <a:t>2026-06-09</a:t>
+              <a:t>2026-06-11</a:t>
             </a:fld>
             <a:endParaRPr lang="ko-KR" altLang="en-US"/>
           </a:p>
@@ -1398,7 +1418,7 @@
           <a:p>
             <a:fld id="{7C37183A-56AE-4684-9C95-5FB84A65F4E3}" type="datetimeFigureOut">
               <a:rPr lang="ko-KR" altLang="en-US" smtClean="0"/>
-              <a:t>2026-06-09</a:t>
+              <a:t>2026-06-11</a:t>
             </a:fld>
             <a:endParaRPr lang="ko-KR" altLang="en-US"/>
           </a:p>
@@ -1810,7 +1830,7 @@
           <a:p>
             <a:fld id="{7C37183A-56AE-4684-9C95-5FB84A65F4E3}" type="datetimeFigureOut">
               <a:rPr lang="ko-KR" altLang="en-US" smtClean="0"/>
-              <a:t>2026-06-09</a:t>
+              <a:t>2026-06-11</a:t>
             </a:fld>
             <a:endParaRPr lang="ko-KR" altLang="en-US"/>
           </a:p>
@@ -1951,7 +1971,7 @@
           <a:p>
             <a:fld id="{7C37183A-56AE-4684-9C95-5FB84A65F4E3}" type="datetimeFigureOut">
               <a:rPr lang="ko-KR" altLang="en-US" smtClean="0"/>
-              <a:t>2026-06-09</a:t>
+              <a:t>2026-06-11</a:t>
             </a:fld>
             <a:endParaRPr lang="ko-KR" altLang="en-US"/>
           </a:p>
@@ -2064,7 +2084,7 @@
           <a:p>
             <a:fld id="{7C37183A-56AE-4684-9C95-5FB84A65F4E3}" type="datetimeFigureOut">
               <a:rPr lang="ko-KR" altLang="en-US" smtClean="0"/>
-              <a:t>2026-06-09</a:t>
+              <a:t>2026-06-11</a:t>
             </a:fld>
             <a:endParaRPr lang="ko-KR" altLang="en-US"/>
           </a:p>
@@ -2375,7 +2395,7 @@
           <a:p>
             <a:fld id="{7C37183A-56AE-4684-9C95-5FB84A65F4E3}" type="datetimeFigureOut">
               <a:rPr lang="ko-KR" altLang="en-US" smtClean="0"/>
-              <a:t>2026-06-09</a:t>
+              <a:t>2026-06-11</a:t>
             </a:fld>
             <a:endParaRPr lang="ko-KR" altLang="en-US"/>
           </a:p>
@@ -2663,7 +2683,7 @@
           <a:p>
             <a:fld id="{7C37183A-56AE-4684-9C95-5FB84A65F4E3}" type="datetimeFigureOut">
               <a:rPr lang="ko-KR" altLang="en-US" smtClean="0"/>
-              <a:t>2026-06-09</a:t>
+              <a:t>2026-06-11</a:t>
             </a:fld>
             <a:endParaRPr lang="ko-KR" altLang="en-US"/>
           </a:p>
@@ -2777,7 +2797,7 @@
         <p:spPr>
           <a:xfrm>
             <a:off x="838200" y="365125"/>
-            <a:ext cx="10515600" cy="1325563"/>
+            <a:ext cx="10515600" cy="946439"/>
           </a:xfrm>
           <a:prstGeom prst="rect">
             <a:avLst/>
@@ -2790,7 +2810,7 @@
           <a:lstStyle/>
           <a:p>
             <a:r>
-              <a:rPr lang="ko-KR" altLang="en-US"/>
+              <a:rPr lang="ko-KR" altLang="en-US" dirty="0"/>
               <a:t>마스터 제목 스타일 편집</a:t>
             </a:r>
           </a:p>
@@ -2829,35 +2849,35 @@
           <a:p>
             <a:pPr lvl="0"/>
             <a:r>
-              <a:rPr lang="ko-KR" altLang="en-US"/>
+              <a:rPr lang="ko-KR" altLang="en-US" dirty="0"/>
               <a:t>마스터 텍스트 스타일을 편집하려면 클릭</a:t>
             </a:r>
           </a:p>
           <a:p>
             <a:pPr lvl="1"/>
             <a:r>
-              <a:rPr lang="ko-KR" altLang="en-US"/>
+              <a:rPr lang="ko-KR" altLang="en-US" dirty="0"/>
               <a:t>두 번째 수준</a:t>
             </a:r>
           </a:p>
           <a:p>
             <a:pPr lvl="2"/>
             <a:r>
-              <a:rPr lang="ko-KR" altLang="en-US"/>
+              <a:rPr lang="ko-KR" altLang="en-US" dirty="0"/>
               <a:t>세 번째 수준</a:t>
             </a:r>
           </a:p>
           <a:p>
             <a:pPr lvl="3"/>
             <a:r>
-              <a:rPr lang="ko-KR" altLang="en-US"/>
+              <a:rPr lang="ko-KR" altLang="en-US" dirty="0"/>
               <a:t>네 번째 수준</a:t>
             </a:r>
           </a:p>
           <a:p>
             <a:pPr lvl="4"/>
             <a:r>
-              <a:rPr lang="ko-KR" altLang="en-US"/>
+              <a:rPr lang="ko-KR" altLang="en-US" dirty="0"/>
               <a:t>다섯 번째 수준</a:t>
             </a:r>
           </a:p>
@@ -2904,7 +2924,7 @@
           <a:p>
             <a:fld id="{7C37183A-56AE-4684-9C95-5FB84A65F4E3}" type="datetimeFigureOut">
               <a:rPr lang="ko-KR" altLang="en-US" smtClean="0"/>
-              <a:t>2026-06-09</a:t>
+              <a:t>2026-06-11</a:t>
             </a:fld>
             <a:endParaRPr lang="ko-KR" altLang="en-US"/>
           </a:p>
@@ -3031,7 +3051,7 @@
           <a:spcPct val="0"/>
         </a:spcBef>
         <a:buNone/>
-        <a:defRPr sz="4400" kern="1200">
+        <a:defRPr sz="3600" kern="1200">
           <a:solidFill>
             <a:schemeClr val="tx1"/>
           </a:solidFill>
@@ -3051,7 +3071,7 @@
         </a:spcBef>
         <a:buFont typeface="Arial" panose="020B0604020202020204" pitchFamily="34" charset="0"/>
         <a:buChar char="•"/>
-        <a:defRPr sz="2800" kern="1200">
+        <a:defRPr sz="2000" kern="1200">
           <a:solidFill>
             <a:schemeClr val="tx1"/>
           </a:solidFill>
@@ -3069,7 +3089,7 @@
         </a:spcBef>
         <a:buFont typeface="Arial" panose="020B0604020202020204" pitchFamily="34" charset="0"/>
         <a:buChar char="•"/>
-        <a:defRPr sz="2400" kern="1200">
+        <a:defRPr sz="2000" kern="1200">
           <a:solidFill>
             <a:schemeClr val="tx1"/>
           </a:solidFill>
@@ -3087,7 +3107,7 @@
         </a:spcBef>
         <a:buFont typeface="Arial" panose="020B0604020202020204" pitchFamily="34" charset="0"/>
         <a:buChar char="•"/>
-        <a:defRPr sz="2000" kern="1200">
+        <a:defRPr sz="1800" kern="1200">
           <a:solidFill>
             <a:schemeClr val="tx1"/>
           </a:solidFill>
@@ -3339,35 +3359,149 @@
         </p:nvSpPr>
         <p:spPr/>
         <p:txBody>
+          <a:bodyPr>
+            <a:normAutofit/>
+          </a:bodyPr>
+          <a:lstStyle/>
+          <a:p>
+            <a:r>
+              <a:rPr lang="ko-KR" altLang="ko-KR" sz="4000" dirty="0" err="1">
+                <a:latin typeface="Segoe UI" panose="020B0502040204020203" pitchFamily="34" charset="0"/>
+              </a:rPr>
+              <a:t>A</a:t>
+            </a:r>
+            <a:r>
+              <a:rPr lang="ko-KR" altLang="ko-KR" sz="4000" dirty="0">
+                <a:latin typeface="Segoe UI" panose="020B0502040204020203" pitchFamily="34" charset="0"/>
+              </a:rPr>
+              <a:t> </a:t>
+            </a:r>
+            <a:r>
+              <a:rPr lang="ko-KR" altLang="ko-KR" sz="4000" dirty="0" err="1">
+                <a:latin typeface="Segoe UI" panose="020B0502040204020203" pitchFamily="34" charset="0"/>
+              </a:rPr>
+              <a:t>Unified</a:t>
+            </a:r>
+            <a:r>
+              <a:rPr lang="ko-KR" altLang="ko-KR" sz="4000" dirty="0">
+                <a:latin typeface="Segoe UI" panose="020B0502040204020203" pitchFamily="34" charset="0"/>
+              </a:rPr>
+              <a:t> </a:t>
+            </a:r>
+            <a:r>
+              <a:rPr lang="ko-KR" altLang="ko-KR" sz="4000" dirty="0" err="1">
+                <a:latin typeface="Segoe UI" panose="020B0502040204020203" pitchFamily="34" charset="0"/>
+              </a:rPr>
+              <a:t>Framework</a:t>
+            </a:r>
+            <a:r>
+              <a:rPr lang="ko-KR" altLang="ko-KR" sz="4000" dirty="0">
+                <a:latin typeface="Segoe UI" panose="020B0502040204020203" pitchFamily="34" charset="0"/>
+              </a:rPr>
+              <a:t> </a:t>
+            </a:r>
+            <a:br>
+              <a:rPr lang="en-US" altLang="ko-KR" sz="4000" dirty="0">
+                <a:latin typeface="Segoe UI" panose="020B0502040204020203" pitchFamily="34" charset="0"/>
+              </a:rPr>
+            </a:br>
+            <a:r>
+              <a:rPr lang="ko-KR" altLang="ko-KR" sz="4000" dirty="0" err="1">
+                <a:latin typeface="Segoe UI" panose="020B0502040204020203" pitchFamily="34" charset="0"/>
+              </a:rPr>
+              <a:t>for</a:t>
+            </a:r>
+            <a:r>
+              <a:rPr lang="ko-KR" altLang="ko-KR" sz="4000" dirty="0">
+                <a:latin typeface="Segoe UI" panose="020B0502040204020203" pitchFamily="34" charset="0"/>
+              </a:rPr>
+              <a:t> </a:t>
+            </a:r>
+            <a:r>
+              <a:rPr lang="ko-KR" altLang="ko-KR" sz="4000" dirty="0" err="1">
+                <a:latin typeface="Segoe UI" panose="020B0502040204020203" pitchFamily="34" charset="0"/>
+              </a:rPr>
+              <a:t>Graph</a:t>
+            </a:r>
+            <a:r>
+              <a:rPr lang="ko-KR" altLang="ko-KR" sz="4000" dirty="0">
+                <a:latin typeface="Segoe UI" panose="020B0502040204020203" pitchFamily="34" charset="0"/>
+              </a:rPr>
+              <a:t> </a:t>
+            </a:r>
+            <a:r>
+              <a:rPr lang="ko-KR" altLang="ko-KR" sz="4000" dirty="0" err="1">
+                <a:latin typeface="Segoe UI" panose="020B0502040204020203" pitchFamily="34" charset="0"/>
+              </a:rPr>
+              <a:t>Integration</a:t>
+            </a:r>
+            <a:r>
+              <a:rPr lang="ko-KR" altLang="ko-KR" sz="4000" dirty="0">
+                <a:latin typeface="Segoe UI" panose="020B0502040204020203" pitchFamily="34" charset="0"/>
+              </a:rPr>
+              <a:t> </a:t>
+            </a:r>
+            <a:r>
+              <a:rPr lang="ko-KR" altLang="ko-KR" sz="4000" dirty="0" err="1">
+                <a:latin typeface="Segoe UI" panose="020B0502040204020203" pitchFamily="34" charset="0"/>
+              </a:rPr>
+              <a:t>in</a:t>
+            </a:r>
+            <a:r>
+              <a:rPr lang="ko-KR" altLang="ko-KR" sz="4000" dirty="0">
+                <a:latin typeface="Segoe UI" panose="020B0502040204020203" pitchFamily="34" charset="0"/>
+              </a:rPr>
+              <a:t> </a:t>
+            </a:r>
+            <a:r>
+              <a:rPr lang="ko-KR" altLang="ko-KR" sz="4000" dirty="0" err="1">
+                <a:latin typeface="Segoe UI" panose="020B0502040204020203" pitchFamily="34" charset="0"/>
+              </a:rPr>
+              <a:t>Transformers</a:t>
+            </a:r>
+            <a:endParaRPr lang="ko-KR" altLang="en-US" sz="4000" dirty="0"/>
+          </a:p>
+        </p:txBody>
+      </p:sp>
+      <p:sp>
+        <p:nvSpPr>
+          <p:cNvPr id="3" name="부제목 2">
+            <a:extLst>
+              <a:ext uri="{FF2B5EF4-FFF2-40B4-BE49-F238E27FC236}">
+                <a16:creationId xmlns:a16="http://schemas.microsoft.com/office/drawing/2014/main" id="{4B38CEE7-5E64-64E5-14C9-D0B55E28049C}"/>
+              </a:ext>
+            </a:extLst>
+          </p:cNvPr>
+          <p:cNvSpPr>
+            <a:spLocks noGrp="1"/>
+          </p:cNvSpPr>
+          <p:nvPr>
+            <p:ph type="subTitle" idx="1"/>
+          </p:nvPr>
+        </p:nvSpPr>
+        <p:spPr>
+          <a:xfrm>
+            <a:off x="1524000" y="3991896"/>
+            <a:ext cx="9144000" cy="1265903"/>
+          </a:xfrm>
+        </p:spPr>
+        <p:txBody>
           <a:bodyPr/>
           <a:lstStyle/>
           <a:p>
-            <a:endParaRPr lang="ko-KR" altLang="en-US"/>
-          </a:p>
-        </p:txBody>
-      </p:sp>
-      <p:sp>
-        <p:nvSpPr>
-          <p:cNvPr id="3" name="부제목 2">
-            <a:extLst>
-              <a:ext uri="{FF2B5EF4-FFF2-40B4-BE49-F238E27FC236}">
-                <a16:creationId xmlns:a16="http://schemas.microsoft.com/office/drawing/2014/main" id="{4B38CEE7-5E64-64E5-14C9-D0B55E28049C}"/>
-              </a:ext>
-            </a:extLst>
-          </p:cNvPr>
-          <p:cNvSpPr>
-            <a:spLocks noGrp="1"/>
-          </p:cNvSpPr>
-          <p:nvPr>
-            <p:ph type="subTitle" idx="1"/>
-          </p:nvPr>
-        </p:nvSpPr>
-        <p:spPr/>
-        <p:txBody>
-          <a:bodyPr/>
-          <a:lstStyle/>
-          <a:p>
-            <a:endParaRPr lang="ko-KR" altLang="en-US"/>
+            <a:r>
+              <a:rPr lang="en-US" altLang="ko-KR" dirty="0"/>
+              <a:t>Minha</a:t>
+            </a:r>
+            <a:r>
+              <a:rPr lang="ko-KR" altLang="en-US" dirty="0"/>
+              <a:t> </a:t>
+            </a:r>
+            <a:r>
+              <a:rPr lang="en-US" altLang="ko-KR" dirty="0"/>
+              <a:t>Kwon</a:t>
+            </a:r>
+            <a:endParaRPr lang="ko-KR" altLang="en-US" dirty="0"/>
           </a:p>
         </p:txBody>
       </p:sp>
@@ -3375,6 +3509,3691 @@
     <p:extLst>
       <p:ext uri="{BB962C8B-B14F-4D97-AF65-F5344CB8AC3E}">
         <p14:creationId xmlns:p14="http://schemas.microsoft.com/office/powerpoint/2010/main" val="988224100"/>
+      </p:ext>
+    </p:extLst>
+  </p:cSld>
+  <p:clrMapOvr>
+    <a:masterClrMapping/>
+  </p:clrMapOvr>
+</p:sld>
+</file>
+
+<file path=ppt/slides/slide10.xml><?xml version="1.0" encoding="utf-8"?>
+<p:sld xmlns:a="http://schemas.openxmlformats.org/drawingml/2006/main" xmlns:r="http://schemas.openxmlformats.org/officeDocument/2006/relationships" xmlns:p="http://schemas.openxmlformats.org/presentationml/2006/main">
+  <p:cSld>
+    <p:spTree>
+      <p:nvGrpSpPr>
+        <p:cNvPr id="1" name="">
+          <a:extLst>
+            <a:ext uri="{FF2B5EF4-FFF2-40B4-BE49-F238E27FC236}">
+              <a16:creationId xmlns:a16="http://schemas.microsoft.com/office/drawing/2014/main" id="{D6FEE05C-768B-50C5-6555-D3317A210AA6}"/>
+            </a:ext>
+          </a:extLst>
+        </p:cNvPr>
+        <p:cNvGrpSpPr/>
+        <p:nvPr/>
+      </p:nvGrpSpPr>
+      <p:grpSpPr>
+        <a:xfrm>
+          <a:off x="0" y="0"/>
+          <a:ext cx="0" cy="0"/>
+          <a:chOff x="0" y="0"/>
+          <a:chExt cx="0" cy="0"/>
+        </a:xfrm>
+      </p:grpSpPr>
+      <p:sp>
+        <p:nvSpPr>
+          <p:cNvPr id="2" name="제목 1">
+            <a:extLst>
+              <a:ext uri="{FF2B5EF4-FFF2-40B4-BE49-F238E27FC236}">
+                <a16:creationId xmlns:a16="http://schemas.microsoft.com/office/drawing/2014/main" id="{89CE8072-FC78-57A4-7448-1A07D3D2CAC0}"/>
+              </a:ext>
+            </a:extLst>
+          </p:cNvPr>
+          <p:cNvSpPr>
+            <a:spLocks noGrp="1"/>
+          </p:cNvSpPr>
+          <p:nvPr>
+            <p:ph type="title"/>
+          </p:nvPr>
+        </p:nvSpPr>
+        <p:spPr/>
+        <p:txBody>
+          <a:bodyPr/>
+          <a:lstStyle/>
+          <a:p>
+            <a:r>
+              <a:rPr lang="ko-KR" altLang="ko-KR" dirty="0" err="1">
+                <a:latin typeface="Segoe UI" panose="020B0502040204020203" pitchFamily="34" charset="0"/>
+              </a:rPr>
+              <a:t>Graph</a:t>
+            </a:r>
+            <a:r>
+              <a:rPr lang="ko-KR" altLang="ko-KR" dirty="0">
+                <a:latin typeface="Segoe UI" panose="020B0502040204020203" pitchFamily="34" charset="0"/>
+              </a:rPr>
+              <a:t> </a:t>
+            </a:r>
+            <a:r>
+              <a:rPr lang="ko-KR" altLang="ko-KR" dirty="0" err="1">
+                <a:latin typeface="Segoe UI" panose="020B0502040204020203" pitchFamily="34" charset="0"/>
+              </a:rPr>
+              <a:t>Integration</a:t>
+            </a:r>
+            <a:r>
+              <a:rPr lang="ko-KR" altLang="ko-KR" dirty="0">
+                <a:latin typeface="Segoe UI" panose="020B0502040204020203" pitchFamily="34" charset="0"/>
+              </a:rPr>
+              <a:t> </a:t>
+            </a:r>
+            <a:r>
+              <a:rPr lang="ko-KR" altLang="ko-KR" dirty="0" err="1">
+                <a:latin typeface="Segoe UI" panose="020B0502040204020203" pitchFamily="34" charset="0"/>
+              </a:rPr>
+              <a:t>in</a:t>
+            </a:r>
+            <a:r>
+              <a:rPr lang="ko-KR" altLang="ko-KR" dirty="0">
+                <a:latin typeface="Segoe UI" panose="020B0502040204020203" pitchFamily="34" charset="0"/>
+              </a:rPr>
+              <a:t> </a:t>
+            </a:r>
+            <a:r>
+              <a:rPr lang="ko-KR" altLang="ko-KR" dirty="0" err="1">
+                <a:latin typeface="Segoe UI" panose="020B0502040204020203" pitchFamily="34" charset="0"/>
+              </a:rPr>
+              <a:t>Transformers</a:t>
+            </a:r>
+            <a:endParaRPr lang="ko-KR" altLang="en-US" dirty="0"/>
+          </a:p>
+        </p:txBody>
+      </p:sp>
+      <p:pic>
+        <p:nvPicPr>
+          <p:cNvPr id="5" name="내용 개체 틀 4">
+            <a:extLst>
+              <a:ext uri="{FF2B5EF4-FFF2-40B4-BE49-F238E27FC236}">
+                <a16:creationId xmlns:a16="http://schemas.microsoft.com/office/drawing/2014/main" id="{AFDDEA74-2C54-3130-804A-1EAEC47B71A5}"/>
+              </a:ext>
+            </a:extLst>
+          </p:cNvPr>
+          <p:cNvPicPr>
+            <a:picLocks noGrp="1" noChangeAspect="1"/>
+          </p:cNvPicPr>
+          <p:nvPr>
+            <p:ph idx="1"/>
+          </p:nvPr>
+        </p:nvPicPr>
+        <p:blipFill>
+          <a:blip r:embed="rId2">
+            <a:extLst>
+              <a:ext uri="{28A0092B-C50C-407E-A947-70E740481C1C}">
+                <a14:useLocalDpi xmlns:a14="http://schemas.microsoft.com/office/drawing/2010/main" val="0"/>
+              </a:ext>
+            </a:extLst>
+          </a:blip>
+          <a:stretch>
+            <a:fillRect/>
+          </a:stretch>
+        </p:blipFill>
+        <p:spPr>
+          <a:xfrm>
+            <a:off x="838200" y="2122671"/>
+            <a:ext cx="10515600" cy="3757246"/>
+          </a:xfrm>
+          <a:prstGeom prst="rect">
+            <a:avLst/>
+          </a:prstGeom>
+        </p:spPr>
+      </p:pic>
+    </p:spTree>
+    <p:extLst>
+      <p:ext uri="{BB962C8B-B14F-4D97-AF65-F5344CB8AC3E}">
+        <p14:creationId xmlns:p14="http://schemas.microsoft.com/office/powerpoint/2010/main" val="289401519"/>
+      </p:ext>
+    </p:extLst>
+  </p:cSld>
+  <p:clrMapOvr>
+    <a:masterClrMapping/>
+  </p:clrMapOvr>
+</p:sld>
+</file>
+
+<file path=ppt/slides/slide11.xml><?xml version="1.0" encoding="utf-8"?>
+<p:sld xmlns:a="http://schemas.openxmlformats.org/drawingml/2006/main" xmlns:r="http://schemas.openxmlformats.org/officeDocument/2006/relationships" xmlns:p="http://schemas.openxmlformats.org/presentationml/2006/main">
+  <p:cSld>
+    <p:spTree>
+      <p:nvGrpSpPr>
+        <p:cNvPr id="1" name="">
+          <a:extLst>
+            <a:ext uri="{FF2B5EF4-FFF2-40B4-BE49-F238E27FC236}">
+              <a16:creationId xmlns:a16="http://schemas.microsoft.com/office/drawing/2014/main" id="{DEAD304B-A995-D620-4AF5-CF23B45A423F}"/>
+            </a:ext>
+          </a:extLst>
+        </p:cNvPr>
+        <p:cNvGrpSpPr/>
+        <p:nvPr/>
+      </p:nvGrpSpPr>
+      <p:grpSpPr>
+        <a:xfrm>
+          <a:off x="0" y="0"/>
+          <a:ext cx="0" cy="0"/>
+          <a:chOff x="0" y="0"/>
+          <a:chExt cx="0" cy="0"/>
+        </a:xfrm>
+      </p:grpSpPr>
+      <p:sp>
+        <p:nvSpPr>
+          <p:cNvPr id="2" name="제목 1">
+            <a:extLst>
+              <a:ext uri="{FF2B5EF4-FFF2-40B4-BE49-F238E27FC236}">
+                <a16:creationId xmlns:a16="http://schemas.microsoft.com/office/drawing/2014/main" id="{7D275DD0-D5EB-7FF3-A0CD-758EA1EEDA0B}"/>
+              </a:ext>
+            </a:extLst>
+          </p:cNvPr>
+          <p:cNvSpPr>
+            <a:spLocks noGrp="1"/>
+          </p:cNvSpPr>
+          <p:nvPr>
+            <p:ph type="title"/>
+          </p:nvPr>
+        </p:nvSpPr>
+        <p:spPr/>
+        <p:txBody>
+          <a:bodyPr/>
+          <a:lstStyle/>
+          <a:p>
+            <a:r>
+              <a:rPr lang="ko-KR" altLang="ko-KR" dirty="0" err="1">
+                <a:latin typeface="Segoe UI" panose="020B0502040204020203" pitchFamily="34" charset="0"/>
+              </a:rPr>
+              <a:t>Graph</a:t>
+            </a:r>
+            <a:r>
+              <a:rPr lang="ko-KR" altLang="ko-KR" dirty="0">
+                <a:latin typeface="Segoe UI" panose="020B0502040204020203" pitchFamily="34" charset="0"/>
+              </a:rPr>
+              <a:t> </a:t>
+            </a:r>
+            <a:r>
+              <a:rPr lang="ko-KR" altLang="ko-KR" dirty="0" err="1">
+                <a:latin typeface="Segoe UI" panose="020B0502040204020203" pitchFamily="34" charset="0"/>
+              </a:rPr>
+              <a:t>Integration</a:t>
+            </a:r>
+            <a:r>
+              <a:rPr lang="ko-KR" altLang="ko-KR" dirty="0">
+                <a:latin typeface="Segoe UI" panose="020B0502040204020203" pitchFamily="34" charset="0"/>
+              </a:rPr>
+              <a:t> </a:t>
+            </a:r>
+            <a:r>
+              <a:rPr lang="ko-KR" altLang="ko-KR" dirty="0" err="1">
+                <a:latin typeface="Segoe UI" panose="020B0502040204020203" pitchFamily="34" charset="0"/>
+              </a:rPr>
+              <a:t>in</a:t>
+            </a:r>
+            <a:r>
+              <a:rPr lang="ko-KR" altLang="ko-KR" dirty="0">
+                <a:latin typeface="Segoe UI" panose="020B0502040204020203" pitchFamily="34" charset="0"/>
+              </a:rPr>
+              <a:t> </a:t>
+            </a:r>
+            <a:r>
+              <a:rPr lang="ko-KR" altLang="ko-KR" dirty="0" err="1">
+                <a:latin typeface="Segoe UI" panose="020B0502040204020203" pitchFamily="34" charset="0"/>
+              </a:rPr>
+              <a:t>Transformers</a:t>
+            </a:r>
+            <a:endParaRPr lang="ko-KR" altLang="en-US" dirty="0"/>
+          </a:p>
+        </p:txBody>
+      </p:sp>
+      <p:graphicFrame>
+        <p:nvGraphicFramePr>
+          <p:cNvPr id="4" name="내용 개체 틀 3">
+            <a:extLst>
+              <a:ext uri="{FF2B5EF4-FFF2-40B4-BE49-F238E27FC236}">
+                <a16:creationId xmlns:a16="http://schemas.microsoft.com/office/drawing/2014/main" id="{7D514CE5-873F-FF0A-DF1F-69E7501F556E}"/>
+              </a:ext>
+            </a:extLst>
+          </p:cNvPr>
+          <p:cNvGraphicFramePr>
+            <a:graphicFrameLocks noGrp="1"/>
+          </p:cNvGraphicFramePr>
+          <p:nvPr>
+            <p:ph idx="1"/>
+            <p:extLst>
+              <p:ext uri="{D42A27DB-BD31-4B8C-83A1-F6EECF244321}">
+                <p14:modId xmlns:p14="http://schemas.microsoft.com/office/powerpoint/2010/main" val="62978129"/>
+              </p:ext>
+            </p:extLst>
+          </p:nvPr>
+        </p:nvGraphicFramePr>
+        <p:xfrm>
+          <a:off x="678565" y="2141315"/>
+          <a:ext cx="10834870" cy="3970117"/>
+        </p:xfrm>
+        <a:graphic>
+          <a:graphicData uri="http://schemas.openxmlformats.org/drawingml/2006/table">
+            <a:tbl>
+              <a:tblPr firstRow="1" firstCol="1" bandRow="1">
+                <a:tableStyleId>{5C22544A-7EE6-4342-B048-85BDC9FD1C3A}</a:tableStyleId>
+              </a:tblPr>
+              <a:tblGrid>
+                <a:gridCol w="2836764">
+                  <a:extLst>
+                    <a:ext uri="{9D8B030D-6E8A-4147-A177-3AD203B41FA5}">
+                      <a16:colId xmlns:a16="http://schemas.microsoft.com/office/drawing/2014/main" val="3819763343"/>
+                    </a:ext>
+                  </a:extLst>
+                </a:gridCol>
+                <a:gridCol w="2997843">
+                  <a:extLst>
+                    <a:ext uri="{9D8B030D-6E8A-4147-A177-3AD203B41FA5}">
+                      <a16:colId xmlns:a16="http://schemas.microsoft.com/office/drawing/2014/main" val="1910606925"/>
+                    </a:ext>
+                  </a:extLst>
+                </a:gridCol>
+                <a:gridCol w="5000263">
+                  <a:extLst>
+                    <a:ext uri="{9D8B030D-6E8A-4147-A177-3AD203B41FA5}">
+                      <a16:colId xmlns:a16="http://schemas.microsoft.com/office/drawing/2014/main" val="3277269182"/>
+                    </a:ext>
+                  </a:extLst>
+                </a:gridCol>
+              </a:tblGrid>
+              <a:tr h="658109">
+                <a:tc>
+                  <a:txBody>
+                    <a:bodyPr/>
+                    <a:lstStyle/>
+                    <a:p>
+                      <a:pPr algn="ctr" latinLnBrk="1">
+                        <a:lnSpc>
+                          <a:spcPct val="150000"/>
+                        </a:lnSpc>
+                        <a:buNone/>
+                      </a:pPr>
+                      <a:r>
+                        <a:rPr lang="en-US" sz="1600" kern="100" dirty="0">
+                          <a:effectLst/>
+                        </a:rPr>
+                        <a:t>Strategy</a:t>
+                      </a:r>
+                      <a:endParaRPr lang="ko-KR" sz="1600" kern="100" dirty="0">
+                        <a:effectLst/>
+                        <a:latin typeface="맑은 고딕" panose="020B0503020000020004" pitchFamily="50" charset="-127"/>
+                        <a:ea typeface="맑은 고딕" panose="020B0503020000020004" pitchFamily="50" charset="-127"/>
+                        <a:cs typeface="Times New Roman" panose="02020603050405020304" pitchFamily="18" charset="0"/>
+                      </a:endParaRPr>
+                    </a:p>
+                  </a:txBody>
+                  <a:tcPr marL="68580" marR="68580" marT="0" marB="0" anchor="ctr"/>
+                </a:tc>
+                <a:tc>
+                  <a:txBody>
+                    <a:bodyPr/>
+                    <a:lstStyle/>
+                    <a:p>
+                      <a:pPr algn="ctr" latinLnBrk="1">
+                        <a:lnSpc>
+                          <a:spcPct val="150000"/>
+                        </a:lnSpc>
+                        <a:buNone/>
+                      </a:pPr>
+                      <a:r>
+                        <a:rPr lang="en-US" sz="1600" kern="100" dirty="0">
+                          <a:effectLst/>
+                        </a:rPr>
+                        <a:t>Integration Level</a:t>
+                      </a:r>
+                      <a:endParaRPr lang="ko-KR" sz="1600" kern="100" dirty="0">
+                        <a:effectLst/>
+                        <a:latin typeface="맑은 고딕" panose="020B0503020000020004" pitchFamily="50" charset="-127"/>
+                        <a:ea typeface="맑은 고딕" panose="020B0503020000020004" pitchFamily="50" charset="-127"/>
+                        <a:cs typeface="Times New Roman" panose="02020603050405020304" pitchFamily="18" charset="0"/>
+                      </a:endParaRPr>
+                    </a:p>
+                  </a:txBody>
+                  <a:tcPr marL="68580" marR="68580" marT="0" marB="0" anchor="ctr"/>
+                </a:tc>
+                <a:tc>
+                  <a:txBody>
+                    <a:bodyPr/>
+                    <a:lstStyle/>
+                    <a:p>
+                      <a:pPr algn="ctr" latinLnBrk="1">
+                        <a:lnSpc>
+                          <a:spcPct val="150000"/>
+                        </a:lnSpc>
+                        <a:buNone/>
+                      </a:pPr>
+                      <a:r>
+                        <a:rPr lang="en-US" sz="1600" kern="100">
+                          <a:effectLst/>
+                        </a:rPr>
+                        <a:t>Representative Examples</a:t>
+                      </a:r>
+                      <a:endParaRPr lang="ko-KR" sz="1600" kern="100">
+                        <a:effectLst/>
+                        <a:latin typeface="맑은 고딕" panose="020B0503020000020004" pitchFamily="50" charset="-127"/>
+                        <a:ea typeface="맑은 고딕" panose="020B0503020000020004" pitchFamily="50" charset="-127"/>
+                        <a:cs typeface="Times New Roman" panose="02020603050405020304" pitchFamily="18" charset="0"/>
+                      </a:endParaRPr>
+                    </a:p>
+                  </a:txBody>
+                  <a:tcPr marL="68580" marR="68580" marT="0" marB="0" anchor="ctr"/>
+                </a:tc>
+                <a:extLst>
+                  <a:ext uri="{0D108BD9-81ED-4DB2-BD59-A6C34878D82A}">
+                    <a16:rowId xmlns:a16="http://schemas.microsoft.com/office/drawing/2014/main" val="4032219245"/>
+                  </a:ext>
+                </a:extLst>
+              </a:tr>
+              <a:tr h="658109">
+                <a:tc>
+                  <a:txBody>
+                    <a:bodyPr/>
+                    <a:lstStyle/>
+                    <a:p>
+                      <a:pPr algn="ctr" latinLnBrk="1">
+                        <a:lnSpc>
+                          <a:spcPct val="150000"/>
+                        </a:lnSpc>
+                        <a:buNone/>
+                      </a:pPr>
+                      <a:r>
+                        <a:rPr lang="en-US" sz="1600" kern="100" dirty="0">
+                          <a:effectLst/>
+                        </a:rPr>
+                        <a:t>Graph Tokenization</a:t>
+                      </a:r>
+                      <a:endParaRPr lang="ko-KR" sz="1600" kern="100" dirty="0">
+                        <a:effectLst/>
+                        <a:latin typeface="맑은 고딕" panose="020B0503020000020004" pitchFamily="50" charset="-127"/>
+                        <a:ea typeface="맑은 고딕" panose="020B0503020000020004" pitchFamily="50" charset="-127"/>
+                        <a:cs typeface="Times New Roman" panose="02020603050405020304" pitchFamily="18" charset="0"/>
+                      </a:endParaRPr>
+                    </a:p>
+                  </a:txBody>
+                  <a:tcPr marL="68580" marR="68580" marT="0" marB="0" anchor="ctr"/>
+                </a:tc>
+                <a:tc>
+                  <a:txBody>
+                    <a:bodyPr/>
+                    <a:lstStyle/>
+                    <a:p>
+                      <a:pPr algn="ctr" latinLnBrk="1">
+                        <a:lnSpc>
+                          <a:spcPct val="150000"/>
+                        </a:lnSpc>
+                        <a:buNone/>
+                      </a:pPr>
+                      <a:r>
+                        <a:rPr lang="en-US" sz="1600" kern="100" dirty="0">
+                          <a:effectLst/>
+                        </a:rPr>
+                        <a:t>Pre-processing</a:t>
+                      </a:r>
+                      <a:endParaRPr lang="ko-KR" sz="1600" kern="100" dirty="0">
+                        <a:effectLst/>
+                        <a:latin typeface="맑은 고딕" panose="020B0503020000020004" pitchFamily="50" charset="-127"/>
+                        <a:ea typeface="맑은 고딕" panose="020B0503020000020004" pitchFamily="50" charset="-127"/>
+                        <a:cs typeface="Times New Roman" panose="02020603050405020304" pitchFamily="18" charset="0"/>
+                      </a:endParaRPr>
+                    </a:p>
+                  </a:txBody>
+                  <a:tcPr marL="68580" marR="68580" marT="0" marB="0" anchor="ctr"/>
+                </a:tc>
+                <a:tc>
+                  <a:txBody>
+                    <a:bodyPr/>
+                    <a:lstStyle/>
+                    <a:p>
+                      <a:pPr algn="ctr" latinLnBrk="1">
+                        <a:lnSpc>
+                          <a:spcPct val="150000"/>
+                        </a:lnSpc>
+                        <a:buNone/>
+                      </a:pPr>
+                      <a:r>
+                        <a:rPr lang="en-US" sz="1600" kern="100" dirty="0">
+                          <a:effectLst/>
+                        </a:rPr>
+                        <a:t>Node-token transformer, linearized graph models</a:t>
+                      </a:r>
+                      <a:endParaRPr lang="ko-KR" sz="1600" kern="100" dirty="0">
+                        <a:effectLst/>
+                        <a:latin typeface="맑은 고딕" panose="020B0503020000020004" pitchFamily="50" charset="-127"/>
+                        <a:ea typeface="맑은 고딕" panose="020B0503020000020004" pitchFamily="50" charset="-127"/>
+                        <a:cs typeface="Times New Roman" panose="02020603050405020304" pitchFamily="18" charset="0"/>
+                      </a:endParaRPr>
+                    </a:p>
+                  </a:txBody>
+                  <a:tcPr marL="68580" marR="68580" marT="0" marB="0" anchor="ctr"/>
+                </a:tc>
+                <a:extLst>
+                  <a:ext uri="{0D108BD9-81ED-4DB2-BD59-A6C34878D82A}">
+                    <a16:rowId xmlns:a16="http://schemas.microsoft.com/office/drawing/2014/main" val="3281645520"/>
+                  </a:ext>
+                </a:extLst>
+              </a:tr>
+              <a:tr h="658109">
+                <a:tc>
+                  <a:txBody>
+                    <a:bodyPr/>
+                    <a:lstStyle/>
+                    <a:p>
+                      <a:pPr algn="ctr" latinLnBrk="1">
+                        <a:lnSpc>
+                          <a:spcPct val="150000"/>
+                        </a:lnSpc>
+                        <a:buNone/>
+                      </a:pPr>
+                      <a:r>
+                        <a:rPr lang="en-US" sz="1600" kern="100" dirty="0">
+                          <a:effectLst/>
+                        </a:rPr>
+                        <a:t>Input-level Integration</a:t>
+                      </a:r>
+                      <a:endParaRPr lang="ko-KR" sz="1600" kern="100" dirty="0">
+                        <a:effectLst/>
+                        <a:latin typeface="맑은 고딕" panose="020B0503020000020004" pitchFamily="50" charset="-127"/>
+                        <a:ea typeface="맑은 고딕" panose="020B0503020000020004" pitchFamily="50" charset="-127"/>
+                        <a:cs typeface="Times New Roman" panose="02020603050405020304" pitchFamily="18" charset="0"/>
+                      </a:endParaRPr>
+                    </a:p>
+                  </a:txBody>
+                  <a:tcPr marL="68580" marR="68580" marT="0" marB="0" anchor="ctr"/>
+                </a:tc>
+                <a:tc>
+                  <a:txBody>
+                    <a:bodyPr/>
+                    <a:lstStyle/>
+                    <a:p>
+                      <a:pPr algn="ctr" latinLnBrk="1">
+                        <a:lnSpc>
+                          <a:spcPct val="150000"/>
+                        </a:lnSpc>
+                        <a:buNone/>
+                      </a:pPr>
+                      <a:r>
+                        <a:rPr lang="en-US" sz="1600" kern="100" dirty="0">
+                          <a:effectLst/>
+                        </a:rPr>
+                        <a:t>Input Embedding</a:t>
+                      </a:r>
+                      <a:endParaRPr lang="ko-KR" sz="1600" kern="100" dirty="0">
+                        <a:effectLst/>
+                        <a:latin typeface="맑은 고딕" panose="020B0503020000020004" pitchFamily="50" charset="-127"/>
+                        <a:ea typeface="맑은 고딕" panose="020B0503020000020004" pitchFamily="50" charset="-127"/>
+                        <a:cs typeface="Times New Roman" panose="02020603050405020304" pitchFamily="18" charset="0"/>
+                      </a:endParaRPr>
+                    </a:p>
+                  </a:txBody>
+                  <a:tcPr marL="68580" marR="68580" marT="0" marB="0" anchor="ctr"/>
+                </a:tc>
+                <a:tc>
+                  <a:txBody>
+                    <a:bodyPr/>
+                    <a:lstStyle/>
+                    <a:p>
+                      <a:pPr algn="ctr" latinLnBrk="1">
+                        <a:lnSpc>
+                          <a:spcPct val="150000"/>
+                        </a:lnSpc>
+                        <a:buNone/>
+                      </a:pPr>
+                      <a:r>
+                        <a:rPr lang="en-US" sz="1600" kern="100" dirty="0">
+                          <a:effectLst/>
+                        </a:rPr>
+                        <a:t>PE-based models, feature augmentation</a:t>
+                      </a:r>
+                      <a:endParaRPr lang="ko-KR" sz="1600" kern="100" dirty="0">
+                        <a:effectLst/>
+                        <a:latin typeface="맑은 고딕" panose="020B0503020000020004" pitchFamily="50" charset="-127"/>
+                        <a:ea typeface="맑은 고딕" panose="020B0503020000020004" pitchFamily="50" charset="-127"/>
+                        <a:cs typeface="Times New Roman" panose="02020603050405020304" pitchFamily="18" charset="0"/>
+                      </a:endParaRPr>
+                    </a:p>
+                  </a:txBody>
+                  <a:tcPr marL="68580" marR="68580" marT="0" marB="0" anchor="ctr"/>
+                </a:tc>
+                <a:extLst>
+                  <a:ext uri="{0D108BD9-81ED-4DB2-BD59-A6C34878D82A}">
+                    <a16:rowId xmlns:a16="http://schemas.microsoft.com/office/drawing/2014/main" val="2468496733"/>
+                  </a:ext>
+                </a:extLst>
+              </a:tr>
+              <a:tr h="658109">
+                <a:tc>
+                  <a:txBody>
+                    <a:bodyPr/>
+                    <a:lstStyle/>
+                    <a:p>
+                      <a:pPr algn="ctr" latinLnBrk="1">
+                        <a:lnSpc>
+                          <a:spcPct val="150000"/>
+                        </a:lnSpc>
+                        <a:buNone/>
+                      </a:pPr>
+                      <a:r>
+                        <a:rPr lang="en-US" sz="1600" kern="100">
+                          <a:effectLst/>
+                        </a:rPr>
+                        <a:t>Attention-level Integration</a:t>
+                      </a:r>
+                      <a:endParaRPr lang="ko-KR" sz="1600" kern="100">
+                        <a:effectLst/>
+                        <a:latin typeface="맑은 고딕" panose="020B0503020000020004" pitchFamily="50" charset="-127"/>
+                        <a:ea typeface="맑은 고딕" panose="020B0503020000020004" pitchFamily="50" charset="-127"/>
+                        <a:cs typeface="Times New Roman" panose="02020603050405020304" pitchFamily="18" charset="0"/>
+                      </a:endParaRPr>
+                    </a:p>
+                  </a:txBody>
+                  <a:tcPr marL="68580" marR="68580" marT="0" marB="0" anchor="ctr"/>
+                </a:tc>
+                <a:tc>
+                  <a:txBody>
+                    <a:bodyPr/>
+                    <a:lstStyle/>
+                    <a:p>
+                      <a:pPr algn="ctr" latinLnBrk="1">
+                        <a:lnSpc>
+                          <a:spcPct val="150000"/>
+                        </a:lnSpc>
+                        <a:buNone/>
+                      </a:pPr>
+                      <a:r>
+                        <a:rPr lang="en-US" sz="1600" kern="100" dirty="0">
+                          <a:effectLst/>
+                        </a:rPr>
+                        <a:t>Attention Score</a:t>
+                      </a:r>
+                      <a:endParaRPr lang="ko-KR" sz="1600" kern="100" dirty="0">
+                        <a:effectLst/>
+                        <a:latin typeface="맑은 고딕" panose="020B0503020000020004" pitchFamily="50" charset="-127"/>
+                        <a:ea typeface="맑은 고딕" panose="020B0503020000020004" pitchFamily="50" charset="-127"/>
+                        <a:cs typeface="Times New Roman" panose="02020603050405020304" pitchFamily="18" charset="0"/>
+                      </a:endParaRPr>
+                    </a:p>
+                  </a:txBody>
+                  <a:tcPr marL="68580" marR="68580" marT="0" marB="0" anchor="ctr"/>
+                </a:tc>
+                <a:tc>
+                  <a:txBody>
+                    <a:bodyPr/>
+                    <a:lstStyle/>
+                    <a:p>
+                      <a:pPr algn="ctr" latinLnBrk="1">
+                        <a:lnSpc>
+                          <a:spcPct val="150000"/>
+                        </a:lnSpc>
+                        <a:buNone/>
+                      </a:pPr>
+                      <a:r>
+                        <a:rPr lang="en-US" sz="1600" kern="100" dirty="0" err="1">
+                          <a:effectLst/>
+                        </a:rPr>
+                        <a:t>Graphormer</a:t>
+                      </a:r>
+                      <a:r>
+                        <a:rPr lang="en-US" sz="1600" kern="100" dirty="0">
+                          <a:effectLst/>
+                        </a:rPr>
+                        <a:t> </a:t>
+                      </a:r>
+                      <a:endParaRPr lang="ko-KR" sz="1600" kern="100" dirty="0">
+                        <a:effectLst/>
+                        <a:latin typeface="맑은 고딕" panose="020B0503020000020004" pitchFamily="50" charset="-127"/>
+                        <a:ea typeface="맑은 고딕" panose="020B0503020000020004" pitchFamily="50" charset="-127"/>
+                        <a:cs typeface="Times New Roman" panose="02020603050405020304" pitchFamily="18" charset="0"/>
+                      </a:endParaRPr>
+                    </a:p>
+                  </a:txBody>
+                  <a:tcPr marL="68580" marR="68580" marT="0" marB="0" anchor="ctr"/>
+                </a:tc>
+                <a:extLst>
+                  <a:ext uri="{0D108BD9-81ED-4DB2-BD59-A6C34878D82A}">
+                    <a16:rowId xmlns:a16="http://schemas.microsoft.com/office/drawing/2014/main" val="3897676288"/>
+                  </a:ext>
+                </a:extLst>
+              </a:tr>
+              <a:tr h="658109">
+                <a:tc>
+                  <a:txBody>
+                    <a:bodyPr/>
+                    <a:lstStyle/>
+                    <a:p>
+                      <a:pPr algn="ctr" latinLnBrk="1">
+                        <a:lnSpc>
+                          <a:spcPct val="150000"/>
+                        </a:lnSpc>
+                        <a:buNone/>
+                      </a:pPr>
+                      <a:r>
+                        <a:rPr lang="en-US" sz="1600" kern="100">
+                          <a:effectLst/>
+                        </a:rPr>
+                        <a:t>QKV-level Integration</a:t>
+                      </a:r>
+                      <a:endParaRPr lang="ko-KR" sz="1600" kern="100">
+                        <a:effectLst/>
+                        <a:latin typeface="맑은 고딕" panose="020B0503020000020004" pitchFamily="50" charset="-127"/>
+                        <a:ea typeface="맑은 고딕" panose="020B0503020000020004" pitchFamily="50" charset="-127"/>
+                        <a:cs typeface="Times New Roman" panose="02020603050405020304" pitchFamily="18" charset="0"/>
+                      </a:endParaRPr>
+                    </a:p>
+                  </a:txBody>
+                  <a:tcPr marL="68580" marR="68580" marT="0" marB="0" anchor="ctr"/>
+                </a:tc>
+                <a:tc>
+                  <a:txBody>
+                    <a:bodyPr/>
+                    <a:lstStyle/>
+                    <a:p>
+                      <a:pPr algn="ctr" latinLnBrk="1">
+                        <a:lnSpc>
+                          <a:spcPct val="150000"/>
+                        </a:lnSpc>
+                        <a:buNone/>
+                      </a:pPr>
+                      <a:r>
+                        <a:rPr lang="en-US" sz="1600" kern="100" dirty="0">
+                          <a:effectLst/>
+                        </a:rPr>
+                        <a:t>Attention Representation</a:t>
+                      </a:r>
+                      <a:endParaRPr lang="ko-KR" sz="1600" kern="100" dirty="0">
+                        <a:effectLst/>
+                        <a:latin typeface="맑은 고딕" panose="020B0503020000020004" pitchFamily="50" charset="-127"/>
+                        <a:ea typeface="맑은 고딕" panose="020B0503020000020004" pitchFamily="50" charset="-127"/>
+                        <a:cs typeface="Times New Roman" panose="02020603050405020304" pitchFamily="18" charset="0"/>
+                      </a:endParaRPr>
+                    </a:p>
+                  </a:txBody>
+                  <a:tcPr marL="68580" marR="68580" marT="0" marB="0" anchor="ctr"/>
+                </a:tc>
+                <a:tc>
+                  <a:txBody>
+                    <a:bodyPr/>
+                    <a:lstStyle/>
+                    <a:p>
+                      <a:pPr algn="ctr" latinLnBrk="1">
+                        <a:lnSpc>
+                          <a:spcPct val="150000"/>
+                        </a:lnSpc>
+                        <a:buNone/>
+                      </a:pPr>
+                      <a:r>
+                        <a:rPr lang="en-US" sz="1600" kern="100" dirty="0">
+                          <a:effectLst/>
+                        </a:rPr>
+                        <a:t>Relational Attention, edge-aware QKV</a:t>
+                      </a:r>
+                      <a:endParaRPr lang="ko-KR" sz="1600" kern="100" dirty="0">
+                        <a:effectLst/>
+                        <a:latin typeface="맑은 고딕" panose="020B0503020000020004" pitchFamily="50" charset="-127"/>
+                        <a:ea typeface="맑은 고딕" panose="020B0503020000020004" pitchFamily="50" charset="-127"/>
+                        <a:cs typeface="Times New Roman" panose="02020603050405020304" pitchFamily="18" charset="0"/>
+                      </a:endParaRPr>
+                    </a:p>
+                  </a:txBody>
+                  <a:tcPr marL="68580" marR="68580" marT="0" marB="0" anchor="ctr"/>
+                </a:tc>
+                <a:extLst>
+                  <a:ext uri="{0D108BD9-81ED-4DB2-BD59-A6C34878D82A}">
+                    <a16:rowId xmlns:a16="http://schemas.microsoft.com/office/drawing/2014/main" val="2776702727"/>
+                  </a:ext>
+                </a:extLst>
+              </a:tr>
+              <a:tr h="679572">
+                <a:tc>
+                  <a:txBody>
+                    <a:bodyPr/>
+                    <a:lstStyle/>
+                    <a:p>
+                      <a:pPr algn="ctr" latinLnBrk="1">
+                        <a:lnSpc>
+                          <a:spcPct val="150000"/>
+                        </a:lnSpc>
+                        <a:buNone/>
+                      </a:pPr>
+                      <a:r>
+                        <a:rPr lang="en-US" sz="1600" kern="100">
+                          <a:effectLst/>
+                        </a:rPr>
+                        <a:t>Edge-level Integration</a:t>
+                      </a:r>
+                      <a:endParaRPr lang="ko-KR" sz="1600" kern="100">
+                        <a:effectLst/>
+                        <a:latin typeface="맑은 고딕" panose="020B0503020000020004" pitchFamily="50" charset="-127"/>
+                        <a:ea typeface="맑은 고딕" panose="020B0503020000020004" pitchFamily="50" charset="-127"/>
+                        <a:cs typeface="Times New Roman" panose="02020603050405020304" pitchFamily="18" charset="0"/>
+                      </a:endParaRPr>
+                    </a:p>
+                  </a:txBody>
+                  <a:tcPr marL="68580" marR="68580" marT="0" marB="0" anchor="ctr"/>
+                </a:tc>
+                <a:tc>
+                  <a:txBody>
+                    <a:bodyPr/>
+                    <a:lstStyle/>
+                    <a:p>
+                      <a:pPr algn="ctr" latinLnBrk="1">
+                        <a:lnSpc>
+                          <a:spcPct val="150000"/>
+                        </a:lnSpc>
+                        <a:buNone/>
+                      </a:pPr>
+                      <a:r>
+                        <a:rPr lang="en-US" sz="1600" kern="100" dirty="0">
+                          <a:effectLst/>
+                        </a:rPr>
+                        <a:t>Full Model (Node + Edge)</a:t>
+                      </a:r>
+                      <a:endParaRPr lang="ko-KR" sz="1600" kern="100" dirty="0">
+                        <a:effectLst/>
+                        <a:latin typeface="맑은 고딕" panose="020B0503020000020004" pitchFamily="50" charset="-127"/>
+                        <a:ea typeface="맑은 고딕" panose="020B0503020000020004" pitchFamily="50" charset="-127"/>
+                        <a:cs typeface="Times New Roman" panose="02020603050405020304" pitchFamily="18" charset="0"/>
+                      </a:endParaRPr>
+                    </a:p>
+                  </a:txBody>
+                  <a:tcPr marL="68580" marR="68580" marT="0" marB="0" anchor="ctr"/>
+                </a:tc>
+                <a:tc>
+                  <a:txBody>
+                    <a:bodyPr/>
+                    <a:lstStyle/>
+                    <a:p>
+                      <a:pPr algn="ctr" latinLnBrk="1">
+                        <a:lnSpc>
+                          <a:spcPct val="150000"/>
+                        </a:lnSpc>
+                        <a:buNone/>
+                      </a:pPr>
+                      <a:r>
+                        <a:rPr lang="en-US" sz="1600" kern="100" dirty="0">
+                          <a:effectLst/>
+                        </a:rPr>
+                        <a:t>Relational Transformer, edge update models</a:t>
+                      </a:r>
+                      <a:endParaRPr lang="ko-KR" sz="1600" kern="100" dirty="0">
+                        <a:effectLst/>
+                        <a:latin typeface="맑은 고딕" panose="020B0503020000020004" pitchFamily="50" charset="-127"/>
+                        <a:ea typeface="맑은 고딕" panose="020B0503020000020004" pitchFamily="50" charset="-127"/>
+                        <a:cs typeface="Times New Roman" panose="02020603050405020304" pitchFamily="18" charset="0"/>
+                      </a:endParaRPr>
+                    </a:p>
+                  </a:txBody>
+                  <a:tcPr marL="68580" marR="68580" marT="0" marB="0" anchor="ctr"/>
+                </a:tc>
+                <a:extLst>
+                  <a:ext uri="{0D108BD9-81ED-4DB2-BD59-A6C34878D82A}">
+                    <a16:rowId xmlns:a16="http://schemas.microsoft.com/office/drawing/2014/main" val="824631184"/>
+                  </a:ext>
+                </a:extLst>
+              </a:tr>
+            </a:tbl>
+          </a:graphicData>
+        </a:graphic>
+      </p:graphicFrame>
+    </p:spTree>
+    <p:extLst>
+      <p:ext uri="{BB962C8B-B14F-4D97-AF65-F5344CB8AC3E}">
+        <p14:creationId xmlns:p14="http://schemas.microsoft.com/office/powerpoint/2010/main" val="3600298602"/>
+      </p:ext>
+    </p:extLst>
+  </p:cSld>
+  <p:clrMapOvr>
+    <a:masterClrMapping/>
+  </p:clrMapOvr>
+</p:sld>
+</file>
+
+<file path=ppt/slides/slide12.xml><?xml version="1.0" encoding="utf-8"?>
+<p:sld xmlns:a="http://schemas.openxmlformats.org/drawingml/2006/main" xmlns:r="http://schemas.openxmlformats.org/officeDocument/2006/relationships" xmlns:p="http://schemas.openxmlformats.org/presentationml/2006/main">
+  <p:cSld>
+    <p:spTree>
+      <p:nvGrpSpPr>
+        <p:cNvPr id="1" name="">
+          <a:extLst>
+            <a:ext uri="{FF2B5EF4-FFF2-40B4-BE49-F238E27FC236}">
+              <a16:creationId xmlns:a16="http://schemas.microsoft.com/office/drawing/2014/main" id="{C51BCD83-2E65-2041-9EC4-1CB9A0E56E9F}"/>
+            </a:ext>
+          </a:extLst>
+        </p:cNvPr>
+        <p:cNvGrpSpPr/>
+        <p:nvPr/>
+      </p:nvGrpSpPr>
+      <p:grpSpPr>
+        <a:xfrm>
+          <a:off x="0" y="0"/>
+          <a:ext cx="0" cy="0"/>
+          <a:chOff x="0" y="0"/>
+          <a:chExt cx="0" cy="0"/>
+        </a:xfrm>
+      </p:grpSpPr>
+      <p:sp>
+        <p:nvSpPr>
+          <p:cNvPr id="2" name="제목 1">
+            <a:extLst>
+              <a:ext uri="{FF2B5EF4-FFF2-40B4-BE49-F238E27FC236}">
+                <a16:creationId xmlns:a16="http://schemas.microsoft.com/office/drawing/2014/main" id="{A1BB274A-3EFA-1AA0-FE9D-5D795A10E616}"/>
+              </a:ext>
+            </a:extLst>
+          </p:cNvPr>
+          <p:cNvSpPr>
+            <a:spLocks noGrp="1"/>
+          </p:cNvSpPr>
+          <p:nvPr>
+            <p:ph type="title"/>
+          </p:nvPr>
+        </p:nvSpPr>
+        <p:spPr/>
+        <p:txBody>
+          <a:bodyPr/>
+          <a:lstStyle/>
+          <a:p>
+            <a:r>
+              <a:rPr lang="ko-KR" altLang="ko-KR" dirty="0" err="1">
+                <a:latin typeface="Segoe UI" panose="020B0502040204020203" pitchFamily="34" charset="0"/>
+              </a:rPr>
+              <a:t>Graph</a:t>
+            </a:r>
+            <a:r>
+              <a:rPr lang="ko-KR" altLang="ko-KR" dirty="0">
+                <a:latin typeface="Segoe UI" panose="020B0502040204020203" pitchFamily="34" charset="0"/>
+              </a:rPr>
+              <a:t> </a:t>
+            </a:r>
+            <a:r>
+              <a:rPr lang="ko-KR" altLang="ko-KR" dirty="0" err="1">
+                <a:latin typeface="Segoe UI" panose="020B0502040204020203" pitchFamily="34" charset="0"/>
+              </a:rPr>
+              <a:t>Integration</a:t>
+            </a:r>
+            <a:r>
+              <a:rPr lang="ko-KR" altLang="ko-KR" dirty="0">
+                <a:latin typeface="Segoe UI" panose="020B0502040204020203" pitchFamily="34" charset="0"/>
+              </a:rPr>
+              <a:t> </a:t>
+            </a:r>
+            <a:r>
+              <a:rPr lang="ko-KR" altLang="ko-KR" dirty="0" err="1">
+                <a:latin typeface="Segoe UI" panose="020B0502040204020203" pitchFamily="34" charset="0"/>
+              </a:rPr>
+              <a:t>in</a:t>
+            </a:r>
+            <a:r>
+              <a:rPr lang="ko-KR" altLang="ko-KR" dirty="0">
+                <a:latin typeface="Segoe UI" panose="020B0502040204020203" pitchFamily="34" charset="0"/>
+              </a:rPr>
+              <a:t> </a:t>
+            </a:r>
+            <a:r>
+              <a:rPr lang="ko-KR" altLang="ko-KR" dirty="0" err="1">
+                <a:latin typeface="Segoe UI" panose="020B0502040204020203" pitchFamily="34" charset="0"/>
+              </a:rPr>
+              <a:t>Transformers</a:t>
+            </a:r>
+            <a:endParaRPr lang="ko-KR" altLang="en-US" dirty="0"/>
+          </a:p>
+        </p:txBody>
+      </p:sp>
+      <p:pic>
+        <p:nvPicPr>
+          <p:cNvPr id="5" name="내용 개체 틀 4">
+            <a:extLst>
+              <a:ext uri="{FF2B5EF4-FFF2-40B4-BE49-F238E27FC236}">
+                <a16:creationId xmlns:a16="http://schemas.microsoft.com/office/drawing/2014/main" id="{7C2CC655-ED4C-A933-67FB-686E1D61C977}"/>
+              </a:ext>
+            </a:extLst>
+          </p:cNvPr>
+          <p:cNvPicPr>
+            <a:picLocks noGrp="1" noChangeAspect="1"/>
+          </p:cNvPicPr>
+          <p:nvPr>
+            <p:ph idx="1"/>
+          </p:nvPr>
+        </p:nvPicPr>
+        <p:blipFill>
+          <a:blip r:embed="rId2">
+            <a:extLst>
+              <a:ext uri="{28A0092B-C50C-407E-A947-70E740481C1C}">
+                <a14:useLocalDpi xmlns:a14="http://schemas.microsoft.com/office/drawing/2010/main" val="0"/>
+              </a:ext>
+            </a:extLst>
+          </a:blip>
+          <a:stretch>
+            <a:fillRect/>
+          </a:stretch>
+        </p:blipFill>
+        <p:spPr>
+          <a:xfrm>
+            <a:off x="1678361" y="1938235"/>
+            <a:ext cx="8835278" cy="4554640"/>
+          </a:xfrm>
+          <a:prstGeom prst="rect">
+            <a:avLst/>
+          </a:prstGeom>
+        </p:spPr>
+      </p:pic>
+    </p:spTree>
+    <p:extLst>
+      <p:ext uri="{BB962C8B-B14F-4D97-AF65-F5344CB8AC3E}">
+        <p14:creationId xmlns:p14="http://schemas.microsoft.com/office/powerpoint/2010/main" val="2587993003"/>
+      </p:ext>
+    </p:extLst>
+  </p:cSld>
+  <p:clrMapOvr>
+    <a:masterClrMapping/>
+  </p:clrMapOvr>
+</p:sld>
+</file>
+
+<file path=ppt/slides/slide13.xml><?xml version="1.0" encoding="utf-8"?>
+<p:sld xmlns:a="http://schemas.openxmlformats.org/drawingml/2006/main" xmlns:r="http://schemas.openxmlformats.org/officeDocument/2006/relationships" xmlns:p="http://schemas.openxmlformats.org/presentationml/2006/main">
+  <p:cSld>
+    <p:spTree>
+      <p:nvGrpSpPr>
+        <p:cNvPr id="1" name=""/>
+        <p:cNvGrpSpPr/>
+        <p:nvPr/>
+      </p:nvGrpSpPr>
+      <p:grpSpPr>
+        <a:xfrm>
+          <a:off x="0" y="0"/>
+          <a:ext cx="0" cy="0"/>
+          <a:chOff x="0" y="0"/>
+          <a:chExt cx="0" cy="0"/>
+        </a:xfrm>
+      </p:grpSpPr>
+      <p:sp>
+        <p:nvSpPr>
+          <p:cNvPr id="2" name="제목 1">
+            <a:extLst>
+              <a:ext uri="{FF2B5EF4-FFF2-40B4-BE49-F238E27FC236}">
+                <a16:creationId xmlns:a16="http://schemas.microsoft.com/office/drawing/2014/main" id="{DFB47F02-EE40-E211-1019-33AF4B50BAD6}"/>
+              </a:ext>
+            </a:extLst>
+          </p:cNvPr>
+          <p:cNvSpPr>
+            <a:spLocks noGrp="1"/>
+          </p:cNvSpPr>
+          <p:nvPr>
+            <p:ph type="title"/>
+          </p:nvPr>
+        </p:nvSpPr>
+        <p:spPr/>
+        <p:txBody>
+          <a:bodyPr/>
+          <a:lstStyle/>
+          <a:p>
+            <a:r>
+              <a:rPr lang="en-US" altLang="ko-KR" dirty="0"/>
+              <a:t>Case Analysis </a:t>
+            </a:r>
+            <a:endParaRPr lang="ko-KR" altLang="en-US" dirty="0"/>
+          </a:p>
+        </p:txBody>
+      </p:sp>
+      <p:graphicFrame>
+        <p:nvGraphicFramePr>
+          <p:cNvPr id="4" name="내용 개체 틀 3">
+            <a:extLst>
+              <a:ext uri="{FF2B5EF4-FFF2-40B4-BE49-F238E27FC236}">
+                <a16:creationId xmlns:a16="http://schemas.microsoft.com/office/drawing/2014/main" id="{14145FF8-70EF-DAB3-3AFA-575A9355038E}"/>
+              </a:ext>
+            </a:extLst>
+          </p:cNvPr>
+          <p:cNvGraphicFramePr>
+            <a:graphicFrameLocks noGrp="1"/>
+          </p:cNvGraphicFramePr>
+          <p:nvPr>
+            <p:ph idx="1"/>
+            <p:extLst>
+              <p:ext uri="{D42A27DB-BD31-4B8C-83A1-F6EECF244321}">
+                <p14:modId xmlns:p14="http://schemas.microsoft.com/office/powerpoint/2010/main" val="905583556"/>
+              </p:ext>
+            </p:extLst>
+          </p:nvPr>
+        </p:nvGraphicFramePr>
+        <p:xfrm>
+          <a:off x="493854" y="2268639"/>
+          <a:ext cx="11289174" cy="4102477"/>
+        </p:xfrm>
+        <a:graphic>
+          <a:graphicData uri="http://schemas.openxmlformats.org/drawingml/2006/table">
+            <a:tbl>
+              <a:tblPr firstRow="1" firstCol="1" bandRow="1">
+                <a:tableStyleId>{5C22544A-7EE6-4342-B048-85BDC9FD1C3A}</a:tableStyleId>
+              </a:tblPr>
+              <a:tblGrid>
+                <a:gridCol w="1469985">
+                  <a:extLst>
+                    <a:ext uri="{9D8B030D-6E8A-4147-A177-3AD203B41FA5}">
+                      <a16:colId xmlns:a16="http://schemas.microsoft.com/office/drawing/2014/main" val="3257678538"/>
+                    </a:ext>
+                  </a:extLst>
+                </a:gridCol>
+                <a:gridCol w="2187615">
+                  <a:extLst>
+                    <a:ext uri="{9D8B030D-6E8A-4147-A177-3AD203B41FA5}">
+                      <a16:colId xmlns:a16="http://schemas.microsoft.com/office/drawing/2014/main" val="3328034351"/>
+                    </a:ext>
+                  </a:extLst>
+                </a:gridCol>
+                <a:gridCol w="1770927">
+                  <a:extLst>
+                    <a:ext uri="{9D8B030D-6E8A-4147-A177-3AD203B41FA5}">
+                      <a16:colId xmlns:a16="http://schemas.microsoft.com/office/drawing/2014/main" val="3205993233"/>
+                    </a:ext>
+                  </a:extLst>
+                </a:gridCol>
+                <a:gridCol w="2176040">
+                  <a:extLst>
+                    <a:ext uri="{9D8B030D-6E8A-4147-A177-3AD203B41FA5}">
+                      <a16:colId xmlns:a16="http://schemas.microsoft.com/office/drawing/2014/main" val="1724743215"/>
+                    </a:ext>
+                  </a:extLst>
+                </a:gridCol>
+                <a:gridCol w="2152892">
+                  <a:extLst>
+                    <a:ext uri="{9D8B030D-6E8A-4147-A177-3AD203B41FA5}">
+                      <a16:colId xmlns:a16="http://schemas.microsoft.com/office/drawing/2014/main" val="910795097"/>
+                    </a:ext>
+                  </a:extLst>
+                </a:gridCol>
+                <a:gridCol w="1531715">
+                  <a:extLst>
+                    <a:ext uri="{9D8B030D-6E8A-4147-A177-3AD203B41FA5}">
+                      <a16:colId xmlns:a16="http://schemas.microsoft.com/office/drawing/2014/main" val="733492095"/>
+                    </a:ext>
+                  </a:extLst>
+                </a:gridCol>
+              </a:tblGrid>
+              <a:tr h="762515">
+                <a:tc>
+                  <a:txBody>
+                    <a:bodyPr/>
+                    <a:lstStyle/>
+                    <a:p>
+                      <a:pPr algn="ctr" latinLnBrk="1">
+                        <a:lnSpc>
+                          <a:spcPct val="115000"/>
+                        </a:lnSpc>
+                        <a:buNone/>
+                      </a:pPr>
+                      <a:r>
+                        <a:rPr lang="en-US" sz="1600" kern="100">
+                          <a:effectLst/>
+                        </a:rPr>
+                        <a:t>Model/Type</a:t>
+                      </a:r>
+                      <a:endParaRPr lang="ko-KR" sz="1600" kern="100">
+                        <a:effectLst/>
+                        <a:latin typeface="맑은 고딕" panose="020B0503020000020004" pitchFamily="50" charset="-127"/>
+                        <a:ea typeface="맑은 고딕" panose="020B0503020000020004" pitchFamily="50" charset="-127"/>
+                        <a:cs typeface="Times New Roman" panose="02020603050405020304" pitchFamily="18" charset="0"/>
+                      </a:endParaRPr>
+                    </a:p>
+                  </a:txBody>
+                  <a:tcPr marL="68580" marR="68580" marT="0" marB="0" anchor="ctr"/>
+                </a:tc>
+                <a:tc>
+                  <a:txBody>
+                    <a:bodyPr/>
+                    <a:lstStyle/>
+                    <a:p>
+                      <a:pPr algn="ctr" latinLnBrk="1">
+                        <a:lnSpc>
+                          <a:spcPct val="115000"/>
+                        </a:lnSpc>
+                        <a:buNone/>
+                      </a:pPr>
+                      <a:r>
+                        <a:rPr lang="en-US" sz="1600" kern="100">
+                          <a:effectLst/>
+                        </a:rPr>
+                        <a:t>Graph Type</a:t>
+                      </a:r>
+                      <a:endParaRPr lang="ko-KR" sz="1600" kern="100">
+                        <a:effectLst/>
+                        <a:latin typeface="맑은 고딕" panose="020B0503020000020004" pitchFamily="50" charset="-127"/>
+                        <a:ea typeface="맑은 고딕" panose="020B0503020000020004" pitchFamily="50" charset="-127"/>
+                        <a:cs typeface="Times New Roman" panose="02020603050405020304" pitchFamily="18" charset="0"/>
+                      </a:endParaRPr>
+                    </a:p>
+                  </a:txBody>
+                  <a:tcPr marL="68580" marR="68580" marT="0" marB="0" anchor="ctr"/>
+                </a:tc>
+                <a:tc>
+                  <a:txBody>
+                    <a:bodyPr/>
+                    <a:lstStyle/>
+                    <a:p>
+                      <a:pPr algn="ctr" latinLnBrk="1">
+                        <a:lnSpc>
+                          <a:spcPct val="115000"/>
+                        </a:lnSpc>
+                        <a:buNone/>
+                      </a:pPr>
+                      <a:r>
+                        <a:rPr lang="en-US" sz="1600" kern="100" dirty="0">
+                          <a:effectLst/>
+                        </a:rPr>
+                        <a:t>Representation</a:t>
+                      </a:r>
+                      <a:endParaRPr lang="ko-KR" sz="1600" kern="100" dirty="0">
+                        <a:effectLst/>
+                        <a:latin typeface="맑은 고딕" panose="020B0503020000020004" pitchFamily="50" charset="-127"/>
+                        <a:ea typeface="맑은 고딕" panose="020B0503020000020004" pitchFamily="50" charset="-127"/>
+                        <a:cs typeface="Times New Roman" panose="02020603050405020304" pitchFamily="18" charset="0"/>
+                      </a:endParaRPr>
+                    </a:p>
+                  </a:txBody>
+                  <a:tcPr marL="68580" marR="68580" marT="0" marB="0" anchor="ctr"/>
+                </a:tc>
+                <a:tc>
+                  <a:txBody>
+                    <a:bodyPr/>
+                    <a:lstStyle/>
+                    <a:p>
+                      <a:pPr algn="ctr" latinLnBrk="1">
+                        <a:lnSpc>
+                          <a:spcPct val="115000"/>
+                        </a:lnSpc>
+                        <a:buNone/>
+                      </a:pPr>
+                      <a:r>
+                        <a:rPr lang="en-US" sz="1600" kern="100">
+                          <a:effectLst/>
+                        </a:rPr>
+                        <a:t>Positional Encoding</a:t>
+                      </a:r>
+                      <a:endParaRPr lang="ko-KR" sz="1600" kern="100">
+                        <a:effectLst/>
+                        <a:latin typeface="맑은 고딕" panose="020B0503020000020004" pitchFamily="50" charset="-127"/>
+                        <a:ea typeface="맑은 고딕" panose="020B0503020000020004" pitchFamily="50" charset="-127"/>
+                        <a:cs typeface="Times New Roman" panose="02020603050405020304" pitchFamily="18" charset="0"/>
+                      </a:endParaRPr>
+                    </a:p>
+                  </a:txBody>
+                  <a:tcPr marL="68580" marR="68580" marT="0" marB="0" anchor="ctr"/>
+                </a:tc>
+                <a:tc>
+                  <a:txBody>
+                    <a:bodyPr/>
+                    <a:lstStyle/>
+                    <a:p>
+                      <a:pPr algn="ctr" latinLnBrk="1">
+                        <a:lnSpc>
+                          <a:spcPct val="115000"/>
+                        </a:lnSpc>
+                        <a:buNone/>
+                      </a:pPr>
+                      <a:r>
+                        <a:rPr lang="en-US" sz="1600" kern="100">
+                          <a:effectLst/>
+                        </a:rPr>
+                        <a:t>Integration</a:t>
+                      </a:r>
+                      <a:endParaRPr lang="ko-KR" sz="1600" kern="100">
+                        <a:effectLst/>
+                        <a:latin typeface="맑은 고딕" panose="020B0503020000020004" pitchFamily="50" charset="-127"/>
+                        <a:ea typeface="맑은 고딕" panose="020B0503020000020004" pitchFamily="50" charset="-127"/>
+                        <a:cs typeface="Times New Roman" panose="02020603050405020304" pitchFamily="18" charset="0"/>
+                      </a:endParaRPr>
+                    </a:p>
+                  </a:txBody>
+                  <a:tcPr marL="68580" marR="68580" marT="0" marB="0" anchor="ctr"/>
+                </a:tc>
+                <a:tc>
+                  <a:txBody>
+                    <a:bodyPr/>
+                    <a:lstStyle/>
+                    <a:p>
+                      <a:pPr algn="ctr" latinLnBrk="1">
+                        <a:lnSpc>
+                          <a:spcPct val="115000"/>
+                        </a:lnSpc>
+                        <a:buNone/>
+                      </a:pPr>
+                      <a:r>
+                        <a:rPr lang="en-US" sz="1600" kern="100">
+                          <a:effectLst/>
+                        </a:rPr>
+                        <a:t>Architecture</a:t>
+                      </a:r>
+                      <a:endParaRPr lang="ko-KR" sz="1600" kern="100">
+                        <a:effectLst/>
+                        <a:latin typeface="맑은 고딕" panose="020B0503020000020004" pitchFamily="50" charset="-127"/>
+                        <a:ea typeface="맑은 고딕" panose="020B0503020000020004" pitchFamily="50" charset="-127"/>
+                        <a:cs typeface="Times New Roman" panose="02020603050405020304" pitchFamily="18" charset="0"/>
+                      </a:endParaRPr>
+                    </a:p>
+                  </a:txBody>
+                  <a:tcPr marL="68580" marR="68580" marT="0" marB="0" anchor="ctr"/>
+                </a:tc>
+                <a:extLst>
+                  <a:ext uri="{0D108BD9-81ED-4DB2-BD59-A6C34878D82A}">
+                    <a16:rowId xmlns:a16="http://schemas.microsoft.com/office/drawing/2014/main" val="1612240711"/>
+                  </a:ext>
+                </a:extLst>
+              </a:tr>
+              <a:tr h="762515">
+                <a:tc>
+                  <a:txBody>
+                    <a:bodyPr/>
+                    <a:lstStyle/>
+                    <a:p>
+                      <a:pPr algn="ctr" latinLnBrk="1">
+                        <a:lnSpc>
+                          <a:spcPct val="115000"/>
+                        </a:lnSpc>
+                        <a:buNone/>
+                      </a:pPr>
+                      <a:r>
+                        <a:rPr lang="en-US" sz="1600" kern="100" dirty="0" err="1">
+                          <a:effectLst/>
+                        </a:rPr>
+                        <a:t>Graphormer</a:t>
+                      </a:r>
+                      <a:endParaRPr lang="ko-KR" sz="1600" kern="100" dirty="0">
+                        <a:effectLst/>
+                        <a:latin typeface="맑은 고딕" panose="020B0503020000020004" pitchFamily="50" charset="-127"/>
+                        <a:ea typeface="맑은 고딕" panose="020B0503020000020004" pitchFamily="50" charset="-127"/>
+                        <a:cs typeface="Times New Roman" panose="02020603050405020304" pitchFamily="18" charset="0"/>
+                      </a:endParaRPr>
+                    </a:p>
+                  </a:txBody>
+                  <a:tcPr marL="68580" marR="68580" marT="0" marB="0" anchor="ctr"/>
+                </a:tc>
+                <a:tc>
+                  <a:txBody>
+                    <a:bodyPr/>
+                    <a:lstStyle/>
+                    <a:p>
+                      <a:pPr algn="ctr" latinLnBrk="1">
+                        <a:lnSpc>
+                          <a:spcPct val="115000"/>
+                        </a:lnSpc>
+                        <a:buNone/>
+                      </a:pPr>
+                      <a:r>
+                        <a:rPr lang="en-US" sz="1600" kern="100" dirty="0">
+                          <a:effectLst/>
+                        </a:rPr>
+                        <a:t>Molecular Graph</a:t>
+                      </a:r>
+                      <a:endParaRPr lang="ko-KR" sz="1600" kern="100" dirty="0">
+                        <a:effectLst/>
+                        <a:latin typeface="맑은 고딕" panose="020B0503020000020004" pitchFamily="50" charset="-127"/>
+                        <a:ea typeface="맑은 고딕" panose="020B0503020000020004" pitchFamily="50" charset="-127"/>
+                        <a:cs typeface="Times New Roman" panose="02020603050405020304" pitchFamily="18" charset="0"/>
+                      </a:endParaRPr>
+                    </a:p>
+                  </a:txBody>
+                  <a:tcPr marL="68580" marR="68580" marT="0" marB="0" anchor="ctr"/>
+                </a:tc>
+                <a:tc>
+                  <a:txBody>
+                    <a:bodyPr/>
+                    <a:lstStyle/>
+                    <a:p>
+                      <a:pPr algn="ctr" latinLnBrk="1">
+                        <a:lnSpc>
+                          <a:spcPct val="115000"/>
+                        </a:lnSpc>
+                        <a:buNone/>
+                      </a:pPr>
+                      <a:r>
+                        <a:rPr lang="en-US" sz="1600" kern="100" dirty="0">
+                          <a:effectLst/>
+                        </a:rPr>
+                        <a:t>Encoded</a:t>
+                      </a:r>
+                      <a:endParaRPr lang="ko-KR" sz="1600" kern="100" dirty="0">
+                        <a:effectLst/>
+                        <a:latin typeface="맑은 고딕" panose="020B0503020000020004" pitchFamily="50" charset="-127"/>
+                        <a:ea typeface="맑은 고딕" panose="020B0503020000020004" pitchFamily="50" charset="-127"/>
+                        <a:cs typeface="Times New Roman" panose="02020603050405020304" pitchFamily="18" charset="0"/>
+                      </a:endParaRPr>
+                    </a:p>
+                  </a:txBody>
+                  <a:tcPr marL="68580" marR="68580" marT="0" marB="0" anchor="ctr"/>
+                </a:tc>
+                <a:tc>
+                  <a:txBody>
+                    <a:bodyPr/>
+                    <a:lstStyle/>
+                    <a:p>
+                      <a:pPr algn="ctr" latinLnBrk="1">
+                        <a:lnSpc>
+                          <a:spcPct val="115000"/>
+                        </a:lnSpc>
+                        <a:buNone/>
+                      </a:pPr>
+                      <a:r>
+                        <a:rPr lang="en-US" sz="1600" kern="100" dirty="0">
+                          <a:effectLst/>
+                        </a:rPr>
+                        <a:t>None</a:t>
+                      </a:r>
+                      <a:endParaRPr lang="ko-KR" sz="1600" kern="100" dirty="0">
+                        <a:effectLst/>
+                        <a:latin typeface="맑은 고딕" panose="020B0503020000020004" pitchFamily="50" charset="-127"/>
+                        <a:ea typeface="맑은 고딕" panose="020B0503020000020004" pitchFamily="50" charset="-127"/>
+                        <a:cs typeface="Times New Roman" panose="02020603050405020304" pitchFamily="18" charset="0"/>
+                      </a:endParaRPr>
+                    </a:p>
+                  </a:txBody>
+                  <a:tcPr marL="68580" marR="68580" marT="0" marB="0" anchor="ctr"/>
+                </a:tc>
+                <a:tc>
+                  <a:txBody>
+                    <a:bodyPr/>
+                    <a:lstStyle/>
+                    <a:p>
+                      <a:pPr algn="ctr" latinLnBrk="1">
+                        <a:lnSpc>
+                          <a:spcPct val="115000"/>
+                        </a:lnSpc>
+                        <a:buNone/>
+                      </a:pPr>
+                      <a:r>
+                        <a:rPr lang="en-US" sz="1600" kern="100" dirty="0">
+                          <a:effectLst/>
+                        </a:rPr>
+                        <a:t>Attention-level</a:t>
+                      </a:r>
+                      <a:endParaRPr lang="ko-KR" sz="1600" kern="100" dirty="0">
+                        <a:effectLst/>
+                        <a:latin typeface="맑은 고딕" panose="020B0503020000020004" pitchFamily="50" charset="-127"/>
+                        <a:ea typeface="맑은 고딕" panose="020B0503020000020004" pitchFamily="50" charset="-127"/>
+                        <a:cs typeface="Times New Roman" panose="02020603050405020304" pitchFamily="18" charset="0"/>
+                      </a:endParaRPr>
+                    </a:p>
+                  </a:txBody>
+                  <a:tcPr marL="68580" marR="68580" marT="0" marB="0" anchor="ctr"/>
+                </a:tc>
+                <a:tc>
+                  <a:txBody>
+                    <a:bodyPr/>
+                    <a:lstStyle/>
+                    <a:p>
+                      <a:pPr algn="ctr" latinLnBrk="1">
+                        <a:lnSpc>
+                          <a:spcPct val="115000"/>
+                        </a:lnSpc>
+                        <a:buNone/>
+                      </a:pPr>
+                      <a:r>
+                        <a:rPr lang="en-US" sz="1600" kern="100" dirty="0">
+                          <a:effectLst/>
+                        </a:rPr>
+                        <a:t>Attention Bias</a:t>
+                      </a:r>
+                      <a:endParaRPr lang="ko-KR" sz="1600" kern="100" dirty="0">
+                        <a:effectLst/>
+                        <a:latin typeface="맑은 고딕" panose="020B0503020000020004" pitchFamily="50" charset="-127"/>
+                        <a:ea typeface="맑은 고딕" panose="020B0503020000020004" pitchFamily="50" charset="-127"/>
+                        <a:cs typeface="Times New Roman" panose="02020603050405020304" pitchFamily="18" charset="0"/>
+                      </a:endParaRPr>
+                    </a:p>
+                  </a:txBody>
+                  <a:tcPr marL="68580" marR="68580" marT="0" marB="0" anchor="ctr"/>
+                </a:tc>
+                <a:extLst>
+                  <a:ext uri="{0D108BD9-81ED-4DB2-BD59-A6C34878D82A}">
+                    <a16:rowId xmlns:a16="http://schemas.microsoft.com/office/drawing/2014/main" val="2820563992"/>
+                  </a:ext>
+                </a:extLst>
+              </a:tr>
+              <a:tr h="885252">
+                <a:tc>
+                  <a:txBody>
+                    <a:bodyPr/>
+                    <a:lstStyle/>
+                    <a:p>
+                      <a:pPr algn="ctr" latinLnBrk="1">
+                        <a:lnSpc>
+                          <a:spcPct val="115000"/>
+                        </a:lnSpc>
+                        <a:buNone/>
+                      </a:pPr>
+                      <a:r>
+                        <a:rPr lang="en-US" sz="1600" kern="100" dirty="0" err="1">
+                          <a:effectLst/>
+                        </a:rPr>
+                        <a:t>Allamanis</a:t>
+                      </a:r>
+                      <a:endParaRPr lang="ko-KR" sz="1600" kern="100" dirty="0">
+                        <a:effectLst/>
+                      </a:endParaRPr>
+                    </a:p>
+                    <a:p>
+                      <a:pPr algn="ctr" latinLnBrk="1">
+                        <a:lnSpc>
+                          <a:spcPct val="115000"/>
+                        </a:lnSpc>
+                        <a:buNone/>
+                      </a:pPr>
+                      <a:r>
+                        <a:rPr lang="en-US" sz="1600" kern="100" dirty="0">
+                          <a:effectLst/>
+                        </a:rPr>
+                        <a:t>(GGNN)</a:t>
+                      </a:r>
+                      <a:endParaRPr lang="ko-KR" sz="1600" kern="100" dirty="0">
+                        <a:effectLst/>
+                        <a:latin typeface="맑은 고딕" panose="020B0503020000020004" pitchFamily="50" charset="-127"/>
+                        <a:ea typeface="맑은 고딕" panose="020B0503020000020004" pitchFamily="50" charset="-127"/>
+                        <a:cs typeface="Times New Roman" panose="02020603050405020304" pitchFamily="18" charset="0"/>
+                      </a:endParaRPr>
+                    </a:p>
+                  </a:txBody>
+                  <a:tcPr marL="68580" marR="68580" marT="0" marB="0" anchor="ctr"/>
+                </a:tc>
+                <a:tc>
+                  <a:txBody>
+                    <a:bodyPr/>
+                    <a:lstStyle/>
+                    <a:p>
+                      <a:pPr algn="ctr" latinLnBrk="1">
+                        <a:lnSpc>
+                          <a:spcPct val="115000"/>
+                        </a:lnSpc>
+                        <a:buNone/>
+                      </a:pPr>
+                      <a:r>
+                        <a:rPr lang="en-US" sz="1600" kern="100" dirty="0">
+                          <a:effectLst/>
+                        </a:rPr>
+                        <a:t>AST, CFG, DFG</a:t>
+                      </a:r>
+                      <a:endParaRPr lang="ko-KR" sz="1600" kern="100" dirty="0">
+                        <a:effectLst/>
+                        <a:latin typeface="맑은 고딕" panose="020B0503020000020004" pitchFamily="50" charset="-127"/>
+                        <a:ea typeface="맑은 고딕" panose="020B0503020000020004" pitchFamily="50" charset="-127"/>
+                        <a:cs typeface="Times New Roman" panose="02020603050405020304" pitchFamily="18" charset="0"/>
+                      </a:endParaRPr>
+                    </a:p>
+                  </a:txBody>
+                  <a:tcPr marL="68580" marR="68580" marT="0" marB="0" anchor="ctr"/>
+                </a:tc>
+                <a:tc>
+                  <a:txBody>
+                    <a:bodyPr/>
+                    <a:lstStyle/>
+                    <a:p>
+                      <a:pPr algn="ctr" latinLnBrk="1">
+                        <a:lnSpc>
+                          <a:spcPct val="115000"/>
+                        </a:lnSpc>
+                        <a:buNone/>
+                      </a:pPr>
+                      <a:r>
+                        <a:rPr lang="en-US" sz="1600" kern="100" dirty="0">
+                          <a:effectLst/>
+                        </a:rPr>
+                        <a:t>Implicit + Explicit</a:t>
+                      </a:r>
+                      <a:endParaRPr lang="ko-KR" sz="1600" kern="100" dirty="0">
+                        <a:effectLst/>
+                        <a:latin typeface="맑은 고딕" panose="020B0503020000020004" pitchFamily="50" charset="-127"/>
+                        <a:ea typeface="맑은 고딕" panose="020B0503020000020004" pitchFamily="50" charset="-127"/>
+                        <a:cs typeface="Times New Roman" panose="02020603050405020304" pitchFamily="18" charset="0"/>
+                      </a:endParaRPr>
+                    </a:p>
+                  </a:txBody>
+                  <a:tcPr marL="68580" marR="68580" marT="0" marB="0" anchor="ctr"/>
+                </a:tc>
+                <a:tc>
+                  <a:txBody>
+                    <a:bodyPr/>
+                    <a:lstStyle/>
+                    <a:p>
+                      <a:pPr algn="ctr" latinLnBrk="1">
+                        <a:lnSpc>
+                          <a:spcPct val="115000"/>
+                        </a:lnSpc>
+                        <a:buNone/>
+                      </a:pPr>
+                      <a:r>
+                        <a:rPr lang="en-US" sz="1600" kern="100" dirty="0">
+                          <a:effectLst/>
+                        </a:rPr>
+                        <a:t>Structural (edge type)</a:t>
+                      </a:r>
+                      <a:endParaRPr lang="ko-KR" sz="1600" kern="100" dirty="0">
+                        <a:effectLst/>
+                        <a:latin typeface="맑은 고딕" panose="020B0503020000020004" pitchFamily="50" charset="-127"/>
+                        <a:ea typeface="맑은 고딕" panose="020B0503020000020004" pitchFamily="50" charset="-127"/>
+                        <a:cs typeface="Times New Roman" panose="02020603050405020304" pitchFamily="18" charset="0"/>
+                      </a:endParaRPr>
+                    </a:p>
+                  </a:txBody>
+                  <a:tcPr marL="68580" marR="68580" marT="0" marB="0" anchor="ctr"/>
+                </a:tc>
+                <a:tc>
+                  <a:txBody>
+                    <a:bodyPr/>
+                    <a:lstStyle/>
+                    <a:p>
+                      <a:pPr algn="ctr" latinLnBrk="1">
+                        <a:lnSpc>
+                          <a:spcPct val="115000"/>
+                        </a:lnSpc>
+                        <a:buNone/>
+                      </a:pPr>
+                      <a:r>
+                        <a:rPr lang="en-US" sz="1600" kern="100" dirty="0">
+                          <a:effectLst/>
+                        </a:rPr>
+                        <a:t>Input-level</a:t>
+                      </a:r>
+                      <a:endParaRPr lang="ko-KR" sz="1600" kern="100" dirty="0">
+                        <a:effectLst/>
+                        <a:latin typeface="맑은 고딕" panose="020B0503020000020004" pitchFamily="50" charset="-127"/>
+                        <a:ea typeface="맑은 고딕" panose="020B0503020000020004" pitchFamily="50" charset="-127"/>
+                        <a:cs typeface="Times New Roman" panose="02020603050405020304" pitchFamily="18" charset="0"/>
+                      </a:endParaRPr>
+                    </a:p>
+                  </a:txBody>
+                  <a:tcPr marL="68580" marR="68580" marT="0" marB="0" anchor="ctr"/>
+                </a:tc>
+                <a:tc>
+                  <a:txBody>
+                    <a:bodyPr/>
+                    <a:lstStyle/>
+                    <a:p>
+                      <a:pPr algn="ctr" latinLnBrk="1">
+                        <a:lnSpc>
+                          <a:spcPct val="115000"/>
+                        </a:lnSpc>
+                        <a:buNone/>
+                      </a:pPr>
+                      <a:r>
+                        <a:rPr lang="en-US" sz="1600" kern="100" dirty="0">
+                          <a:effectLst/>
+                        </a:rPr>
+                        <a:t>Hybrid (GNN)</a:t>
+                      </a:r>
+                      <a:endParaRPr lang="ko-KR" sz="1600" kern="100" dirty="0">
+                        <a:effectLst/>
+                        <a:latin typeface="맑은 고딕" panose="020B0503020000020004" pitchFamily="50" charset="-127"/>
+                        <a:ea typeface="맑은 고딕" panose="020B0503020000020004" pitchFamily="50" charset="-127"/>
+                        <a:cs typeface="Times New Roman" panose="02020603050405020304" pitchFamily="18" charset="0"/>
+                      </a:endParaRPr>
+                    </a:p>
+                  </a:txBody>
+                  <a:tcPr marL="68580" marR="68580" marT="0" marB="0" anchor="ctr"/>
+                </a:tc>
+                <a:extLst>
+                  <a:ext uri="{0D108BD9-81ED-4DB2-BD59-A6C34878D82A}">
+                    <a16:rowId xmlns:a16="http://schemas.microsoft.com/office/drawing/2014/main" val="4142553090"/>
+                  </a:ext>
+                </a:extLst>
+              </a:tr>
+              <a:tr h="929680">
+                <a:tc>
+                  <a:txBody>
+                    <a:bodyPr/>
+                    <a:lstStyle/>
+                    <a:p>
+                      <a:pPr algn="ctr" latinLnBrk="1">
+                        <a:lnSpc>
+                          <a:spcPct val="115000"/>
+                        </a:lnSpc>
+                        <a:buNone/>
+                      </a:pPr>
+                      <a:r>
+                        <a:rPr lang="en-US" sz="1600" kern="100" dirty="0" err="1">
+                          <a:effectLst/>
+                        </a:rPr>
+                        <a:t>RelGT</a:t>
+                      </a:r>
+                      <a:r>
+                        <a:rPr lang="en-US" sz="1600" kern="100" dirty="0">
+                          <a:effectLst/>
+                        </a:rPr>
+                        <a:t> </a:t>
+                      </a:r>
+                      <a:endParaRPr lang="ko-KR" sz="1600" kern="100" dirty="0">
+                        <a:effectLst/>
+                        <a:latin typeface="맑은 고딕" panose="020B0503020000020004" pitchFamily="50" charset="-127"/>
+                        <a:ea typeface="맑은 고딕" panose="020B0503020000020004" pitchFamily="50" charset="-127"/>
+                        <a:cs typeface="Times New Roman" panose="02020603050405020304" pitchFamily="18" charset="0"/>
+                      </a:endParaRPr>
+                    </a:p>
+                  </a:txBody>
+                  <a:tcPr marL="68580" marR="68580" marT="0" marB="0" anchor="ctr"/>
+                </a:tc>
+                <a:tc>
+                  <a:txBody>
+                    <a:bodyPr/>
+                    <a:lstStyle/>
+                    <a:p>
+                      <a:pPr algn="ctr" latinLnBrk="1">
+                        <a:lnSpc>
+                          <a:spcPct val="115000"/>
+                        </a:lnSpc>
+                        <a:buNone/>
+                      </a:pPr>
+                      <a:r>
+                        <a:rPr lang="en-US" sz="1600" kern="100">
+                          <a:effectLst/>
+                        </a:rPr>
+                        <a:t>Heterogeneous Graph</a:t>
+                      </a:r>
+                      <a:endParaRPr lang="ko-KR" sz="1600" kern="100">
+                        <a:effectLst/>
+                        <a:latin typeface="맑은 고딕" panose="020B0503020000020004" pitchFamily="50" charset="-127"/>
+                        <a:ea typeface="맑은 고딕" panose="020B0503020000020004" pitchFamily="50" charset="-127"/>
+                        <a:cs typeface="Times New Roman" panose="02020603050405020304" pitchFamily="18" charset="0"/>
+                      </a:endParaRPr>
+                    </a:p>
+                  </a:txBody>
+                  <a:tcPr marL="68580" marR="68580" marT="0" marB="0" anchor="ctr"/>
+                </a:tc>
+                <a:tc>
+                  <a:txBody>
+                    <a:bodyPr/>
+                    <a:lstStyle/>
+                    <a:p>
+                      <a:pPr algn="ctr" latinLnBrk="1">
+                        <a:lnSpc>
+                          <a:spcPct val="115000"/>
+                        </a:lnSpc>
+                        <a:buNone/>
+                      </a:pPr>
+                      <a:r>
+                        <a:rPr lang="en-US" sz="1600" kern="100">
+                          <a:effectLst/>
+                        </a:rPr>
+                        <a:t>Explicit</a:t>
+                      </a:r>
+                      <a:endParaRPr lang="ko-KR" sz="1600" kern="100">
+                        <a:effectLst/>
+                        <a:latin typeface="맑은 고딕" panose="020B0503020000020004" pitchFamily="50" charset="-127"/>
+                        <a:ea typeface="맑은 고딕" panose="020B0503020000020004" pitchFamily="50" charset="-127"/>
+                        <a:cs typeface="Times New Roman" panose="02020603050405020304" pitchFamily="18" charset="0"/>
+                      </a:endParaRPr>
+                    </a:p>
+                  </a:txBody>
+                  <a:tcPr marL="68580" marR="68580" marT="0" marB="0" anchor="ctr"/>
+                </a:tc>
+                <a:tc>
+                  <a:txBody>
+                    <a:bodyPr/>
+                    <a:lstStyle/>
+                    <a:p>
+                      <a:pPr algn="ctr" latinLnBrk="1">
+                        <a:lnSpc>
+                          <a:spcPct val="115000"/>
+                        </a:lnSpc>
+                        <a:buNone/>
+                      </a:pPr>
+                      <a:r>
+                        <a:rPr lang="en-US" sz="1600" kern="100" dirty="0">
+                          <a:effectLst/>
+                        </a:rPr>
+                        <a:t>Relative distance </a:t>
+                      </a:r>
+                    </a:p>
+                    <a:p>
+                      <a:pPr algn="ctr" latinLnBrk="1">
+                        <a:lnSpc>
+                          <a:spcPct val="115000"/>
+                        </a:lnSpc>
+                        <a:buNone/>
+                      </a:pPr>
+                      <a:r>
+                        <a:rPr lang="en-US" sz="1600" kern="100" dirty="0">
+                          <a:effectLst/>
+                        </a:rPr>
+                        <a:t>+ type encoding</a:t>
+                      </a:r>
+                      <a:endParaRPr lang="ko-KR" sz="1600" kern="100" dirty="0">
+                        <a:effectLst/>
+                        <a:latin typeface="맑은 고딕" panose="020B0503020000020004" pitchFamily="50" charset="-127"/>
+                        <a:ea typeface="맑은 고딕" panose="020B0503020000020004" pitchFamily="50" charset="-127"/>
+                        <a:cs typeface="Times New Roman" panose="02020603050405020304" pitchFamily="18" charset="0"/>
+                      </a:endParaRPr>
+                    </a:p>
+                  </a:txBody>
+                  <a:tcPr marL="68580" marR="68580" marT="0" marB="0" anchor="ctr"/>
+                </a:tc>
+                <a:tc>
+                  <a:txBody>
+                    <a:bodyPr/>
+                    <a:lstStyle/>
+                    <a:p>
+                      <a:pPr algn="ctr" latinLnBrk="1">
+                        <a:lnSpc>
+                          <a:spcPct val="115000"/>
+                        </a:lnSpc>
+                        <a:buNone/>
+                      </a:pPr>
+                      <a:r>
+                        <a:rPr lang="en-US" sz="1600" kern="100" dirty="0">
+                          <a:effectLst/>
+                        </a:rPr>
+                        <a:t>QKV-level + </a:t>
+                      </a:r>
+                    </a:p>
+                    <a:p>
+                      <a:pPr algn="ctr" latinLnBrk="1">
+                        <a:lnSpc>
+                          <a:spcPct val="115000"/>
+                        </a:lnSpc>
+                        <a:buNone/>
+                      </a:pPr>
+                      <a:r>
+                        <a:rPr lang="en-US" sz="1600" kern="100" dirty="0">
+                          <a:effectLst/>
+                        </a:rPr>
+                        <a:t>Tokenization</a:t>
+                      </a:r>
+                      <a:endParaRPr lang="ko-KR" sz="1600" kern="100" dirty="0">
+                        <a:effectLst/>
+                        <a:latin typeface="맑은 고딕" panose="020B0503020000020004" pitchFamily="50" charset="-127"/>
+                        <a:ea typeface="맑은 고딕" panose="020B0503020000020004" pitchFamily="50" charset="-127"/>
+                        <a:cs typeface="Times New Roman" panose="02020603050405020304" pitchFamily="18" charset="0"/>
+                      </a:endParaRPr>
+                    </a:p>
+                  </a:txBody>
+                  <a:tcPr marL="68580" marR="68580" marT="0" marB="0" anchor="ctr"/>
+                </a:tc>
+                <a:tc>
+                  <a:txBody>
+                    <a:bodyPr/>
+                    <a:lstStyle/>
+                    <a:p>
+                      <a:pPr algn="ctr" latinLnBrk="1">
+                        <a:lnSpc>
+                          <a:spcPct val="115000"/>
+                        </a:lnSpc>
+                        <a:buNone/>
+                      </a:pPr>
+                      <a:r>
+                        <a:rPr lang="en-US" sz="1600" kern="100" dirty="0">
+                          <a:effectLst/>
+                        </a:rPr>
+                        <a:t>Relational</a:t>
+                      </a:r>
+                      <a:endParaRPr lang="ko-KR" sz="1600" kern="100" dirty="0">
+                        <a:effectLst/>
+                        <a:latin typeface="맑은 고딕" panose="020B0503020000020004" pitchFamily="50" charset="-127"/>
+                        <a:ea typeface="맑은 고딕" panose="020B0503020000020004" pitchFamily="50" charset="-127"/>
+                        <a:cs typeface="Times New Roman" panose="02020603050405020304" pitchFamily="18" charset="0"/>
+                      </a:endParaRPr>
+                    </a:p>
+                  </a:txBody>
+                  <a:tcPr marL="68580" marR="68580" marT="0" marB="0" anchor="ctr"/>
+                </a:tc>
+                <a:extLst>
+                  <a:ext uri="{0D108BD9-81ED-4DB2-BD59-A6C34878D82A}">
+                    <a16:rowId xmlns:a16="http://schemas.microsoft.com/office/drawing/2014/main" val="2471360231"/>
+                  </a:ext>
+                </a:extLst>
+              </a:tr>
+              <a:tr h="762515">
+                <a:tc>
+                  <a:txBody>
+                    <a:bodyPr/>
+                    <a:lstStyle/>
+                    <a:p>
+                      <a:pPr algn="ctr" latinLnBrk="1">
+                        <a:lnSpc>
+                          <a:spcPct val="115000"/>
+                        </a:lnSpc>
+                        <a:buNone/>
+                      </a:pPr>
+                      <a:r>
+                        <a:rPr lang="en-US" sz="1600" kern="100" dirty="0">
+                          <a:effectLst/>
+                        </a:rPr>
+                        <a:t>GENN </a:t>
+                      </a:r>
+                      <a:endParaRPr lang="ko-KR" sz="1600" kern="100" dirty="0">
+                        <a:effectLst/>
+                        <a:latin typeface="맑은 고딕" panose="020B0503020000020004" pitchFamily="50" charset="-127"/>
+                        <a:ea typeface="맑은 고딕" panose="020B0503020000020004" pitchFamily="50" charset="-127"/>
+                        <a:cs typeface="Times New Roman" panose="02020603050405020304" pitchFamily="18" charset="0"/>
+                      </a:endParaRPr>
+                    </a:p>
+                  </a:txBody>
+                  <a:tcPr marL="68580" marR="68580" marT="0" marB="0" anchor="ctr"/>
+                </a:tc>
+                <a:tc>
+                  <a:txBody>
+                    <a:bodyPr/>
+                    <a:lstStyle/>
+                    <a:p>
+                      <a:pPr algn="ctr" latinLnBrk="1">
+                        <a:lnSpc>
+                          <a:spcPct val="115000"/>
+                        </a:lnSpc>
+                        <a:buNone/>
+                      </a:pPr>
+                      <a:r>
+                        <a:rPr lang="en-US" sz="1600" kern="100">
+                          <a:effectLst/>
+                        </a:rPr>
+                        <a:t>General Graph</a:t>
+                      </a:r>
+                      <a:endParaRPr lang="ko-KR" sz="1600" kern="100">
+                        <a:effectLst/>
+                        <a:latin typeface="맑은 고딕" panose="020B0503020000020004" pitchFamily="50" charset="-127"/>
+                        <a:ea typeface="맑은 고딕" panose="020B0503020000020004" pitchFamily="50" charset="-127"/>
+                        <a:cs typeface="Times New Roman" panose="02020603050405020304" pitchFamily="18" charset="0"/>
+                      </a:endParaRPr>
+                    </a:p>
+                  </a:txBody>
+                  <a:tcPr marL="68580" marR="68580" marT="0" marB="0" anchor="ctr"/>
+                </a:tc>
+                <a:tc>
+                  <a:txBody>
+                    <a:bodyPr/>
+                    <a:lstStyle/>
+                    <a:p>
+                      <a:pPr algn="ctr" latinLnBrk="1">
+                        <a:lnSpc>
+                          <a:spcPct val="115000"/>
+                        </a:lnSpc>
+                        <a:buNone/>
+                      </a:pPr>
+                      <a:r>
+                        <a:rPr lang="en-US" sz="1600" kern="100">
+                          <a:effectLst/>
+                        </a:rPr>
+                        <a:t>Explicit</a:t>
+                      </a:r>
+                      <a:endParaRPr lang="ko-KR" sz="1600" kern="100">
+                        <a:effectLst/>
+                        <a:latin typeface="맑은 고딕" panose="020B0503020000020004" pitchFamily="50" charset="-127"/>
+                        <a:ea typeface="맑은 고딕" panose="020B0503020000020004" pitchFamily="50" charset="-127"/>
+                        <a:cs typeface="Times New Roman" panose="02020603050405020304" pitchFamily="18" charset="0"/>
+                      </a:endParaRPr>
+                    </a:p>
+                  </a:txBody>
+                  <a:tcPr marL="68580" marR="68580" marT="0" marB="0" anchor="ctr"/>
+                </a:tc>
+                <a:tc>
+                  <a:txBody>
+                    <a:bodyPr/>
+                    <a:lstStyle/>
+                    <a:p>
+                      <a:pPr algn="ctr" latinLnBrk="1">
+                        <a:lnSpc>
+                          <a:spcPct val="115000"/>
+                        </a:lnSpc>
+                        <a:buNone/>
+                      </a:pPr>
+                      <a:r>
+                        <a:rPr lang="en-US" sz="1600" kern="100" dirty="0">
+                          <a:effectLst/>
+                        </a:rPr>
+                        <a:t>None</a:t>
+                      </a:r>
+                      <a:endParaRPr lang="ko-KR" sz="1600" kern="100" dirty="0">
+                        <a:effectLst/>
+                        <a:latin typeface="맑은 고딕" panose="020B0503020000020004" pitchFamily="50" charset="-127"/>
+                        <a:ea typeface="맑은 고딕" panose="020B0503020000020004" pitchFamily="50" charset="-127"/>
+                        <a:cs typeface="Times New Roman" panose="02020603050405020304" pitchFamily="18" charset="0"/>
+                      </a:endParaRPr>
+                    </a:p>
+                  </a:txBody>
+                  <a:tcPr marL="68580" marR="68580" marT="0" marB="0" anchor="ctr"/>
+                </a:tc>
+                <a:tc>
+                  <a:txBody>
+                    <a:bodyPr/>
+                    <a:lstStyle/>
+                    <a:p>
+                      <a:pPr algn="ctr" latinLnBrk="1">
+                        <a:lnSpc>
+                          <a:spcPct val="115000"/>
+                        </a:lnSpc>
+                        <a:buNone/>
+                      </a:pPr>
+                      <a:r>
+                        <a:rPr lang="en-US" sz="1600" kern="100">
+                          <a:effectLst/>
+                        </a:rPr>
+                        <a:t>Input-level</a:t>
+                      </a:r>
+                      <a:endParaRPr lang="ko-KR" sz="1600" kern="100">
+                        <a:effectLst/>
+                        <a:latin typeface="맑은 고딕" panose="020B0503020000020004" pitchFamily="50" charset="-127"/>
+                        <a:ea typeface="맑은 고딕" panose="020B0503020000020004" pitchFamily="50" charset="-127"/>
+                        <a:cs typeface="Times New Roman" panose="02020603050405020304" pitchFamily="18" charset="0"/>
+                      </a:endParaRPr>
+                    </a:p>
+                  </a:txBody>
+                  <a:tcPr marL="68580" marR="68580" marT="0" marB="0" anchor="ctr"/>
+                </a:tc>
+                <a:tc>
+                  <a:txBody>
+                    <a:bodyPr/>
+                    <a:lstStyle/>
+                    <a:p>
+                      <a:pPr algn="ctr" latinLnBrk="1">
+                        <a:lnSpc>
+                          <a:spcPct val="115000"/>
+                        </a:lnSpc>
+                        <a:buNone/>
+                      </a:pPr>
+                      <a:r>
+                        <a:rPr lang="en-US" sz="1600" kern="100" dirty="0">
+                          <a:effectLst/>
+                        </a:rPr>
+                        <a:t>Hybrid</a:t>
+                      </a:r>
+                      <a:endParaRPr lang="ko-KR" sz="1600" kern="100" dirty="0">
+                        <a:effectLst/>
+                        <a:latin typeface="맑은 고딕" panose="020B0503020000020004" pitchFamily="50" charset="-127"/>
+                        <a:ea typeface="맑은 고딕" panose="020B0503020000020004" pitchFamily="50" charset="-127"/>
+                        <a:cs typeface="Times New Roman" panose="02020603050405020304" pitchFamily="18" charset="0"/>
+                      </a:endParaRPr>
+                    </a:p>
+                  </a:txBody>
+                  <a:tcPr marL="68580" marR="68580" marT="0" marB="0" anchor="ctr"/>
+                </a:tc>
+                <a:extLst>
+                  <a:ext uri="{0D108BD9-81ED-4DB2-BD59-A6C34878D82A}">
+                    <a16:rowId xmlns:a16="http://schemas.microsoft.com/office/drawing/2014/main" val="3196060052"/>
+                  </a:ext>
+                </a:extLst>
+              </a:tr>
+            </a:tbl>
+          </a:graphicData>
+        </a:graphic>
+      </p:graphicFrame>
+    </p:spTree>
+    <p:extLst>
+      <p:ext uri="{BB962C8B-B14F-4D97-AF65-F5344CB8AC3E}">
+        <p14:creationId xmlns:p14="http://schemas.microsoft.com/office/powerpoint/2010/main" val="3699531607"/>
+      </p:ext>
+    </p:extLst>
+  </p:cSld>
+  <p:clrMapOvr>
+    <a:masterClrMapping/>
+  </p:clrMapOvr>
+</p:sld>
+</file>
+
+<file path=ppt/slides/slide14.xml><?xml version="1.0" encoding="utf-8"?>
+<p:sld xmlns:a="http://schemas.openxmlformats.org/drawingml/2006/main" xmlns:r="http://schemas.openxmlformats.org/officeDocument/2006/relationships" xmlns:p="http://schemas.openxmlformats.org/presentationml/2006/main">
+  <p:cSld>
+    <p:spTree>
+      <p:nvGrpSpPr>
+        <p:cNvPr id="1" name=""/>
+        <p:cNvGrpSpPr/>
+        <p:nvPr/>
+      </p:nvGrpSpPr>
+      <p:grpSpPr>
+        <a:xfrm>
+          <a:off x="0" y="0"/>
+          <a:ext cx="0" cy="0"/>
+          <a:chOff x="0" y="0"/>
+          <a:chExt cx="0" cy="0"/>
+        </a:xfrm>
+      </p:grpSpPr>
+      <p:sp>
+        <p:nvSpPr>
+          <p:cNvPr id="2" name="제목 1">
+            <a:extLst>
+              <a:ext uri="{FF2B5EF4-FFF2-40B4-BE49-F238E27FC236}">
+                <a16:creationId xmlns:a16="http://schemas.microsoft.com/office/drawing/2014/main" id="{F8AD651D-54B2-6C1F-CC59-6EB94F6CC9F7}"/>
+              </a:ext>
+            </a:extLst>
+          </p:cNvPr>
+          <p:cNvSpPr>
+            <a:spLocks noGrp="1"/>
+          </p:cNvSpPr>
+          <p:nvPr>
+            <p:ph type="title"/>
+          </p:nvPr>
+        </p:nvSpPr>
+        <p:spPr/>
+        <p:txBody>
+          <a:bodyPr>
+            <a:normAutofit/>
+          </a:bodyPr>
+          <a:lstStyle/>
+          <a:p>
+            <a:r>
+              <a:rPr lang="en-US" altLang="ko-KR" b="1" dirty="0"/>
+              <a:t>Discussion</a:t>
+            </a:r>
+            <a:endParaRPr lang="ko-KR" altLang="en-US" dirty="0"/>
+          </a:p>
+        </p:txBody>
+      </p:sp>
+    </p:spTree>
+    <p:extLst>
+      <p:ext uri="{BB962C8B-B14F-4D97-AF65-F5344CB8AC3E}">
+        <p14:creationId xmlns:p14="http://schemas.microsoft.com/office/powerpoint/2010/main" val="2076747086"/>
+      </p:ext>
+    </p:extLst>
+  </p:cSld>
+  <p:clrMapOvr>
+    <a:masterClrMapping/>
+  </p:clrMapOvr>
+</p:sld>
+</file>
+
+<file path=ppt/slides/slide15.xml><?xml version="1.0" encoding="utf-8"?>
+<p:sld xmlns:a="http://schemas.openxmlformats.org/drawingml/2006/main" xmlns:r="http://schemas.openxmlformats.org/officeDocument/2006/relationships" xmlns:p="http://schemas.openxmlformats.org/presentationml/2006/main">
+  <p:cSld>
+    <p:spTree>
+      <p:nvGrpSpPr>
+        <p:cNvPr id="1" name=""/>
+        <p:cNvGrpSpPr/>
+        <p:nvPr/>
+      </p:nvGrpSpPr>
+      <p:grpSpPr>
+        <a:xfrm>
+          <a:off x="0" y="0"/>
+          <a:ext cx="0" cy="0"/>
+          <a:chOff x="0" y="0"/>
+          <a:chExt cx="0" cy="0"/>
+        </a:xfrm>
+      </p:grpSpPr>
+      <p:sp>
+        <p:nvSpPr>
+          <p:cNvPr id="2" name="제목 1">
+            <a:extLst>
+              <a:ext uri="{FF2B5EF4-FFF2-40B4-BE49-F238E27FC236}">
+                <a16:creationId xmlns:a16="http://schemas.microsoft.com/office/drawing/2014/main" id="{96D2A0EC-0D85-2E8E-5CCF-2E7DE6D7880B}"/>
+              </a:ext>
+            </a:extLst>
+          </p:cNvPr>
+          <p:cNvSpPr>
+            <a:spLocks noGrp="1"/>
+          </p:cNvSpPr>
+          <p:nvPr>
+            <p:ph type="title"/>
+          </p:nvPr>
+        </p:nvSpPr>
+        <p:spPr/>
+        <p:txBody>
+          <a:bodyPr/>
+          <a:lstStyle/>
+          <a:p>
+            <a:r>
+              <a:rPr lang="en-US" altLang="ko-KR" dirty="0"/>
+              <a:t>Conclusion</a:t>
+            </a:r>
+            <a:endParaRPr lang="ko-KR" altLang="en-US" dirty="0"/>
+          </a:p>
+        </p:txBody>
+      </p:sp>
+      <p:sp>
+        <p:nvSpPr>
+          <p:cNvPr id="3" name="내용 개체 틀 2">
+            <a:extLst>
+              <a:ext uri="{FF2B5EF4-FFF2-40B4-BE49-F238E27FC236}">
+                <a16:creationId xmlns:a16="http://schemas.microsoft.com/office/drawing/2014/main" id="{C31E76F6-F642-C257-3562-E994A72912B7}"/>
+              </a:ext>
+            </a:extLst>
+          </p:cNvPr>
+          <p:cNvSpPr>
+            <a:spLocks noGrp="1"/>
+          </p:cNvSpPr>
+          <p:nvPr>
+            <p:ph idx="1"/>
+          </p:nvPr>
+        </p:nvSpPr>
+        <p:spPr/>
+        <p:txBody>
+          <a:bodyPr/>
+          <a:lstStyle/>
+          <a:p>
+            <a:endParaRPr lang="ko-KR" altLang="en-US"/>
+          </a:p>
+        </p:txBody>
+      </p:sp>
+    </p:spTree>
+    <p:extLst>
+      <p:ext uri="{BB962C8B-B14F-4D97-AF65-F5344CB8AC3E}">
+        <p14:creationId xmlns:p14="http://schemas.microsoft.com/office/powerpoint/2010/main" val="1536938781"/>
+      </p:ext>
+    </p:extLst>
+  </p:cSld>
+  <p:clrMapOvr>
+    <a:masterClrMapping/>
+  </p:clrMapOvr>
+</p:sld>
+</file>
+
+<file path=ppt/slides/slide16.xml><?xml version="1.0" encoding="utf-8"?>
+<p:sld xmlns:a="http://schemas.openxmlformats.org/drawingml/2006/main" xmlns:r="http://schemas.openxmlformats.org/officeDocument/2006/relationships" xmlns:p="http://schemas.openxmlformats.org/presentationml/2006/main">
+  <p:cSld>
+    <p:spTree>
+      <p:nvGrpSpPr>
+        <p:cNvPr id="1" name=""/>
+        <p:cNvGrpSpPr/>
+        <p:nvPr/>
+      </p:nvGrpSpPr>
+      <p:grpSpPr>
+        <a:xfrm>
+          <a:off x="0" y="0"/>
+          <a:ext cx="0" cy="0"/>
+          <a:chOff x="0" y="0"/>
+          <a:chExt cx="0" cy="0"/>
+        </a:xfrm>
+      </p:grpSpPr>
+      <p:sp>
+        <p:nvSpPr>
+          <p:cNvPr id="2" name="제목 1">
+            <a:extLst>
+              <a:ext uri="{FF2B5EF4-FFF2-40B4-BE49-F238E27FC236}">
+                <a16:creationId xmlns:a16="http://schemas.microsoft.com/office/drawing/2014/main" id="{A1481FD5-C4A4-CECE-C9DE-6041CF783159}"/>
+              </a:ext>
+            </a:extLst>
+          </p:cNvPr>
+          <p:cNvSpPr>
+            <a:spLocks noGrp="1"/>
+          </p:cNvSpPr>
+          <p:nvPr>
+            <p:ph type="title"/>
+          </p:nvPr>
+        </p:nvSpPr>
+        <p:spPr/>
+        <p:txBody>
+          <a:bodyPr/>
+          <a:lstStyle/>
+          <a:p>
+            <a:pPr algn="ctr"/>
+            <a:r>
+              <a:rPr lang="en-US" altLang="ko-KR" dirty="0"/>
+              <a:t>Thank You</a:t>
+            </a:r>
+            <a:endParaRPr lang="ko-KR" altLang="en-US" dirty="0"/>
+          </a:p>
+        </p:txBody>
+      </p:sp>
+      <p:sp>
+        <p:nvSpPr>
+          <p:cNvPr id="3" name="텍스트 개체 틀 2">
+            <a:extLst>
+              <a:ext uri="{FF2B5EF4-FFF2-40B4-BE49-F238E27FC236}">
+                <a16:creationId xmlns:a16="http://schemas.microsoft.com/office/drawing/2014/main" id="{D8B03C9C-EB6D-6270-B45F-9A0DE93F7056}"/>
+              </a:ext>
+            </a:extLst>
+          </p:cNvPr>
+          <p:cNvSpPr>
+            <a:spLocks noGrp="1"/>
+          </p:cNvSpPr>
+          <p:nvPr>
+            <p:ph type="body" idx="1"/>
+          </p:nvPr>
+        </p:nvSpPr>
+        <p:spPr/>
+        <p:txBody>
+          <a:bodyPr/>
+          <a:lstStyle/>
+          <a:p>
+            <a:endParaRPr lang="ko-KR" altLang="en-US"/>
+          </a:p>
+        </p:txBody>
+      </p:sp>
+    </p:spTree>
+    <p:extLst>
+      <p:ext uri="{BB962C8B-B14F-4D97-AF65-F5344CB8AC3E}">
+        <p14:creationId xmlns:p14="http://schemas.microsoft.com/office/powerpoint/2010/main" val="563761009"/>
+      </p:ext>
+    </p:extLst>
+  </p:cSld>
+  <p:clrMapOvr>
+    <a:masterClrMapping/>
+  </p:clrMapOvr>
+</p:sld>
+</file>
+
+<file path=ppt/slides/slide2.xml><?xml version="1.0" encoding="utf-8"?>
+<p:sld xmlns:a="http://schemas.openxmlformats.org/drawingml/2006/main" xmlns:r="http://schemas.openxmlformats.org/officeDocument/2006/relationships" xmlns:p="http://schemas.openxmlformats.org/presentationml/2006/main">
+  <p:cSld>
+    <p:spTree>
+      <p:nvGrpSpPr>
+        <p:cNvPr id="1" name=""/>
+        <p:cNvGrpSpPr/>
+        <p:nvPr/>
+      </p:nvGrpSpPr>
+      <p:grpSpPr>
+        <a:xfrm>
+          <a:off x="0" y="0"/>
+          <a:ext cx="0" cy="0"/>
+          <a:chOff x="0" y="0"/>
+          <a:chExt cx="0" cy="0"/>
+        </a:xfrm>
+      </p:grpSpPr>
+      <p:sp>
+        <p:nvSpPr>
+          <p:cNvPr id="2" name="제목 1">
+            <a:extLst>
+              <a:ext uri="{FF2B5EF4-FFF2-40B4-BE49-F238E27FC236}">
+                <a16:creationId xmlns:a16="http://schemas.microsoft.com/office/drawing/2014/main" id="{24F63DF0-DB6E-4196-F0FC-9A8D67B7DB74}"/>
+              </a:ext>
+            </a:extLst>
+          </p:cNvPr>
+          <p:cNvSpPr>
+            <a:spLocks noGrp="1"/>
+          </p:cNvSpPr>
+          <p:nvPr>
+            <p:ph type="title"/>
+          </p:nvPr>
+        </p:nvSpPr>
+        <p:spPr/>
+        <p:txBody>
+          <a:bodyPr>
+            <a:normAutofit/>
+          </a:bodyPr>
+          <a:lstStyle/>
+          <a:p>
+            <a:r>
+              <a:rPr lang="ko-KR" altLang="ko-KR" dirty="0" err="1">
+                <a:latin typeface="Segoe UI" panose="020B0502040204020203" pitchFamily="34" charset="0"/>
+              </a:rPr>
+              <a:t>Motivation</a:t>
+            </a:r>
+            <a:endParaRPr lang="ko-KR" altLang="en-US" dirty="0"/>
+          </a:p>
+        </p:txBody>
+      </p:sp>
+      <p:sp>
+        <p:nvSpPr>
+          <p:cNvPr id="3" name="내용 개체 틀 2">
+            <a:extLst>
+              <a:ext uri="{FF2B5EF4-FFF2-40B4-BE49-F238E27FC236}">
+                <a16:creationId xmlns:a16="http://schemas.microsoft.com/office/drawing/2014/main" id="{C00216A1-933E-D433-BD35-359A620BD2E9}"/>
+              </a:ext>
+            </a:extLst>
+          </p:cNvPr>
+          <p:cNvSpPr>
+            <a:spLocks noGrp="1"/>
+          </p:cNvSpPr>
+          <p:nvPr>
+            <p:ph idx="1"/>
+          </p:nvPr>
+        </p:nvSpPr>
+        <p:spPr/>
+        <p:txBody>
+          <a:bodyPr/>
+          <a:lstStyle/>
+          <a:p>
+            <a:endParaRPr lang="ko-KR" altLang="en-US" dirty="0"/>
+          </a:p>
+        </p:txBody>
+      </p:sp>
+    </p:spTree>
+    <p:extLst>
+      <p:ext uri="{BB962C8B-B14F-4D97-AF65-F5344CB8AC3E}">
+        <p14:creationId xmlns:p14="http://schemas.microsoft.com/office/powerpoint/2010/main" val="2098866481"/>
+      </p:ext>
+    </p:extLst>
+  </p:cSld>
+  <p:clrMapOvr>
+    <a:masterClrMapping/>
+  </p:clrMapOvr>
+</p:sld>
+</file>
+
+<file path=ppt/slides/slide3.xml><?xml version="1.0" encoding="utf-8"?>
+<p:sld xmlns:a="http://schemas.openxmlformats.org/drawingml/2006/main" xmlns:r="http://schemas.openxmlformats.org/officeDocument/2006/relationships" xmlns:p="http://schemas.openxmlformats.org/presentationml/2006/main">
+  <p:cSld>
+    <p:spTree>
+      <p:nvGrpSpPr>
+        <p:cNvPr id="1" name="">
+          <a:extLst>
+            <a:ext uri="{FF2B5EF4-FFF2-40B4-BE49-F238E27FC236}">
+              <a16:creationId xmlns:a16="http://schemas.microsoft.com/office/drawing/2014/main" id="{9E43A3D2-DDC3-5882-7907-A8B2BE83E506}"/>
+            </a:ext>
+          </a:extLst>
+        </p:cNvPr>
+        <p:cNvGrpSpPr/>
+        <p:nvPr/>
+      </p:nvGrpSpPr>
+      <p:grpSpPr>
+        <a:xfrm>
+          <a:off x="0" y="0"/>
+          <a:ext cx="0" cy="0"/>
+          <a:chOff x="0" y="0"/>
+          <a:chExt cx="0" cy="0"/>
+        </a:xfrm>
+      </p:grpSpPr>
+      <p:sp>
+        <p:nvSpPr>
+          <p:cNvPr id="2" name="제목 1">
+            <a:extLst>
+              <a:ext uri="{FF2B5EF4-FFF2-40B4-BE49-F238E27FC236}">
+                <a16:creationId xmlns:a16="http://schemas.microsoft.com/office/drawing/2014/main" id="{4C38C794-2F42-93FB-9E85-B61A46033BA2}"/>
+              </a:ext>
+            </a:extLst>
+          </p:cNvPr>
+          <p:cNvSpPr>
+            <a:spLocks noGrp="1"/>
+          </p:cNvSpPr>
+          <p:nvPr>
+            <p:ph type="title"/>
+          </p:nvPr>
+        </p:nvSpPr>
+        <p:spPr/>
+        <p:txBody>
+          <a:bodyPr>
+            <a:normAutofit/>
+          </a:bodyPr>
+          <a:lstStyle/>
+          <a:p>
+            <a:r>
+              <a:rPr lang="ko-KR" altLang="ko-KR" dirty="0" err="1">
+                <a:latin typeface="Segoe UI" panose="020B0502040204020203" pitchFamily="34" charset="0"/>
+              </a:rPr>
+              <a:t>Motivation</a:t>
+            </a:r>
+            <a:endParaRPr lang="ko-KR" altLang="en-US" dirty="0"/>
+          </a:p>
+        </p:txBody>
+      </p:sp>
+      <p:sp>
+        <p:nvSpPr>
+          <p:cNvPr id="3" name="내용 개체 틀 2">
+            <a:extLst>
+              <a:ext uri="{FF2B5EF4-FFF2-40B4-BE49-F238E27FC236}">
+                <a16:creationId xmlns:a16="http://schemas.microsoft.com/office/drawing/2014/main" id="{17B91784-7EC1-1E2B-E8D3-975B39D62C19}"/>
+              </a:ext>
+            </a:extLst>
+          </p:cNvPr>
+          <p:cNvSpPr>
+            <a:spLocks noGrp="1"/>
+          </p:cNvSpPr>
+          <p:nvPr>
+            <p:ph idx="1"/>
+          </p:nvPr>
+        </p:nvSpPr>
+        <p:spPr/>
+        <p:txBody>
+          <a:bodyPr/>
+          <a:lstStyle/>
+          <a:p>
+            <a:endParaRPr lang="ko-KR" altLang="en-US" dirty="0"/>
+          </a:p>
+        </p:txBody>
+      </p:sp>
+    </p:spTree>
+    <p:extLst>
+      <p:ext uri="{BB962C8B-B14F-4D97-AF65-F5344CB8AC3E}">
+        <p14:creationId xmlns:p14="http://schemas.microsoft.com/office/powerpoint/2010/main" val="2546717626"/>
+      </p:ext>
+    </p:extLst>
+  </p:cSld>
+  <p:clrMapOvr>
+    <a:masterClrMapping/>
+  </p:clrMapOvr>
+</p:sld>
+</file>
+
+<file path=ppt/slides/slide4.xml><?xml version="1.0" encoding="utf-8"?>
+<p:sld xmlns:a="http://schemas.openxmlformats.org/drawingml/2006/main" xmlns:r="http://schemas.openxmlformats.org/officeDocument/2006/relationships" xmlns:p="http://schemas.openxmlformats.org/presentationml/2006/main">
+  <p:cSld>
+    <p:spTree>
+      <p:nvGrpSpPr>
+        <p:cNvPr id="1" name="">
+          <a:extLst>
+            <a:ext uri="{FF2B5EF4-FFF2-40B4-BE49-F238E27FC236}">
+              <a16:creationId xmlns:a16="http://schemas.microsoft.com/office/drawing/2014/main" id="{EB9BC226-3392-81A8-1781-253824BA3562}"/>
+            </a:ext>
+          </a:extLst>
+        </p:cNvPr>
+        <p:cNvGrpSpPr/>
+        <p:nvPr/>
+      </p:nvGrpSpPr>
+      <p:grpSpPr>
+        <a:xfrm>
+          <a:off x="0" y="0"/>
+          <a:ext cx="0" cy="0"/>
+          <a:chOff x="0" y="0"/>
+          <a:chExt cx="0" cy="0"/>
+        </a:xfrm>
+      </p:grpSpPr>
+      <p:sp>
+        <p:nvSpPr>
+          <p:cNvPr id="2" name="제목 1">
+            <a:extLst>
+              <a:ext uri="{FF2B5EF4-FFF2-40B4-BE49-F238E27FC236}">
+                <a16:creationId xmlns:a16="http://schemas.microsoft.com/office/drawing/2014/main" id="{A9F65237-EB4C-2D84-97CA-081C4557A403}"/>
+              </a:ext>
+            </a:extLst>
+          </p:cNvPr>
+          <p:cNvSpPr>
+            <a:spLocks noGrp="1"/>
+          </p:cNvSpPr>
+          <p:nvPr>
+            <p:ph type="title"/>
+          </p:nvPr>
+        </p:nvSpPr>
+        <p:spPr/>
+        <p:txBody>
+          <a:bodyPr>
+            <a:normAutofit/>
+          </a:bodyPr>
+          <a:lstStyle/>
+          <a:p>
+            <a:r>
+              <a:rPr lang="ko-KR" altLang="ko-KR" dirty="0" err="1">
+                <a:latin typeface="Segoe UI" panose="020B0502040204020203" pitchFamily="34" charset="0"/>
+              </a:rPr>
+              <a:t>Motivation</a:t>
+            </a:r>
+            <a:endParaRPr lang="ko-KR" altLang="en-US" dirty="0"/>
+          </a:p>
+        </p:txBody>
+      </p:sp>
+      <p:sp>
+        <p:nvSpPr>
+          <p:cNvPr id="3" name="내용 개체 틀 2">
+            <a:extLst>
+              <a:ext uri="{FF2B5EF4-FFF2-40B4-BE49-F238E27FC236}">
+                <a16:creationId xmlns:a16="http://schemas.microsoft.com/office/drawing/2014/main" id="{BA1B0502-4905-D632-107F-AC1249535A44}"/>
+              </a:ext>
+            </a:extLst>
+          </p:cNvPr>
+          <p:cNvSpPr>
+            <a:spLocks noGrp="1"/>
+          </p:cNvSpPr>
+          <p:nvPr>
+            <p:ph idx="1"/>
+          </p:nvPr>
+        </p:nvSpPr>
+        <p:spPr/>
+        <p:txBody>
+          <a:bodyPr/>
+          <a:lstStyle/>
+          <a:p>
+            <a:endParaRPr lang="ko-KR" altLang="en-US" dirty="0"/>
+          </a:p>
+        </p:txBody>
+      </p:sp>
+    </p:spTree>
+    <p:extLst>
+      <p:ext uri="{BB962C8B-B14F-4D97-AF65-F5344CB8AC3E}">
+        <p14:creationId xmlns:p14="http://schemas.microsoft.com/office/powerpoint/2010/main" val="722906113"/>
+      </p:ext>
+    </p:extLst>
+  </p:cSld>
+  <p:clrMapOvr>
+    <a:masterClrMapping/>
+  </p:clrMapOvr>
+</p:sld>
+</file>
+
+<file path=ppt/slides/slide5.xml><?xml version="1.0" encoding="utf-8"?>
+<p:sld xmlns:a="http://schemas.openxmlformats.org/drawingml/2006/main" xmlns:r="http://schemas.openxmlformats.org/officeDocument/2006/relationships" xmlns:p="http://schemas.openxmlformats.org/presentationml/2006/main">
+  <p:cSld>
+    <p:spTree>
+      <p:nvGrpSpPr>
+        <p:cNvPr id="1" name=""/>
+        <p:cNvGrpSpPr/>
+        <p:nvPr/>
+      </p:nvGrpSpPr>
+      <p:grpSpPr>
+        <a:xfrm>
+          <a:off x="0" y="0"/>
+          <a:ext cx="0" cy="0"/>
+          <a:chOff x="0" y="0"/>
+          <a:chExt cx="0" cy="0"/>
+        </a:xfrm>
+      </p:grpSpPr>
+      <p:sp>
+        <p:nvSpPr>
+          <p:cNvPr id="2" name="제목 1">
+            <a:extLst>
+              <a:ext uri="{FF2B5EF4-FFF2-40B4-BE49-F238E27FC236}">
+                <a16:creationId xmlns:a16="http://schemas.microsoft.com/office/drawing/2014/main" id="{BFEE2F73-5C50-47A2-2A0C-D96A58787A1F}"/>
+              </a:ext>
+            </a:extLst>
+          </p:cNvPr>
+          <p:cNvSpPr>
+            <a:spLocks noGrp="1"/>
+          </p:cNvSpPr>
+          <p:nvPr>
+            <p:ph type="title"/>
+          </p:nvPr>
+        </p:nvSpPr>
+        <p:spPr/>
+        <p:txBody>
+          <a:bodyPr/>
+          <a:lstStyle/>
+          <a:p>
+            <a:r>
+              <a:rPr lang="ko-KR" altLang="ko-KR" dirty="0" err="1">
+                <a:latin typeface="Segoe UI" panose="020B0502040204020203" pitchFamily="34" charset="0"/>
+              </a:rPr>
+              <a:t>Graph</a:t>
+            </a:r>
+            <a:r>
+              <a:rPr lang="ko-KR" altLang="ko-KR" dirty="0">
+                <a:latin typeface="Segoe UI" panose="020B0502040204020203" pitchFamily="34" charset="0"/>
+              </a:rPr>
+              <a:t> </a:t>
+            </a:r>
+            <a:r>
+              <a:rPr lang="ko-KR" altLang="ko-KR" dirty="0" err="1">
+                <a:latin typeface="Segoe UI" panose="020B0502040204020203" pitchFamily="34" charset="0"/>
+              </a:rPr>
+              <a:t>Integration</a:t>
+            </a:r>
+            <a:r>
+              <a:rPr lang="ko-KR" altLang="ko-KR" dirty="0">
+                <a:latin typeface="Segoe UI" panose="020B0502040204020203" pitchFamily="34" charset="0"/>
+              </a:rPr>
+              <a:t> </a:t>
+            </a:r>
+            <a:r>
+              <a:rPr lang="ko-KR" altLang="ko-KR" dirty="0" err="1">
+                <a:latin typeface="Segoe UI" panose="020B0502040204020203" pitchFamily="34" charset="0"/>
+              </a:rPr>
+              <a:t>in</a:t>
+            </a:r>
+            <a:r>
+              <a:rPr lang="ko-KR" altLang="ko-KR" dirty="0">
+                <a:latin typeface="Segoe UI" panose="020B0502040204020203" pitchFamily="34" charset="0"/>
+              </a:rPr>
+              <a:t> </a:t>
+            </a:r>
+            <a:r>
+              <a:rPr lang="ko-KR" altLang="ko-KR" dirty="0" err="1">
+                <a:latin typeface="Segoe UI" panose="020B0502040204020203" pitchFamily="34" charset="0"/>
+              </a:rPr>
+              <a:t>Transformers</a:t>
+            </a:r>
+            <a:endParaRPr lang="ko-KR" altLang="en-US" dirty="0"/>
+          </a:p>
+        </p:txBody>
+      </p:sp>
+      <p:sp>
+        <p:nvSpPr>
+          <p:cNvPr id="6" name="직사각형 5">
+            <a:extLst>
+              <a:ext uri="{FF2B5EF4-FFF2-40B4-BE49-F238E27FC236}">
+                <a16:creationId xmlns:a16="http://schemas.microsoft.com/office/drawing/2014/main" id="{DEE167EF-F21F-4F67-9FA5-7289459F8ACA}"/>
+              </a:ext>
+            </a:extLst>
+          </p:cNvPr>
+          <p:cNvSpPr/>
+          <p:nvPr/>
+        </p:nvSpPr>
+        <p:spPr>
+          <a:xfrm>
+            <a:off x="1251993" y="1944544"/>
+            <a:ext cx="1412112" cy="2592729"/>
+          </a:xfrm>
+          <a:prstGeom prst="rect">
+            <a:avLst/>
+          </a:prstGeom>
+          <a:solidFill>
+            <a:schemeClr val="tx2">
+              <a:lumMod val="25000"/>
+              <a:lumOff val="75000"/>
+            </a:schemeClr>
+          </a:solidFill>
+          <a:ln>
+            <a:noFill/>
+          </a:ln>
+        </p:spPr>
+        <p:style>
+          <a:lnRef idx="2">
+            <a:schemeClr val="accent1">
+              <a:shade val="15000"/>
+            </a:schemeClr>
+          </a:lnRef>
+          <a:fillRef idx="1">
+            <a:schemeClr val="accent1"/>
+          </a:fillRef>
+          <a:effectRef idx="0">
+            <a:schemeClr val="accent1"/>
+          </a:effectRef>
+          <a:fontRef idx="minor">
+            <a:schemeClr val="lt1"/>
+          </a:fontRef>
+        </p:style>
+        <p:txBody>
+          <a:bodyPr rtlCol="0" anchor="ctr"/>
+          <a:lstStyle/>
+          <a:p>
+            <a:pPr algn="ctr"/>
+            <a:r>
+              <a:rPr lang="en-US" altLang="ko-KR" dirty="0">
+                <a:solidFill>
+                  <a:schemeClr val="tx1"/>
+                </a:solidFill>
+              </a:rPr>
+              <a:t>Graph Type</a:t>
+            </a:r>
+            <a:endParaRPr lang="ko-KR" altLang="en-US" dirty="0">
+              <a:solidFill>
+                <a:schemeClr val="tx1"/>
+              </a:solidFill>
+            </a:endParaRPr>
+          </a:p>
+        </p:txBody>
+      </p:sp>
+      <p:sp>
+        <p:nvSpPr>
+          <p:cNvPr id="8" name="직사각형 7">
+            <a:extLst>
+              <a:ext uri="{FF2B5EF4-FFF2-40B4-BE49-F238E27FC236}">
+                <a16:creationId xmlns:a16="http://schemas.microsoft.com/office/drawing/2014/main" id="{3B918AAD-838F-42FD-BFB6-14FF1F282C3E}"/>
+              </a:ext>
+            </a:extLst>
+          </p:cNvPr>
+          <p:cNvSpPr/>
+          <p:nvPr/>
+        </p:nvSpPr>
+        <p:spPr>
+          <a:xfrm>
+            <a:off x="3299266" y="1944545"/>
+            <a:ext cx="1750676" cy="2592729"/>
+          </a:xfrm>
+          <a:prstGeom prst="rect">
+            <a:avLst/>
+          </a:prstGeom>
+          <a:solidFill>
+            <a:schemeClr val="tx2">
+              <a:lumMod val="25000"/>
+              <a:lumOff val="75000"/>
+            </a:schemeClr>
+          </a:solidFill>
+          <a:ln>
+            <a:noFill/>
+          </a:ln>
+        </p:spPr>
+        <p:style>
+          <a:lnRef idx="2">
+            <a:schemeClr val="accent1">
+              <a:shade val="15000"/>
+            </a:schemeClr>
+          </a:lnRef>
+          <a:fillRef idx="1">
+            <a:schemeClr val="accent1"/>
+          </a:fillRef>
+          <a:effectRef idx="0">
+            <a:schemeClr val="accent1"/>
+          </a:effectRef>
+          <a:fontRef idx="minor">
+            <a:schemeClr val="lt1"/>
+          </a:fontRef>
+        </p:style>
+        <p:txBody>
+          <a:bodyPr rtlCol="0" anchor="ctr"/>
+          <a:lstStyle/>
+          <a:p>
+            <a:pPr algn="ctr"/>
+            <a:r>
+              <a:rPr lang="en-US" altLang="ko-KR" dirty="0">
+                <a:solidFill>
+                  <a:schemeClr val="tx1"/>
+                </a:solidFill>
+              </a:rPr>
+              <a:t>Graph Representation Strategy</a:t>
+            </a:r>
+            <a:endParaRPr lang="ko-KR" altLang="en-US" dirty="0">
+              <a:solidFill>
+                <a:schemeClr val="tx1"/>
+              </a:solidFill>
+            </a:endParaRPr>
+          </a:p>
+        </p:txBody>
+      </p:sp>
+      <p:sp>
+        <p:nvSpPr>
+          <p:cNvPr id="9" name="직사각형 8">
+            <a:extLst>
+              <a:ext uri="{FF2B5EF4-FFF2-40B4-BE49-F238E27FC236}">
+                <a16:creationId xmlns:a16="http://schemas.microsoft.com/office/drawing/2014/main" id="{EF4727A0-F538-3D18-5EF4-9D02C7553CDC}"/>
+              </a:ext>
+            </a:extLst>
+          </p:cNvPr>
+          <p:cNvSpPr/>
+          <p:nvPr/>
+        </p:nvSpPr>
+        <p:spPr>
+          <a:xfrm>
+            <a:off x="5685103" y="1944547"/>
+            <a:ext cx="1412111" cy="2592729"/>
+          </a:xfrm>
+          <a:prstGeom prst="rect">
+            <a:avLst/>
+          </a:prstGeom>
+          <a:solidFill>
+            <a:schemeClr val="tx2">
+              <a:lumMod val="25000"/>
+              <a:lumOff val="75000"/>
+            </a:schemeClr>
+          </a:solidFill>
+          <a:ln>
+            <a:noFill/>
+          </a:ln>
+        </p:spPr>
+        <p:style>
+          <a:lnRef idx="2">
+            <a:schemeClr val="accent1">
+              <a:shade val="15000"/>
+            </a:schemeClr>
+          </a:lnRef>
+          <a:fillRef idx="1">
+            <a:schemeClr val="accent1"/>
+          </a:fillRef>
+          <a:effectRef idx="0">
+            <a:schemeClr val="accent1"/>
+          </a:effectRef>
+          <a:fontRef idx="minor">
+            <a:schemeClr val="lt1"/>
+          </a:fontRef>
+        </p:style>
+        <p:txBody>
+          <a:bodyPr rtlCol="0" anchor="ctr"/>
+          <a:lstStyle/>
+          <a:p>
+            <a:pPr algn="ctr"/>
+            <a:r>
+              <a:rPr lang="en-US" altLang="ko-KR" dirty="0">
+                <a:solidFill>
+                  <a:schemeClr val="tx1"/>
+                </a:solidFill>
+              </a:rPr>
+              <a:t>Positional Encoding</a:t>
+            </a:r>
+            <a:endParaRPr lang="ko-KR" altLang="en-US" dirty="0">
+              <a:solidFill>
+                <a:schemeClr val="tx1"/>
+              </a:solidFill>
+            </a:endParaRPr>
+          </a:p>
+        </p:txBody>
+      </p:sp>
+      <p:sp>
+        <p:nvSpPr>
+          <p:cNvPr id="10" name="직사각형 9">
+            <a:extLst>
+              <a:ext uri="{FF2B5EF4-FFF2-40B4-BE49-F238E27FC236}">
+                <a16:creationId xmlns:a16="http://schemas.microsoft.com/office/drawing/2014/main" id="{480419FE-065F-B96A-9AFA-E4B987CB0371}"/>
+              </a:ext>
+            </a:extLst>
+          </p:cNvPr>
+          <p:cNvSpPr/>
+          <p:nvPr/>
+        </p:nvSpPr>
+        <p:spPr>
+          <a:xfrm>
+            <a:off x="7732375" y="1944544"/>
+            <a:ext cx="1412112" cy="2592729"/>
+          </a:xfrm>
+          <a:prstGeom prst="rect">
+            <a:avLst/>
+          </a:prstGeom>
+          <a:solidFill>
+            <a:schemeClr val="tx2">
+              <a:lumMod val="25000"/>
+              <a:lumOff val="75000"/>
+            </a:schemeClr>
+          </a:solidFill>
+          <a:ln>
+            <a:noFill/>
+          </a:ln>
+        </p:spPr>
+        <p:style>
+          <a:lnRef idx="2">
+            <a:schemeClr val="accent1">
+              <a:shade val="15000"/>
+            </a:schemeClr>
+          </a:lnRef>
+          <a:fillRef idx="1">
+            <a:schemeClr val="accent1"/>
+          </a:fillRef>
+          <a:effectRef idx="0">
+            <a:schemeClr val="accent1"/>
+          </a:effectRef>
+          <a:fontRef idx="minor">
+            <a:schemeClr val="lt1"/>
+          </a:fontRef>
+        </p:style>
+        <p:txBody>
+          <a:bodyPr rtlCol="0" anchor="ctr"/>
+          <a:lstStyle/>
+          <a:p>
+            <a:pPr algn="ctr"/>
+            <a:r>
+              <a:rPr lang="en-US" altLang="ko-KR" dirty="0">
+                <a:solidFill>
+                  <a:schemeClr val="tx1"/>
+                </a:solidFill>
+              </a:rPr>
+              <a:t>Integration Strategy</a:t>
+            </a:r>
+            <a:endParaRPr lang="ko-KR" altLang="en-US" dirty="0">
+              <a:solidFill>
+                <a:schemeClr val="tx1"/>
+              </a:solidFill>
+            </a:endParaRPr>
+          </a:p>
+        </p:txBody>
+      </p:sp>
+      <p:sp>
+        <p:nvSpPr>
+          <p:cNvPr id="11" name="직사각형 10">
+            <a:extLst>
+              <a:ext uri="{FF2B5EF4-FFF2-40B4-BE49-F238E27FC236}">
+                <a16:creationId xmlns:a16="http://schemas.microsoft.com/office/drawing/2014/main" id="{83640E4E-138D-1DB5-07B3-3A66EF27D3EF}"/>
+              </a:ext>
+            </a:extLst>
+          </p:cNvPr>
+          <p:cNvSpPr/>
+          <p:nvPr/>
+        </p:nvSpPr>
+        <p:spPr>
+          <a:xfrm>
+            <a:off x="9779647" y="1944543"/>
+            <a:ext cx="1574153" cy="2592729"/>
+          </a:xfrm>
+          <a:prstGeom prst="rect">
+            <a:avLst/>
+          </a:prstGeom>
+          <a:solidFill>
+            <a:schemeClr val="tx2">
+              <a:lumMod val="25000"/>
+              <a:lumOff val="75000"/>
+            </a:schemeClr>
+          </a:solidFill>
+          <a:ln>
+            <a:noFill/>
+          </a:ln>
+        </p:spPr>
+        <p:style>
+          <a:lnRef idx="2">
+            <a:schemeClr val="accent1">
+              <a:shade val="15000"/>
+            </a:schemeClr>
+          </a:lnRef>
+          <a:fillRef idx="1">
+            <a:schemeClr val="accent1"/>
+          </a:fillRef>
+          <a:effectRef idx="0">
+            <a:schemeClr val="accent1"/>
+          </a:effectRef>
+          <a:fontRef idx="minor">
+            <a:schemeClr val="lt1"/>
+          </a:fontRef>
+        </p:style>
+        <p:txBody>
+          <a:bodyPr rtlCol="0" anchor="ctr"/>
+          <a:lstStyle/>
+          <a:p>
+            <a:pPr algn="ctr"/>
+            <a:r>
+              <a:rPr lang="en-US" altLang="ko-KR" dirty="0">
+                <a:solidFill>
+                  <a:schemeClr val="tx1"/>
+                </a:solidFill>
+              </a:rPr>
+              <a:t>Model Architecture</a:t>
+            </a:r>
+            <a:endParaRPr lang="ko-KR" altLang="en-US" dirty="0">
+              <a:solidFill>
+                <a:schemeClr val="tx1"/>
+              </a:solidFill>
+            </a:endParaRPr>
+          </a:p>
+        </p:txBody>
+      </p:sp>
+      <p:cxnSp>
+        <p:nvCxnSpPr>
+          <p:cNvPr id="13" name="직선 화살표 연결선 12">
+            <a:extLst>
+              <a:ext uri="{FF2B5EF4-FFF2-40B4-BE49-F238E27FC236}">
+                <a16:creationId xmlns:a16="http://schemas.microsoft.com/office/drawing/2014/main" id="{38F2F8C7-6E17-4201-35B9-172044360D5B}"/>
+              </a:ext>
+            </a:extLst>
+          </p:cNvPr>
+          <p:cNvCxnSpPr>
+            <a:cxnSpLocks/>
+            <a:stCxn id="6" idx="3"/>
+            <a:endCxn id="8" idx="1"/>
+          </p:cNvCxnSpPr>
+          <p:nvPr/>
+        </p:nvCxnSpPr>
+        <p:spPr>
+          <a:xfrm>
+            <a:off x="2664105" y="3240909"/>
+            <a:ext cx="635161" cy="1"/>
+          </a:xfrm>
+          <a:prstGeom prst="straightConnector1">
+            <a:avLst/>
+          </a:prstGeom>
+          <a:ln>
+            <a:tailEnd type="triangle"/>
+          </a:ln>
+        </p:spPr>
+        <p:style>
+          <a:lnRef idx="2">
+            <a:schemeClr val="dk1"/>
+          </a:lnRef>
+          <a:fillRef idx="0">
+            <a:schemeClr val="dk1"/>
+          </a:fillRef>
+          <a:effectRef idx="1">
+            <a:schemeClr val="dk1"/>
+          </a:effectRef>
+          <a:fontRef idx="minor">
+            <a:schemeClr val="tx1"/>
+          </a:fontRef>
+        </p:style>
+      </p:cxnSp>
+      <p:cxnSp>
+        <p:nvCxnSpPr>
+          <p:cNvPr id="15" name="직선 화살표 연결선 14">
+            <a:extLst>
+              <a:ext uri="{FF2B5EF4-FFF2-40B4-BE49-F238E27FC236}">
+                <a16:creationId xmlns:a16="http://schemas.microsoft.com/office/drawing/2014/main" id="{B61DE1F5-FAB8-B4C5-B573-8CE6E24AD339}"/>
+              </a:ext>
+            </a:extLst>
+          </p:cNvPr>
+          <p:cNvCxnSpPr>
+            <a:cxnSpLocks/>
+            <a:stCxn id="8" idx="3"/>
+            <a:endCxn id="9" idx="1"/>
+          </p:cNvCxnSpPr>
+          <p:nvPr/>
+        </p:nvCxnSpPr>
+        <p:spPr>
+          <a:xfrm>
+            <a:off x="5049942" y="3240910"/>
+            <a:ext cx="635161" cy="2"/>
+          </a:xfrm>
+          <a:prstGeom prst="straightConnector1">
+            <a:avLst/>
+          </a:prstGeom>
+          <a:ln>
+            <a:tailEnd type="triangle"/>
+          </a:ln>
+        </p:spPr>
+        <p:style>
+          <a:lnRef idx="2">
+            <a:schemeClr val="dk1"/>
+          </a:lnRef>
+          <a:fillRef idx="0">
+            <a:schemeClr val="dk1"/>
+          </a:fillRef>
+          <a:effectRef idx="1">
+            <a:schemeClr val="dk1"/>
+          </a:effectRef>
+          <a:fontRef idx="minor">
+            <a:schemeClr val="tx1"/>
+          </a:fontRef>
+        </p:style>
+      </p:cxnSp>
+      <p:cxnSp>
+        <p:nvCxnSpPr>
+          <p:cNvPr id="17" name="직선 화살표 연결선 16">
+            <a:extLst>
+              <a:ext uri="{FF2B5EF4-FFF2-40B4-BE49-F238E27FC236}">
+                <a16:creationId xmlns:a16="http://schemas.microsoft.com/office/drawing/2014/main" id="{9DF81BC3-B842-7D0F-6F32-D5655D51258C}"/>
+              </a:ext>
+            </a:extLst>
+          </p:cNvPr>
+          <p:cNvCxnSpPr>
+            <a:cxnSpLocks/>
+            <a:stCxn id="9" idx="3"/>
+            <a:endCxn id="10" idx="1"/>
+          </p:cNvCxnSpPr>
+          <p:nvPr/>
+        </p:nvCxnSpPr>
+        <p:spPr>
+          <a:xfrm flipV="1">
+            <a:off x="7097214" y="3240909"/>
+            <a:ext cx="635161" cy="3"/>
+          </a:xfrm>
+          <a:prstGeom prst="straightConnector1">
+            <a:avLst/>
+          </a:prstGeom>
+          <a:ln>
+            <a:tailEnd type="triangle"/>
+          </a:ln>
+        </p:spPr>
+        <p:style>
+          <a:lnRef idx="2">
+            <a:schemeClr val="dk1"/>
+          </a:lnRef>
+          <a:fillRef idx="0">
+            <a:schemeClr val="dk1"/>
+          </a:fillRef>
+          <a:effectRef idx="1">
+            <a:schemeClr val="dk1"/>
+          </a:effectRef>
+          <a:fontRef idx="minor">
+            <a:schemeClr val="tx1"/>
+          </a:fontRef>
+        </p:style>
+      </p:cxnSp>
+      <p:cxnSp>
+        <p:nvCxnSpPr>
+          <p:cNvPr id="19" name="직선 화살표 연결선 18">
+            <a:extLst>
+              <a:ext uri="{FF2B5EF4-FFF2-40B4-BE49-F238E27FC236}">
+                <a16:creationId xmlns:a16="http://schemas.microsoft.com/office/drawing/2014/main" id="{2BB6E7D3-C7A3-AD68-5638-24A4751E1FFE}"/>
+              </a:ext>
+            </a:extLst>
+          </p:cNvPr>
+          <p:cNvCxnSpPr>
+            <a:cxnSpLocks/>
+            <a:stCxn id="10" idx="3"/>
+            <a:endCxn id="11" idx="1"/>
+          </p:cNvCxnSpPr>
+          <p:nvPr/>
+        </p:nvCxnSpPr>
+        <p:spPr>
+          <a:xfrm flipV="1">
+            <a:off x="9144487" y="3240908"/>
+            <a:ext cx="635160" cy="1"/>
+          </a:xfrm>
+          <a:prstGeom prst="straightConnector1">
+            <a:avLst/>
+          </a:prstGeom>
+          <a:ln>
+            <a:tailEnd type="triangle"/>
+          </a:ln>
+        </p:spPr>
+        <p:style>
+          <a:lnRef idx="2">
+            <a:schemeClr val="dk1"/>
+          </a:lnRef>
+          <a:fillRef idx="0">
+            <a:schemeClr val="dk1"/>
+          </a:fillRef>
+          <a:effectRef idx="1">
+            <a:schemeClr val="dk1"/>
+          </a:effectRef>
+          <a:fontRef idx="minor">
+            <a:schemeClr val="tx1"/>
+          </a:fontRef>
+        </p:style>
+      </p:cxnSp>
+    </p:spTree>
+    <p:extLst>
+      <p:ext uri="{BB962C8B-B14F-4D97-AF65-F5344CB8AC3E}">
+        <p14:creationId xmlns:p14="http://schemas.microsoft.com/office/powerpoint/2010/main" val="4024398441"/>
+      </p:ext>
+    </p:extLst>
+  </p:cSld>
+  <p:clrMapOvr>
+    <a:masterClrMapping/>
+  </p:clrMapOvr>
+</p:sld>
+</file>
+
+<file path=ppt/slides/slide6.xml><?xml version="1.0" encoding="utf-8"?>
+<p:sld xmlns:a="http://schemas.openxmlformats.org/drawingml/2006/main" xmlns:r="http://schemas.openxmlformats.org/officeDocument/2006/relationships" xmlns:p="http://schemas.openxmlformats.org/presentationml/2006/main">
+  <p:cSld>
+    <p:spTree>
+      <p:nvGrpSpPr>
+        <p:cNvPr id="1" name="">
+          <a:extLst>
+            <a:ext uri="{FF2B5EF4-FFF2-40B4-BE49-F238E27FC236}">
+              <a16:creationId xmlns:a16="http://schemas.microsoft.com/office/drawing/2014/main" id="{2F677DC8-AE94-E283-09CD-6885E3EA40EF}"/>
+            </a:ext>
+          </a:extLst>
+        </p:cNvPr>
+        <p:cNvGrpSpPr/>
+        <p:nvPr/>
+      </p:nvGrpSpPr>
+      <p:grpSpPr>
+        <a:xfrm>
+          <a:off x="0" y="0"/>
+          <a:ext cx="0" cy="0"/>
+          <a:chOff x="0" y="0"/>
+          <a:chExt cx="0" cy="0"/>
+        </a:xfrm>
+      </p:grpSpPr>
+      <p:sp>
+        <p:nvSpPr>
+          <p:cNvPr id="2" name="제목 1">
+            <a:extLst>
+              <a:ext uri="{FF2B5EF4-FFF2-40B4-BE49-F238E27FC236}">
+                <a16:creationId xmlns:a16="http://schemas.microsoft.com/office/drawing/2014/main" id="{4472E694-6CF5-2252-9196-378875CC2689}"/>
+              </a:ext>
+            </a:extLst>
+          </p:cNvPr>
+          <p:cNvSpPr>
+            <a:spLocks noGrp="1"/>
+          </p:cNvSpPr>
+          <p:nvPr>
+            <p:ph type="title"/>
+          </p:nvPr>
+        </p:nvSpPr>
+        <p:spPr/>
+        <p:txBody>
+          <a:bodyPr/>
+          <a:lstStyle/>
+          <a:p>
+            <a:r>
+              <a:rPr lang="ko-KR" altLang="ko-KR" dirty="0" err="1">
+                <a:latin typeface="Segoe UI" panose="020B0502040204020203" pitchFamily="34" charset="0"/>
+              </a:rPr>
+              <a:t>Graph</a:t>
+            </a:r>
+            <a:r>
+              <a:rPr lang="ko-KR" altLang="ko-KR" dirty="0">
+                <a:latin typeface="Segoe UI" panose="020B0502040204020203" pitchFamily="34" charset="0"/>
+              </a:rPr>
+              <a:t> </a:t>
+            </a:r>
+            <a:r>
+              <a:rPr lang="ko-KR" altLang="ko-KR" dirty="0" err="1">
+                <a:latin typeface="Segoe UI" panose="020B0502040204020203" pitchFamily="34" charset="0"/>
+              </a:rPr>
+              <a:t>Integration</a:t>
+            </a:r>
+            <a:r>
+              <a:rPr lang="ko-KR" altLang="ko-KR" dirty="0">
+                <a:latin typeface="Segoe UI" panose="020B0502040204020203" pitchFamily="34" charset="0"/>
+              </a:rPr>
+              <a:t> </a:t>
+            </a:r>
+            <a:r>
+              <a:rPr lang="ko-KR" altLang="ko-KR" dirty="0" err="1">
+                <a:latin typeface="Segoe UI" panose="020B0502040204020203" pitchFamily="34" charset="0"/>
+              </a:rPr>
+              <a:t>in</a:t>
+            </a:r>
+            <a:r>
+              <a:rPr lang="ko-KR" altLang="ko-KR" dirty="0">
+                <a:latin typeface="Segoe UI" panose="020B0502040204020203" pitchFamily="34" charset="0"/>
+              </a:rPr>
+              <a:t> </a:t>
+            </a:r>
+            <a:r>
+              <a:rPr lang="ko-KR" altLang="ko-KR" dirty="0" err="1">
+                <a:latin typeface="Segoe UI" panose="020B0502040204020203" pitchFamily="34" charset="0"/>
+              </a:rPr>
+              <a:t>Transformers</a:t>
+            </a:r>
+            <a:endParaRPr lang="ko-KR" altLang="en-US" dirty="0"/>
+          </a:p>
+        </p:txBody>
+      </p:sp>
+      <p:pic>
+        <p:nvPicPr>
+          <p:cNvPr id="5" name="내용 개체 틀 4">
+            <a:extLst>
+              <a:ext uri="{FF2B5EF4-FFF2-40B4-BE49-F238E27FC236}">
+                <a16:creationId xmlns:a16="http://schemas.microsoft.com/office/drawing/2014/main" id="{731CB884-6EF8-21E3-BC88-AA877FD07A86}"/>
+              </a:ext>
+            </a:extLst>
+          </p:cNvPr>
+          <p:cNvPicPr>
+            <a:picLocks noGrp="1" noChangeAspect="1"/>
+          </p:cNvPicPr>
+          <p:nvPr>
+            <p:ph idx="1"/>
+          </p:nvPr>
+        </p:nvPicPr>
+        <p:blipFill>
+          <a:blip r:embed="rId2">
+            <a:extLst>
+              <a:ext uri="{28A0092B-C50C-407E-A947-70E740481C1C}">
+                <a14:useLocalDpi xmlns:a14="http://schemas.microsoft.com/office/drawing/2010/main" val="0"/>
+              </a:ext>
+            </a:extLst>
+          </a:blip>
+          <a:stretch>
+            <a:fillRect/>
+          </a:stretch>
+        </p:blipFill>
+        <p:spPr>
+          <a:xfrm>
+            <a:off x="2900191" y="1825625"/>
+            <a:ext cx="6391617" cy="4351338"/>
+          </a:xfrm>
+          <a:prstGeom prst="rect">
+            <a:avLst/>
+          </a:prstGeom>
+        </p:spPr>
+      </p:pic>
+    </p:spTree>
+    <p:extLst>
+      <p:ext uri="{BB962C8B-B14F-4D97-AF65-F5344CB8AC3E}">
+        <p14:creationId xmlns:p14="http://schemas.microsoft.com/office/powerpoint/2010/main" val="2158294101"/>
+      </p:ext>
+    </p:extLst>
+  </p:cSld>
+  <p:clrMapOvr>
+    <a:masterClrMapping/>
+  </p:clrMapOvr>
+</p:sld>
+</file>
+
+<file path=ppt/slides/slide7.xml><?xml version="1.0" encoding="utf-8"?>
+<p:sld xmlns:a="http://schemas.openxmlformats.org/drawingml/2006/main" xmlns:r="http://schemas.openxmlformats.org/officeDocument/2006/relationships" xmlns:p="http://schemas.openxmlformats.org/presentationml/2006/main">
+  <p:cSld>
+    <p:spTree>
+      <p:nvGrpSpPr>
+        <p:cNvPr id="1" name="">
+          <a:extLst>
+            <a:ext uri="{FF2B5EF4-FFF2-40B4-BE49-F238E27FC236}">
+              <a16:creationId xmlns:a16="http://schemas.microsoft.com/office/drawing/2014/main" id="{1C169E57-A453-3060-185B-A1DC7418AA00}"/>
+            </a:ext>
+          </a:extLst>
+        </p:cNvPr>
+        <p:cNvGrpSpPr/>
+        <p:nvPr/>
+      </p:nvGrpSpPr>
+      <p:grpSpPr>
+        <a:xfrm>
+          <a:off x="0" y="0"/>
+          <a:ext cx="0" cy="0"/>
+          <a:chOff x="0" y="0"/>
+          <a:chExt cx="0" cy="0"/>
+        </a:xfrm>
+      </p:grpSpPr>
+      <p:sp>
+        <p:nvSpPr>
+          <p:cNvPr id="2" name="제목 1">
+            <a:extLst>
+              <a:ext uri="{FF2B5EF4-FFF2-40B4-BE49-F238E27FC236}">
+                <a16:creationId xmlns:a16="http://schemas.microsoft.com/office/drawing/2014/main" id="{9997B932-3454-ABC6-CB8B-A4A02F2C708E}"/>
+              </a:ext>
+            </a:extLst>
+          </p:cNvPr>
+          <p:cNvSpPr>
+            <a:spLocks noGrp="1"/>
+          </p:cNvSpPr>
+          <p:nvPr>
+            <p:ph type="title"/>
+          </p:nvPr>
+        </p:nvSpPr>
+        <p:spPr/>
+        <p:txBody>
+          <a:bodyPr/>
+          <a:lstStyle/>
+          <a:p>
+            <a:r>
+              <a:rPr lang="ko-KR" altLang="ko-KR" dirty="0" err="1">
+                <a:latin typeface="Segoe UI" panose="020B0502040204020203" pitchFamily="34" charset="0"/>
+              </a:rPr>
+              <a:t>Graph</a:t>
+            </a:r>
+            <a:r>
+              <a:rPr lang="ko-KR" altLang="ko-KR" dirty="0">
+                <a:latin typeface="Segoe UI" panose="020B0502040204020203" pitchFamily="34" charset="0"/>
+              </a:rPr>
+              <a:t> </a:t>
+            </a:r>
+            <a:r>
+              <a:rPr lang="ko-KR" altLang="ko-KR" dirty="0" err="1">
+                <a:latin typeface="Segoe UI" panose="020B0502040204020203" pitchFamily="34" charset="0"/>
+              </a:rPr>
+              <a:t>Integration</a:t>
+            </a:r>
+            <a:r>
+              <a:rPr lang="ko-KR" altLang="ko-KR" dirty="0">
+                <a:latin typeface="Segoe UI" panose="020B0502040204020203" pitchFamily="34" charset="0"/>
+              </a:rPr>
+              <a:t> </a:t>
+            </a:r>
+            <a:r>
+              <a:rPr lang="ko-KR" altLang="ko-KR" dirty="0" err="1">
+                <a:latin typeface="Segoe UI" panose="020B0502040204020203" pitchFamily="34" charset="0"/>
+              </a:rPr>
+              <a:t>in</a:t>
+            </a:r>
+            <a:r>
+              <a:rPr lang="ko-KR" altLang="ko-KR" dirty="0">
+                <a:latin typeface="Segoe UI" panose="020B0502040204020203" pitchFamily="34" charset="0"/>
+              </a:rPr>
+              <a:t> </a:t>
+            </a:r>
+            <a:r>
+              <a:rPr lang="ko-KR" altLang="ko-KR" dirty="0" err="1">
+                <a:latin typeface="Segoe UI" panose="020B0502040204020203" pitchFamily="34" charset="0"/>
+              </a:rPr>
+              <a:t>Transformers</a:t>
+            </a:r>
+            <a:endParaRPr lang="ko-KR" altLang="en-US" dirty="0"/>
+          </a:p>
+        </p:txBody>
+      </p:sp>
+      <p:pic>
+        <p:nvPicPr>
+          <p:cNvPr id="5" name="내용 개체 틀 4">
+            <a:extLst>
+              <a:ext uri="{FF2B5EF4-FFF2-40B4-BE49-F238E27FC236}">
+                <a16:creationId xmlns:a16="http://schemas.microsoft.com/office/drawing/2014/main" id="{883F3C3C-FE5D-52B8-4125-0211591ECE7A}"/>
+              </a:ext>
+            </a:extLst>
+          </p:cNvPr>
+          <p:cNvPicPr>
+            <a:picLocks noGrp="1" noChangeAspect="1"/>
+          </p:cNvPicPr>
+          <p:nvPr>
+            <p:ph idx="1"/>
+          </p:nvPr>
+        </p:nvPicPr>
+        <p:blipFill>
+          <a:blip r:embed="rId2">
+            <a:extLst>
+              <a:ext uri="{28A0092B-C50C-407E-A947-70E740481C1C}">
+                <a14:useLocalDpi xmlns:a14="http://schemas.microsoft.com/office/drawing/2010/main" val="0"/>
+              </a:ext>
+            </a:extLst>
+          </a:blip>
+          <a:stretch>
+            <a:fillRect/>
+          </a:stretch>
+        </p:blipFill>
+        <p:spPr>
+          <a:xfrm>
+            <a:off x="3411484" y="1947396"/>
+            <a:ext cx="5369031" cy="3393825"/>
+          </a:xfrm>
+          <a:prstGeom prst="rect">
+            <a:avLst/>
+          </a:prstGeom>
+        </p:spPr>
+      </p:pic>
+    </p:spTree>
+    <p:extLst>
+      <p:ext uri="{BB962C8B-B14F-4D97-AF65-F5344CB8AC3E}">
+        <p14:creationId xmlns:p14="http://schemas.microsoft.com/office/powerpoint/2010/main" val="3456327454"/>
+      </p:ext>
+    </p:extLst>
+  </p:cSld>
+  <p:clrMapOvr>
+    <a:masterClrMapping/>
+  </p:clrMapOvr>
+</p:sld>
+</file>
+
+<file path=ppt/slides/slide8.xml><?xml version="1.0" encoding="utf-8"?>
+<p:sld xmlns:a="http://schemas.openxmlformats.org/drawingml/2006/main" xmlns:r="http://schemas.openxmlformats.org/officeDocument/2006/relationships" xmlns:p="http://schemas.openxmlformats.org/presentationml/2006/main">
+  <p:cSld>
+    <p:spTree>
+      <p:nvGrpSpPr>
+        <p:cNvPr id="1" name="">
+          <a:extLst>
+            <a:ext uri="{FF2B5EF4-FFF2-40B4-BE49-F238E27FC236}">
+              <a16:creationId xmlns:a16="http://schemas.microsoft.com/office/drawing/2014/main" id="{2F229982-D424-CCC6-32A7-66FAE572F692}"/>
+            </a:ext>
+          </a:extLst>
+        </p:cNvPr>
+        <p:cNvGrpSpPr/>
+        <p:nvPr/>
+      </p:nvGrpSpPr>
+      <p:grpSpPr>
+        <a:xfrm>
+          <a:off x="0" y="0"/>
+          <a:ext cx="0" cy="0"/>
+          <a:chOff x="0" y="0"/>
+          <a:chExt cx="0" cy="0"/>
+        </a:xfrm>
+      </p:grpSpPr>
+      <p:sp>
+        <p:nvSpPr>
+          <p:cNvPr id="2" name="제목 1">
+            <a:extLst>
+              <a:ext uri="{FF2B5EF4-FFF2-40B4-BE49-F238E27FC236}">
+                <a16:creationId xmlns:a16="http://schemas.microsoft.com/office/drawing/2014/main" id="{26958D79-F8A9-6C18-6E6C-1221CB2B1149}"/>
+              </a:ext>
+            </a:extLst>
+          </p:cNvPr>
+          <p:cNvSpPr>
+            <a:spLocks noGrp="1"/>
+          </p:cNvSpPr>
+          <p:nvPr>
+            <p:ph type="title"/>
+          </p:nvPr>
+        </p:nvSpPr>
+        <p:spPr/>
+        <p:txBody>
+          <a:bodyPr/>
+          <a:lstStyle/>
+          <a:p>
+            <a:r>
+              <a:rPr lang="ko-KR" altLang="ko-KR" dirty="0" err="1">
+                <a:latin typeface="Segoe UI" panose="020B0502040204020203" pitchFamily="34" charset="0"/>
+              </a:rPr>
+              <a:t>Graph</a:t>
+            </a:r>
+            <a:r>
+              <a:rPr lang="ko-KR" altLang="ko-KR" dirty="0">
+                <a:latin typeface="Segoe UI" panose="020B0502040204020203" pitchFamily="34" charset="0"/>
+              </a:rPr>
+              <a:t> </a:t>
+            </a:r>
+            <a:r>
+              <a:rPr lang="ko-KR" altLang="ko-KR" dirty="0" err="1">
+                <a:latin typeface="Segoe UI" panose="020B0502040204020203" pitchFamily="34" charset="0"/>
+              </a:rPr>
+              <a:t>Integration</a:t>
+            </a:r>
+            <a:r>
+              <a:rPr lang="ko-KR" altLang="ko-KR" dirty="0">
+                <a:latin typeface="Segoe UI" panose="020B0502040204020203" pitchFamily="34" charset="0"/>
+              </a:rPr>
+              <a:t> </a:t>
+            </a:r>
+            <a:r>
+              <a:rPr lang="ko-KR" altLang="ko-KR" dirty="0" err="1">
+                <a:latin typeface="Segoe UI" panose="020B0502040204020203" pitchFamily="34" charset="0"/>
+              </a:rPr>
+              <a:t>in</a:t>
+            </a:r>
+            <a:r>
+              <a:rPr lang="ko-KR" altLang="ko-KR" dirty="0">
+                <a:latin typeface="Segoe UI" panose="020B0502040204020203" pitchFamily="34" charset="0"/>
+              </a:rPr>
+              <a:t> </a:t>
+            </a:r>
+            <a:r>
+              <a:rPr lang="ko-KR" altLang="ko-KR" dirty="0" err="1">
+                <a:latin typeface="Segoe UI" panose="020B0502040204020203" pitchFamily="34" charset="0"/>
+              </a:rPr>
+              <a:t>Transformers</a:t>
+            </a:r>
+            <a:endParaRPr lang="ko-KR" altLang="en-US" dirty="0"/>
+          </a:p>
+        </p:txBody>
+      </p:sp>
+      <p:pic>
+        <p:nvPicPr>
+          <p:cNvPr id="5" name="내용 개체 틀 4">
+            <a:extLst>
+              <a:ext uri="{FF2B5EF4-FFF2-40B4-BE49-F238E27FC236}">
+                <a16:creationId xmlns:a16="http://schemas.microsoft.com/office/drawing/2014/main" id="{491DA166-CFB5-D2AB-BE08-4EEEC6CCC9AC}"/>
+              </a:ext>
+            </a:extLst>
+          </p:cNvPr>
+          <p:cNvPicPr>
+            <a:picLocks noGrp="1" noChangeAspect="1"/>
+          </p:cNvPicPr>
+          <p:nvPr>
+            <p:ph idx="1"/>
+          </p:nvPr>
+        </p:nvPicPr>
+        <p:blipFill>
+          <a:blip r:embed="rId2">
+            <a:extLst>
+              <a:ext uri="{28A0092B-C50C-407E-A947-70E740481C1C}">
+                <a14:useLocalDpi xmlns:a14="http://schemas.microsoft.com/office/drawing/2010/main" val="0"/>
+              </a:ext>
+            </a:extLst>
+          </a:blip>
+          <a:stretch>
+            <a:fillRect/>
+          </a:stretch>
+        </p:blipFill>
+        <p:spPr>
+          <a:xfrm>
+            <a:off x="3110539" y="1592918"/>
+            <a:ext cx="4934915" cy="3280532"/>
+          </a:xfrm>
+          <a:prstGeom prst="rect">
+            <a:avLst/>
+          </a:prstGeom>
+        </p:spPr>
+      </p:pic>
+    </p:spTree>
+    <p:extLst>
+      <p:ext uri="{BB962C8B-B14F-4D97-AF65-F5344CB8AC3E}">
+        <p14:creationId xmlns:p14="http://schemas.microsoft.com/office/powerpoint/2010/main" val="3234813020"/>
+      </p:ext>
+    </p:extLst>
+  </p:cSld>
+  <p:clrMapOvr>
+    <a:masterClrMapping/>
+  </p:clrMapOvr>
+</p:sld>
+</file>
+
+<file path=ppt/slides/slide9.xml><?xml version="1.0" encoding="utf-8"?>
+<p:sld xmlns:a="http://schemas.openxmlformats.org/drawingml/2006/main" xmlns:r="http://schemas.openxmlformats.org/officeDocument/2006/relationships" xmlns:p="http://schemas.openxmlformats.org/presentationml/2006/main">
+  <p:cSld>
+    <p:spTree>
+      <p:nvGrpSpPr>
+        <p:cNvPr id="1" name="">
+          <a:extLst>
+            <a:ext uri="{FF2B5EF4-FFF2-40B4-BE49-F238E27FC236}">
+              <a16:creationId xmlns:a16="http://schemas.microsoft.com/office/drawing/2014/main" id="{7984F9DC-6339-7B43-AF17-E958E2845EFF}"/>
+            </a:ext>
+          </a:extLst>
+        </p:cNvPr>
+        <p:cNvGrpSpPr/>
+        <p:nvPr/>
+      </p:nvGrpSpPr>
+      <p:grpSpPr>
+        <a:xfrm>
+          <a:off x="0" y="0"/>
+          <a:ext cx="0" cy="0"/>
+          <a:chOff x="0" y="0"/>
+          <a:chExt cx="0" cy="0"/>
+        </a:xfrm>
+      </p:grpSpPr>
+      <p:sp>
+        <p:nvSpPr>
+          <p:cNvPr id="2" name="제목 1">
+            <a:extLst>
+              <a:ext uri="{FF2B5EF4-FFF2-40B4-BE49-F238E27FC236}">
+                <a16:creationId xmlns:a16="http://schemas.microsoft.com/office/drawing/2014/main" id="{B7953340-85F0-56FD-63EB-A46D85B9BB71}"/>
+              </a:ext>
+            </a:extLst>
+          </p:cNvPr>
+          <p:cNvSpPr>
+            <a:spLocks noGrp="1"/>
+          </p:cNvSpPr>
+          <p:nvPr>
+            <p:ph type="title"/>
+          </p:nvPr>
+        </p:nvSpPr>
+        <p:spPr/>
+        <p:txBody>
+          <a:bodyPr/>
+          <a:lstStyle/>
+          <a:p>
+            <a:r>
+              <a:rPr lang="ko-KR" altLang="ko-KR" dirty="0" err="1">
+                <a:latin typeface="Segoe UI" panose="020B0502040204020203" pitchFamily="34" charset="0"/>
+              </a:rPr>
+              <a:t>Graph</a:t>
+            </a:r>
+            <a:r>
+              <a:rPr lang="ko-KR" altLang="ko-KR" dirty="0">
+                <a:latin typeface="Segoe UI" panose="020B0502040204020203" pitchFamily="34" charset="0"/>
+              </a:rPr>
+              <a:t> </a:t>
+            </a:r>
+            <a:r>
+              <a:rPr lang="ko-KR" altLang="ko-KR" dirty="0" err="1">
+                <a:latin typeface="Segoe UI" panose="020B0502040204020203" pitchFamily="34" charset="0"/>
+              </a:rPr>
+              <a:t>Integration</a:t>
+            </a:r>
+            <a:r>
+              <a:rPr lang="ko-KR" altLang="ko-KR" dirty="0">
+                <a:latin typeface="Segoe UI" panose="020B0502040204020203" pitchFamily="34" charset="0"/>
+              </a:rPr>
+              <a:t> </a:t>
+            </a:r>
+            <a:r>
+              <a:rPr lang="ko-KR" altLang="ko-KR" dirty="0" err="1">
+                <a:latin typeface="Segoe UI" panose="020B0502040204020203" pitchFamily="34" charset="0"/>
+              </a:rPr>
+              <a:t>in</a:t>
+            </a:r>
+            <a:r>
+              <a:rPr lang="ko-KR" altLang="ko-KR" dirty="0">
+                <a:latin typeface="Segoe UI" panose="020B0502040204020203" pitchFamily="34" charset="0"/>
+              </a:rPr>
+              <a:t> </a:t>
+            </a:r>
+            <a:r>
+              <a:rPr lang="ko-KR" altLang="ko-KR" dirty="0" err="1">
+                <a:latin typeface="Segoe UI" panose="020B0502040204020203" pitchFamily="34" charset="0"/>
+              </a:rPr>
+              <a:t>Transformers</a:t>
+            </a:r>
+            <a:endParaRPr lang="ko-KR" altLang="en-US" dirty="0"/>
+          </a:p>
+        </p:txBody>
+      </p:sp>
+      <p:pic>
+        <p:nvPicPr>
+          <p:cNvPr id="7" name="내용 개체 틀 6">
+            <a:extLst>
+              <a:ext uri="{FF2B5EF4-FFF2-40B4-BE49-F238E27FC236}">
+                <a16:creationId xmlns:a16="http://schemas.microsoft.com/office/drawing/2014/main" id="{FECAB2F2-0DAE-7B46-5E75-5B3B5DBFC093}"/>
+              </a:ext>
+            </a:extLst>
+          </p:cNvPr>
+          <p:cNvPicPr>
+            <a:picLocks noGrp="1" noChangeAspect="1"/>
+          </p:cNvPicPr>
+          <p:nvPr>
+            <p:ph idx="1"/>
+          </p:nvPr>
+        </p:nvPicPr>
+        <p:blipFill>
+          <a:blip r:embed="rId2">
+            <a:extLst>
+              <a:ext uri="{28A0092B-C50C-407E-A947-70E740481C1C}">
+                <a14:useLocalDpi xmlns:a14="http://schemas.microsoft.com/office/drawing/2010/main" val="0"/>
+              </a:ext>
+            </a:extLst>
+          </a:blip>
+          <a:stretch>
+            <a:fillRect/>
+          </a:stretch>
+        </p:blipFill>
+        <p:spPr>
+          <a:xfrm>
+            <a:off x="838200" y="2169076"/>
+            <a:ext cx="10515600" cy="3664435"/>
+          </a:xfrm>
+          <a:prstGeom prst="rect">
+            <a:avLst/>
+          </a:prstGeom>
+        </p:spPr>
+      </p:pic>
+    </p:spTree>
+    <p:extLst>
+      <p:ext uri="{BB962C8B-B14F-4D97-AF65-F5344CB8AC3E}">
+        <p14:creationId xmlns:p14="http://schemas.microsoft.com/office/powerpoint/2010/main" val="3336347251"/>
       </p:ext>
     </p:extLst>
   </p:cSld>

--- a/Slide.pptx
+++ b/Slide.pptx
@@ -6,21 +6,19 @@
   </p:sldMasterIdLst>
   <p:sldIdLst>
     <p:sldId id="256" r:id="rId2"/>
-    <p:sldId id="257" r:id="rId3"/>
-    <p:sldId id="258" r:id="rId4"/>
-    <p:sldId id="259" r:id="rId5"/>
-    <p:sldId id="260" r:id="rId6"/>
-    <p:sldId id="261" r:id="rId7"/>
-    <p:sldId id="262" r:id="rId8"/>
-    <p:sldId id="263" r:id="rId9"/>
-    <p:sldId id="264" r:id="rId10"/>
-    <p:sldId id="266" r:id="rId11"/>
-    <p:sldId id="267" r:id="rId12"/>
-    <p:sldId id="265" r:id="rId13"/>
-    <p:sldId id="268" r:id="rId14"/>
-    <p:sldId id="269" r:id="rId15"/>
-    <p:sldId id="270" r:id="rId16"/>
-    <p:sldId id="271" r:id="rId17"/>
+    <p:sldId id="259" r:id="rId3"/>
+    <p:sldId id="260" r:id="rId4"/>
+    <p:sldId id="261" r:id="rId5"/>
+    <p:sldId id="262" r:id="rId6"/>
+    <p:sldId id="263" r:id="rId7"/>
+    <p:sldId id="264" r:id="rId8"/>
+    <p:sldId id="266" r:id="rId9"/>
+    <p:sldId id="267" r:id="rId10"/>
+    <p:sldId id="265" r:id="rId11"/>
+    <p:sldId id="268" r:id="rId12"/>
+    <p:sldId id="269" r:id="rId13"/>
+    <p:sldId id="270" r:id="rId14"/>
+    <p:sldId id="271" r:id="rId15"/>
   </p:sldIdLst>
   <p:sldSz cx="12192000" cy="6858000"/>
   <p:notesSz cx="6858000" cy="9144000"/>
@@ -3526,842 +3524,6 @@
         <p:cNvPr id="1" name="">
           <a:extLst>
             <a:ext uri="{FF2B5EF4-FFF2-40B4-BE49-F238E27FC236}">
-              <a16:creationId xmlns:a16="http://schemas.microsoft.com/office/drawing/2014/main" id="{D6FEE05C-768B-50C5-6555-D3317A210AA6}"/>
-            </a:ext>
-          </a:extLst>
-        </p:cNvPr>
-        <p:cNvGrpSpPr/>
-        <p:nvPr/>
-      </p:nvGrpSpPr>
-      <p:grpSpPr>
-        <a:xfrm>
-          <a:off x="0" y="0"/>
-          <a:ext cx="0" cy="0"/>
-          <a:chOff x="0" y="0"/>
-          <a:chExt cx="0" cy="0"/>
-        </a:xfrm>
-      </p:grpSpPr>
-      <p:sp>
-        <p:nvSpPr>
-          <p:cNvPr id="2" name="제목 1">
-            <a:extLst>
-              <a:ext uri="{FF2B5EF4-FFF2-40B4-BE49-F238E27FC236}">
-                <a16:creationId xmlns:a16="http://schemas.microsoft.com/office/drawing/2014/main" id="{89CE8072-FC78-57A4-7448-1A07D3D2CAC0}"/>
-              </a:ext>
-            </a:extLst>
-          </p:cNvPr>
-          <p:cNvSpPr>
-            <a:spLocks noGrp="1"/>
-          </p:cNvSpPr>
-          <p:nvPr>
-            <p:ph type="title"/>
-          </p:nvPr>
-        </p:nvSpPr>
-        <p:spPr/>
-        <p:txBody>
-          <a:bodyPr/>
-          <a:lstStyle/>
-          <a:p>
-            <a:r>
-              <a:rPr lang="ko-KR" altLang="ko-KR" dirty="0" err="1">
-                <a:latin typeface="Segoe UI" panose="020B0502040204020203" pitchFamily="34" charset="0"/>
-              </a:rPr>
-              <a:t>Graph</a:t>
-            </a:r>
-            <a:r>
-              <a:rPr lang="ko-KR" altLang="ko-KR" dirty="0">
-                <a:latin typeface="Segoe UI" panose="020B0502040204020203" pitchFamily="34" charset="0"/>
-              </a:rPr>
-              <a:t> </a:t>
-            </a:r>
-            <a:r>
-              <a:rPr lang="ko-KR" altLang="ko-KR" dirty="0" err="1">
-                <a:latin typeface="Segoe UI" panose="020B0502040204020203" pitchFamily="34" charset="0"/>
-              </a:rPr>
-              <a:t>Integration</a:t>
-            </a:r>
-            <a:r>
-              <a:rPr lang="ko-KR" altLang="ko-KR" dirty="0">
-                <a:latin typeface="Segoe UI" panose="020B0502040204020203" pitchFamily="34" charset="0"/>
-              </a:rPr>
-              <a:t> </a:t>
-            </a:r>
-            <a:r>
-              <a:rPr lang="ko-KR" altLang="ko-KR" dirty="0" err="1">
-                <a:latin typeface="Segoe UI" panose="020B0502040204020203" pitchFamily="34" charset="0"/>
-              </a:rPr>
-              <a:t>in</a:t>
-            </a:r>
-            <a:r>
-              <a:rPr lang="ko-KR" altLang="ko-KR" dirty="0">
-                <a:latin typeface="Segoe UI" panose="020B0502040204020203" pitchFamily="34" charset="0"/>
-              </a:rPr>
-              <a:t> </a:t>
-            </a:r>
-            <a:r>
-              <a:rPr lang="ko-KR" altLang="ko-KR" dirty="0" err="1">
-                <a:latin typeface="Segoe UI" panose="020B0502040204020203" pitchFamily="34" charset="0"/>
-              </a:rPr>
-              <a:t>Transformers</a:t>
-            </a:r>
-            <a:endParaRPr lang="ko-KR" altLang="en-US" dirty="0"/>
-          </a:p>
-        </p:txBody>
-      </p:sp>
-      <p:pic>
-        <p:nvPicPr>
-          <p:cNvPr id="5" name="내용 개체 틀 4">
-            <a:extLst>
-              <a:ext uri="{FF2B5EF4-FFF2-40B4-BE49-F238E27FC236}">
-                <a16:creationId xmlns:a16="http://schemas.microsoft.com/office/drawing/2014/main" id="{AFDDEA74-2C54-3130-804A-1EAEC47B71A5}"/>
-              </a:ext>
-            </a:extLst>
-          </p:cNvPr>
-          <p:cNvPicPr>
-            <a:picLocks noGrp="1" noChangeAspect="1"/>
-          </p:cNvPicPr>
-          <p:nvPr>
-            <p:ph idx="1"/>
-          </p:nvPr>
-        </p:nvPicPr>
-        <p:blipFill>
-          <a:blip r:embed="rId2">
-            <a:extLst>
-              <a:ext uri="{28A0092B-C50C-407E-A947-70E740481C1C}">
-                <a14:useLocalDpi xmlns:a14="http://schemas.microsoft.com/office/drawing/2010/main" val="0"/>
-              </a:ext>
-            </a:extLst>
-          </a:blip>
-          <a:stretch>
-            <a:fillRect/>
-          </a:stretch>
-        </p:blipFill>
-        <p:spPr>
-          <a:xfrm>
-            <a:off x="838200" y="2122671"/>
-            <a:ext cx="10515600" cy="3757246"/>
-          </a:xfrm>
-          <a:prstGeom prst="rect">
-            <a:avLst/>
-          </a:prstGeom>
-        </p:spPr>
-      </p:pic>
-    </p:spTree>
-    <p:extLst>
-      <p:ext uri="{BB962C8B-B14F-4D97-AF65-F5344CB8AC3E}">
-        <p14:creationId xmlns:p14="http://schemas.microsoft.com/office/powerpoint/2010/main" val="289401519"/>
-      </p:ext>
-    </p:extLst>
-  </p:cSld>
-  <p:clrMapOvr>
-    <a:masterClrMapping/>
-  </p:clrMapOvr>
-</p:sld>
-</file>
-
-<file path=ppt/slides/slide11.xml><?xml version="1.0" encoding="utf-8"?>
-<p:sld xmlns:a="http://schemas.openxmlformats.org/drawingml/2006/main" xmlns:r="http://schemas.openxmlformats.org/officeDocument/2006/relationships" xmlns:p="http://schemas.openxmlformats.org/presentationml/2006/main">
-  <p:cSld>
-    <p:spTree>
-      <p:nvGrpSpPr>
-        <p:cNvPr id="1" name="">
-          <a:extLst>
-            <a:ext uri="{FF2B5EF4-FFF2-40B4-BE49-F238E27FC236}">
-              <a16:creationId xmlns:a16="http://schemas.microsoft.com/office/drawing/2014/main" id="{DEAD304B-A995-D620-4AF5-CF23B45A423F}"/>
-            </a:ext>
-          </a:extLst>
-        </p:cNvPr>
-        <p:cNvGrpSpPr/>
-        <p:nvPr/>
-      </p:nvGrpSpPr>
-      <p:grpSpPr>
-        <a:xfrm>
-          <a:off x="0" y="0"/>
-          <a:ext cx="0" cy="0"/>
-          <a:chOff x="0" y="0"/>
-          <a:chExt cx="0" cy="0"/>
-        </a:xfrm>
-      </p:grpSpPr>
-      <p:sp>
-        <p:nvSpPr>
-          <p:cNvPr id="2" name="제목 1">
-            <a:extLst>
-              <a:ext uri="{FF2B5EF4-FFF2-40B4-BE49-F238E27FC236}">
-                <a16:creationId xmlns:a16="http://schemas.microsoft.com/office/drawing/2014/main" id="{7D275DD0-D5EB-7FF3-A0CD-758EA1EEDA0B}"/>
-              </a:ext>
-            </a:extLst>
-          </p:cNvPr>
-          <p:cNvSpPr>
-            <a:spLocks noGrp="1"/>
-          </p:cNvSpPr>
-          <p:nvPr>
-            <p:ph type="title"/>
-          </p:nvPr>
-        </p:nvSpPr>
-        <p:spPr/>
-        <p:txBody>
-          <a:bodyPr/>
-          <a:lstStyle/>
-          <a:p>
-            <a:r>
-              <a:rPr lang="ko-KR" altLang="ko-KR" dirty="0" err="1">
-                <a:latin typeface="Segoe UI" panose="020B0502040204020203" pitchFamily="34" charset="0"/>
-              </a:rPr>
-              <a:t>Graph</a:t>
-            </a:r>
-            <a:r>
-              <a:rPr lang="ko-KR" altLang="ko-KR" dirty="0">
-                <a:latin typeface="Segoe UI" panose="020B0502040204020203" pitchFamily="34" charset="0"/>
-              </a:rPr>
-              <a:t> </a:t>
-            </a:r>
-            <a:r>
-              <a:rPr lang="ko-KR" altLang="ko-KR" dirty="0" err="1">
-                <a:latin typeface="Segoe UI" panose="020B0502040204020203" pitchFamily="34" charset="0"/>
-              </a:rPr>
-              <a:t>Integration</a:t>
-            </a:r>
-            <a:r>
-              <a:rPr lang="ko-KR" altLang="ko-KR" dirty="0">
-                <a:latin typeface="Segoe UI" panose="020B0502040204020203" pitchFamily="34" charset="0"/>
-              </a:rPr>
-              <a:t> </a:t>
-            </a:r>
-            <a:r>
-              <a:rPr lang="ko-KR" altLang="ko-KR" dirty="0" err="1">
-                <a:latin typeface="Segoe UI" panose="020B0502040204020203" pitchFamily="34" charset="0"/>
-              </a:rPr>
-              <a:t>in</a:t>
-            </a:r>
-            <a:r>
-              <a:rPr lang="ko-KR" altLang="ko-KR" dirty="0">
-                <a:latin typeface="Segoe UI" panose="020B0502040204020203" pitchFamily="34" charset="0"/>
-              </a:rPr>
-              <a:t> </a:t>
-            </a:r>
-            <a:r>
-              <a:rPr lang="ko-KR" altLang="ko-KR" dirty="0" err="1">
-                <a:latin typeface="Segoe UI" panose="020B0502040204020203" pitchFamily="34" charset="0"/>
-              </a:rPr>
-              <a:t>Transformers</a:t>
-            </a:r>
-            <a:endParaRPr lang="ko-KR" altLang="en-US" dirty="0"/>
-          </a:p>
-        </p:txBody>
-      </p:sp>
-      <p:graphicFrame>
-        <p:nvGraphicFramePr>
-          <p:cNvPr id="4" name="내용 개체 틀 3">
-            <a:extLst>
-              <a:ext uri="{FF2B5EF4-FFF2-40B4-BE49-F238E27FC236}">
-                <a16:creationId xmlns:a16="http://schemas.microsoft.com/office/drawing/2014/main" id="{7D514CE5-873F-FF0A-DF1F-69E7501F556E}"/>
-              </a:ext>
-            </a:extLst>
-          </p:cNvPr>
-          <p:cNvGraphicFramePr>
-            <a:graphicFrameLocks noGrp="1"/>
-          </p:cNvGraphicFramePr>
-          <p:nvPr>
-            <p:ph idx="1"/>
-            <p:extLst>
-              <p:ext uri="{D42A27DB-BD31-4B8C-83A1-F6EECF244321}">
-                <p14:modId xmlns:p14="http://schemas.microsoft.com/office/powerpoint/2010/main" val="62978129"/>
-              </p:ext>
-            </p:extLst>
-          </p:nvPr>
-        </p:nvGraphicFramePr>
-        <p:xfrm>
-          <a:off x="678565" y="2141315"/>
-          <a:ext cx="10834870" cy="3970117"/>
-        </p:xfrm>
-        <a:graphic>
-          <a:graphicData uri="http://schemas.openxmlformats.org/drawingml/2006/table">
-            <a:tbl>
-              <a:tblPr firstRow="1" firstCol="1" bandRow="1">
-                <a:tableStyleId>{5C22544A-7EE6-4342-B048-85BDC9FD1C3A}</a:tableStyleId>
-              </a:tblPr>
-              <a:tblGrid>
-                <a:gridCol w="2836764">
-                  <a:extLst>
-                    <a:ext uri="{9D8B030D-6E8A-4147-A177-3AD203B41FA5}">
-                      <a16:colId xmlns:a16="http://schemas.microsoft.com/office/drawing/2014/main" val="3819763343"/>
-                    </a:ext>
-                  </a:extLst>
-                </a:gridCol>
-                <a:gridCol w="2997843">
-                  <a:extLst>
-                    <a:ext uri="{9D8B030D-6E8A-4147-A177-3AD203B41FA5}">
-                      <a16:colId xmlns:a16="http://schemas.microsoft.com/office/drawing/2014/main" val="1910606925"/>
-                    </a:ext>
-                  </a:extLst>
-                </a:gridCol>
-                <a:gridCol w="5000263">
-                  <a:extLst>
-                    <a:ext uri="{9D8B030D-6E8A-4147-A177-3AD203B41FA5}">
-                      <a16:colId xmlns:a16="http://schemas.microsoft.com/office/drawing/2014/main" val="3277269182"/>
-                    </a:ext>
-                  </a:extLst>
-                </a:gridCol>
-              </a:tblGrid>
-              <a:tr h="658109">
-                <a:tc>
-                  <a:txBody>
-                    <a:bodyPr/>
-                    <a:lstStyle/>
-                    <a:p>
-                      <a:pPr algn="ctr" latinLnBrk="1">
-                        <a:lnSpc>
-                          <a:spcPct val="150000"/>
-                        </a:lnSpc>
-                        <a:buNone/>
-                      </a:pPr>
-                      <a:r>
-                        <a:rPr lang="en-US" sz="1600" kern="100" dirty="0">
-                          <a:effectLst/>
-                        </a:rPr>
-                        <a:t>Strategy</a:t>
-                      </a:r>
-                      <a:endParaRPr lang="ko-KR" sz="1600" kern="100" dirty="0">
-                        <a:effectLst/>
-                        <a:latin typeface="맑은 고딕" panose="020B0503020000020004" pitchFamily="50" charset="-127"/>
-                        <a:ea typeface="맑은 고딕" panose="020B0503020000020004" pitchFamily="50" charset="-127"/>
-                        <a:cs typeface="Times New Roman" panose="02020603050405020304" pitchFamily="18" charset="0"/>
-                      </a:endParaRPr>
-                    </a:p>
-                  </a:txBody>
-                  <a:tcPr marL="68580" marR="68580" marT="0" marB="0" anchor="ctr"/>
-                </a:tc>
-                <a:tc>
-                  <a:txBody>
-                    <a:bodyPr/>
-                    <a:lstStyle/>
-                    <a:p>
-                      <a:pPr algn="ctr" latinLnBrk="1">
-                        <a:lnSpc>
-                          <a:spcPct val="150000"/>
-                        </a:lnSpc>
-                        <a:buNone/>
-                      </a:pPr>
-                      <a:r>
-                        <a:rPr lang="en-US" sz="1600" kern="100" dirty="0">
-                          <a:effectLst/>
-                        </a:rPr>
-                        <a:t>Integration Level</a:t>
-                      </a:r>
-                      <a:endParaRPr lang="ko-KR" sz="1600" kern="100" dirty="0">
-                        <a:effectLst/>
-                        <a:latin typeface="맑은 고딕" panose="020B0503020000020004" pitchFamily="50" charset="-127"/>
-                        <a:ea typeface="맑은 고딕" panose="020B0503020000020004" pitchFamily="50" charset="-127"/>
-                        <a:cs typeface="Times New Roman" panose="02020603050405020304" pitchFamily="18" charset="0"/>
-                      </a:endParaRPr>
-                    </a:p>
-                  </a:txBody>
-                  <a:tcPr marL="68580" marR="68580" marT="0" marB="0" anchor="ctr"/>
-                </a:tc>
-                <a:tc>
-                  <a:txBody>
-                    <a:bodyPr/>
-                    <a:lstStyle/>
-                    <a:p>
-                      <a:pPr algn="ctr" latinLnBrk="1">
-                        <a:lnSpc>
-                          <a:spcPct val="150000"/>
-                        </a:lnSpc>
-                        <a:buNone/>
-                      </a:pPr>
-                      <a:r>
-                        <a:rPr lang="en-US" sz="1600" kern="100">
-                          <a:effectLst/>
-                        </a:rPr>
-                        <a:t>Representative Examples</a:t>
-                      </a:r>
-                      <a:endParaRPr lang="ko-KR" sz="1600" kern="100">
-                        <a:effectLst/>
-                        <a:latin typeface="맑은 고딕" panose="020B0503020000020004" pitchFamily="50" charset="-127"/>
-                        <a:ea typeface="맑은 고딕" panose="020B0503020000020004" pitchFamily="50" charset="-127"/>
-                        <a:cs typeface="Times New Roman" panose="02020603050405020304" pitchFamily="18" charset="0"/>
-                      </a:endParaRPr>
-                    </a:p>
-                  </a:txBody>
-                  <a:tcPr marL="68580" marR="68580" marT="0" marB="0" anchor="ctr"/>
-                </a:tc>
-                <a:extLst>
-                  <a:ext uri="{0D108BD9-81ED-4DB2-BD59-A6C34878D82A}">
-                    <a16:rowId xmlns:a16="http://schemas.microsoft.com/office/drawing/2014/main" val="4032219245"/>
-                  </a:ext>
-                </a:extLst>
-              </a:tr>
-              <a:tr h="658109">
-                <a:tc>
-                  <a:txBody>
-                    <a:bodyPr/>
-                    <a:lstStyle/>
-                    <a:p>
-                      <a:pPr algn="ctr" latinLnBrk="1">
-                        <a:lnSpc>
-                          <a:spcPct val="150000"/>
-                        </a:lnSpc>
-                        <a:buNone/>
-                      </a:pPr>
-                      <a:r>
-                        <a:rPr lang="en-US" sz="1600" kern="100" dirty="0">
-                          <a:effectLst/>
-                        </a:rPr>
-                        <a:t>Graph Tokenization</a:t>
-                      </a:r>
-                      <a:endParaRPr lang="ko-KR" sz="1600" kern="100" dirty="0">
-                        <a:effectLst/>
-                        <a:latin typeface="맑은 고딕" panose="020B0503020000020004" pitchFamily="50" charset="-127"/>
-                        <a:ea typeface="맑은 고딕" panose="020B0503020000020004" pitchFamily="50" charset="-127"/>
-                        <a:cs typeface="Times New Roman" panose="02020603050405020304" pitchFamily="18" charset="0"/>
-                      </a:endParaRPr>
-                    </a:p>
-                  </a:txBody>
-                  <a:tcPr marL="68580" marR="68580" marT="0" marB="0" anchor="ctr"/>
-                </a:tc>
-                <a:tc>
-                  <a:txBody>
-                    <a:bodyPr/>
-                    <a:lstStyle/>
-                    <a:p>
-                      <a:pPr algn="ctr" latinLnBrk="1">
-                        <a:lnSpc>
-                          <a:spcPct val="150000"/>
-                        </a:lnSpc>
-                        <a:buNone/>
-                      </a:pPr>
-                      <a:r>
-                        <a:rPr lang="en-US" sz="1600" kern="100" dirty="0">
-                          <a:effectLst/>
-                        </a:rPr>
-                        <a:t>Pre-processing</a:t>
-                      </a:r>
-                      <a:endParaRPr lang="ko-KR" sz="1600" kern="100" dirty="0">
-                        <a:effectLst/>
-                        <a:latin typeface="맑은 고딕" panose="020B0503020000020004" pitchFamily="50" charset="-127"/>
-                        <a:ea typeface="맑은 고딕" panose="020B0503020000020004" pitchFamily="50" charset="-127"/>
-                        <a:cs typeface="Times New Roman" panose="02020603050405020304" pitchFamily="18" charset="0"/>
-                      </a:endParaRPr>
-                    </a:p>
-                  </a:txBody>
-                  <a:tcPr marL="68580" marR="68580" marT="0" marB="0" anchor="ctr"/>
-                </a:tc>
-                <a:tc>
-                  <a:txBody>
-                    <a:bodyPr/>
-                    <a:lstStyle/>
-                    <a:p>
-                      <a:pPr algn="ctr" latinLnBrk="1">
-                        <a:lnSpc>
-                          <a:spcPct val="150000"/>
-                        </a:lnSpc>
-                        <a:buNone/>
-                      </a:pPr>
-                      <a:r>
-                        <a:rPr lang="en-US" sz="1600" kern="100" dirty="0">
-                          <a:effectLst/>
-                        </a:rPr>
-                        <a:t>Node-token transformer, linearized graph models</a:t>
-                      </a:r>
-                      <a:endParaRPr lang="ko-KR" sz="1600" kern="100" dirty="0">
-                        <a:effectLst/>
-                        <a:latin typeface="맑은 고딕" panose="020B0503020000020004" pitchFamily="50" charset="-127"/>
-                        <a:ea typeface="맑은 고딕" panose="020B0503020000020004" pitchFamily="50" charset="-127"/>
-                        <a:cs typeface="Times New Roman" panose="02020603050405020304" pitchFamily="18" charset="0"/>
-                      </a:endParaRPr>
-                    </a:p>
-                  </a:txBody>
-                  <a:tcPr marL="68580" marR="68580" marT="0" marB="0" anchor="ctr"/>
-                </a:tc>
-                <a:extLst>
-                  <a:ext uri="{0D108BD9-81ED-4DB2-BD59-A6C34878D82A}">
-                    <a16:rowId xmlns:a16="http://schemas.microsoft.com/office/drawing/2014/main" val="3281645520"/>
-                  </a:ext>
-                </a:extLst>
-              </a:tr>
-              <a:tr h="658109">
-                <a:tc>
-                  <a:txBody>
-                    <a:bodyPr/>
-                    <a:lstStyle/>
-                    <a:p>
-                      <a:pPr algn="ctr" latinLnBrk="1">
-                        <a:lnSpc>
-                          <a:spcPct val="150000"/>
-                        </a:lnSpc>
-                        <a:buNone/>
-                      </a:pPr>
-                      <a:r>
-                        <a:rPr lang="en-US" sz="1600" kern="100" dirty="0">
-                          <a:effectLst/>
-                        </a:rPr>
-                        <a:t>Input-level Integration</a:t>
-                      </a:r>
-                      <a:endParaRPr lang="ko-KR" sz="1600" kern="100" dirty="0">
-                        <a:effectLst/>
-                        <a:latin typeface="맑은 고딕" panose="020B0503020000020004" pitchFamily="50" charset="-127"/>
-                        <a:ea typeface="맑은 고딕" panose="020B0503020000020004" pitchFamily="50" charset="-127"/>
-                        <a:cs typeface="Times New Roman" panose="02020603050405020304" pitchFamily="18" charset="0"/>
-                      </a:endParaRPr>
-                    </a:p>
-                  </a:txBody>
-                  <a:tcPr marL="68580" marR="68580" marT="0" marB="0" anchor="ctr"/>
-                </a:tc>
-                <a:tc>
-                  <a:txBody>
-                    <a:bodyPr/>
-                    <a:lstStyle/>
-                    <a:p>
-                      <a:pPr algn="ctr" latinLnBrk="1">
-                        <a:lnSpc>
-                          <a:spcPct val="150000"/>
-                        </a:lnSpc>
-                        <a:buNone/>
-                      </a:pPr>
-                      <a:r>
-                        <a:rPr lang="en-US" sz="1600" kern="100" dirty="0">
-                          <a:effectLst/>
-                        </a:rPr>
-                        <a:t>Input Embedding</a:t>
-                      </a:r>
-                      <a:endParaRPr lang="ko-KR" sz="1600" kern="100" dirty="0">
-                        <a:effectLst/>
-                        <a:latin typeface="맑은 고딕" panose="020B0503020000020004" pitchFamily="50" charset="-127"/>
-                        <a:ea typeface="맑은 고딕" panose="020B0503020000020004" pitchFamily="50" charset="-127"/>
-                        <a:cs typeface="Times New Roman" panose="02020603050405020304" pitchFamily="18" charset="0"/>
-                      </a:endParaRPr>
-                    </a:p>
-                  </a:txBody>
-                  <a:tcPr marL="68580" marR="68580" marT="0" marB="0" anchor="ctr"/>
-                </a:tc>
-                <a:tc>
-                  <a:txBody>
-                    <a:bodyPr/>
-                    <a:lstStyle/>
-                    <a:p>
-                      <a:pPr algn="ctr" latinLnBrk="1">
-                        <a:lnSpc>
-                          <a:spcPct val="150000"/>
-                        </a:lnSpc>
-                        <a:buNone/>
-                      </a:pPr>
-                      <a:r>
-                        <a:rPr lang="en-US" sz="1600" kern="100" dirty="0">
-                          <a:effectLst/>
-                        </a:rPr>
-                        <a:t>PE-based models, feature augmentation</a:t>
-                      </a:r>
-                      <a:endParaRPr lang="ko-KR" sz="1600" kern="100" dirty="0">
-                        <a:effectLst/>
-                        <a:latin typeface="맑은 고딕" panose="020B0503020000020004" pitchFamily="50" charset="-127"/>
-                        <a:ea typeface="맑은 고딕" panose="020B0503020000020004" pitchFamily="50" charset="-127"/>
-                        <a:cs typeface="Times New Roman" panose="02020603050405020304" pitchFamily="18" charset="0"/>
-                      </a:endParaRPr>
-                    </a:p>
-                  </a:txBody>
-                  <a:tcPr marL="68580" marR="68580" marT="0" marB="0" anchor="ctr"/>
-                </a:tc>
-                <a:extLst>
-                  <a:ext uri="{0D108BD9-81ED-4DB2-BD59-A6C34878D82A}">
-                    <a16:rowId xmlns:a16="http://schemas.microsoft.com/office/drawing/2014/main" val="2468496733"/>
-                  </a:ext>
-                </a:extLst>
-              </a:tr>
-              <a:tr h="658109">
-                <a:tc>
-                  <a:txBody>
-                    <a:bodyPr/>
-                    <a:lstStyle/>
-                    <a:p>
-                      <a:pPr algn="ctr" latinLnBrk="1">
-                        <a:lnSpc>
-                          <a:spcPct val="150000"/>
-                        </a:lnSpc>
-                        <a:buNone/>
-                      </a:pPr>
-                      <a:r>
-                        <a:rPr lang="en-US" sz="1600" kern="100">
-                          <a:effectLst/>
-                        </a:rPr>
-                        <a:t>Attention-level Integration</a:t>
-                      </a:r>
-                      <a:endParaRPr lang="ko-KR" sz="1600" kern="100">
-                        <a:effectLst/>
-                        <a:latin typeface="맑은 고딕" panose="020B0503020000020004" pitchFamily="50" charset="-127"/>
-                        <a:ea typeface="맑은 고딕" panose="020B0503020000020004" pitchFamily="50" charset="-127"/>
-                        <a:cs typeface="Times New Roman" panose="02020603050405020304" pitchFamily="18" charset="0"/>
-                      </a:endParaRPr>
-                    </a:p>
-                  </a:txBody>
-                  <a:tcPr marL="68580" marR="68580" marT="0" marB="0" anchor="ctr"/>
-                </a:tc>
-                <a:tc>
-                  <a:txBody>
-                    <a:bodyPr/>
-                    <a:lstStyle/>
-                    <a:p>
-                      <a:pPr algn="ctr" latinLnBrk="1">
-                        <a:lnSpc>
-                          <a:spcPct val="150000"/>
-                        </a:lnSpc>
-                        <a:buNone/>
-                      </a:pPr>
-                      <a:r>
-                        <a:rPr lang="en-US" sz="1600" kern="100" dirty="0">
-                          <a:effectLst/>
-                        </a:rPr>
-                        <a:t>Attention Score</a:t>
-                      </a:r>
-                      <a:endParaRPr lang="ko-KR" sz="1600" kern="100" dirty="0">
-                        <a:effectLst/>
-                        <a:latin typeface="맑은 고딕" panose="020B0503020000020004" pitchFamily="50" charset="-127"/>
-                        <a:ea typeface="맑은 고딕" panose="020B0503020000020004" pitchFamily="50" charset="-127"/>
-                        <a:cs typeface="Times New Roman" panose="02020603050405020304" pitchFamily="18" charset="0"/>
-                      </a:endParaRPr>
-                    </a:p>
-                  </a:txBody>
-                  <a:tcPr marL="68580" marR="68580" marT="0" marB="0" anchor="ctr"/>
-                </a:tc>
-                <a:tc>
-                  <a:txBody>
-                    <a:bodyPr/>
-                    <a:lstStyle/>
-                    <a:p>
-                      <a:pPr algn="ctr" latinLnBrk="1">
-                        <a:lnSpc>
-                          <a:spcPct val="150000"/>
-                        </a:lnSpc>
-                        <a:buNone/>
-                      </a:pPr>
-                      <a:r>
-                        <a:rPr lang="en-US" sz="1600" kern="100" dirty="0" err="1">
-                          <a:effectLst/>
-                        </a:rPr>
-                        <a:t>Graphormer</a:t>
-                      </a:r>
-                      <a:r>
-                        <a:rPr lang="en-US" sz="1600" kern="100" dirty="0">
-                          <a:effectLst/>
-                        </a:rPr>
-                        <a:t> </a:t>
-                      </a:r>
-                      <a:endParaRPr lang="ko-KR" sz="1600" kern="100" dirty="0">
-                        <a:effectLst/>
-                        <a:latin typeface="맑은 고딕" panose="020B0503020000020004" pitchFamily="50" charset="-127"/>
-                        <a:ea typeface="맑은 고딕" panose="020B0503020000020004" pitchFamily="50" charset="-127"/>
-                        <a:cs typeface="Times New Roman" panose="02020603050405020304" pitchFamily="18" charset="0"/>
-                      </a:endParaRPr>
-                    </a:p>
-                  </a:txBody>
-                  <a:tcPr marL="68580" marR="68580" marT="0" marB="0" anchor="ctr"/>
-                </a:tc>
-                <a:extLst>
-                  <a:ext uri="{0D108BD9-81ED-4DB2-BD59-A6C34878D82A}">
-                    <a16:rowId xmlns:a16="http://schemas.microsoft.com/office/drawing/2014/main" val="3897676288"/>
-                  </a:ext>
-                </a:extLst>
-              </a:tr>
-              <a:tr h="658109">
-                <a:tc>
-                  <a:txBody>
-                    <a:bodyPr/>
-                    <a:lstStyle/>
-                    <a:p>
-                      <a:pPr algn="ctr" latinLnBrk="1">
-                        <a:lnSpc>
-                          <a:spcPct val="150000"/>
-                        </a:lnSpc>
-                        <a:buNone/>
-                      </a:pPr>
-                      <a:r>
-                        <a:rPr lang="en-US" sz="1600" kern="100">
-                          <a:effectLst/>
-                        </a:rPr>
-                        <a:t>QKV-level Integration</a:t>
-                      </a:r>
-                      <a:endParaRPr lang="ko-KR" sz="1600" kern="100">
-                        <a:effectLst/>
-                        <a:latin typeface="맑은 고딕" panose="020B0503020000020004" pitchFamily="50" charset="-127"/>
-                        <a:ea typeface="맑은 고딕" panose="020B0503020000020004" pitchFamily="50" charset="-127"/>
-                        <a:cs typeface="Times New Roman" panose="02020603050405020304" pitchFamily="18" charset="0"/>
-                      </a:endParaRPr>
-                    </a:p>
-                  </a:txBody>
-                  <a:tcPr marL="68580" marR="68580" marT="0" marB="0" anchor="ctr"/>
-                </a:tc>
-                <a:tc>
-                  <a:txBody>
-                    <a:bodyPr/>
-                    <a:lstStyle/>
-                    <a:p>
-                      <a:pPr algn="ctr" latinLnBrk="1">
-                        <a:lnSpc>
-                          <a:spcPct val="150000"/>
-                        </a:lnSpc>
-                        <a:buNone/>
-                      </a:pPr>
-                      <a:r>
-                        <a:rPr lang="en-US" sz="1600" kern="100" dirty="0">
-                          <a:effectLst/>
-                        </a:rPr>
-                        <a:t>Attention Representation</a:t>
-                      </a:r>
-                      <a:endParaRPr lang="ko-KR" sz="1600" kern="100" dirty="0">
-                        <a:effectLst/>
-                        <a:latin typeface="맑은 고딕" panose="020B0503020000020004" pitchFamily="50" charset="-127"/>
-                        <a:ea typeface="맑은 고딕" panose="020B0503020000020004" pitchFamily="50" charset="-127"/>
-                        <a:cs typeface="Times New Roman" panose="02020603050405020304" pitchFamily="18" charset="0"/>
-                      </a:endParaRPr>
-                    </a:p>
-                  </a:txBody>
-                  <a:tcPr marL="68580" marR="68580" marT="0" marB="0" anchor="ctr"/>
-                </a:tc>
-                <a:tc>
-                  <a:txBody>
-                    <a:bodyPr/>
-                    <a:lstStyle/>
-                    <a:p>
-                      <a:pPr algn="ctr" latinLnBrk="1">
-                        <a:lnSpc>
-                          <a:spcPct val="150000"/>
-                        </a:lnSpc>
-                        <a:buNone/>
-                      </a:pPr>
-                      <a:r>
-                        <a:rPr lang="en-US" sz="1600" kern="100" dirty="0">
-                          <a:effectLst/>
-                        </a:rPr>
-                        <a:t>Relational Attention, edge-aware QKV</a:t>
-                      </a:r>
-                      <a:endParaRPr lang="ko-KR" sz="1600" kern="100" dirty="0">
-                        <a:effectLst/>
-                        <a:latin typeface="맑은 고딕" panose="020B0503020000020004" pitchFamily="50" charset="-127"/>
-                        <a:ea typeface="맑은 고딕" panose="020B0503020000020004" pitchFamily="50" charset="-127"/>
-                        <a:cs typeface="Times New Roman" panose="02020603050405020304" pitchFamily="18" charset="0"/>
-                      </a:endParaRPr>
-                    </a:p>
-                  </a:txBody>
-                  <a:tcPr marL="68580" marR="68580" marT="0" marB="0" anchor="ctr"/>
-                </a:tc>
-                <a:extLst>
-                  <a:ext uri="{0D108BD9-81ED-4DB2-BD59-A6C34878D82A}">
-                    <a16:rowId xmlns:a16="http://schemas.microsoft.com/office/drawing/2014/main" val="2776702727"/>
-                  </a:ext>
-                </a:extLst>
-              </a:tr>
-              <a:tr h="679572">
-                <a:tc>
-                  <a:txBody>
-                    <a:bodyPr/>
-                    <a:lstStyle/>
-                    <a:p>
-                      <a:pPr algn="ctr" latinLnBrk="1">
-                        <a:lnSpc>
-                          <a:spcPct val="150000"/>
-                        </a:lnSpc>
-                        <a:buNone/>
-                      </a:pPr>
-                      <a:r>
-                        <a:rPr lang="en-US" sz="1600" kern="100">
-                          <a:effectLst/>
-                        </a:rPr>
-                        <a:t>Edge-level Integration</a:t>
-                      </a:r>
-                      <a:endParaRPr lang="ko-KR" sz="1600" kern="100">
-                        <a:effectLst/>
-                        <a:latin typeface="맑은 고딕" panose="020B0503020000020004" pitchFamily="50" charset="-127"/>
-                        <a:ea typeface="맑은 고딕" panose="020B0503020000020004" pitchFamily="50" charset="-127"/>
-                        <a:cs typeface="Times New Roman" panose="02020603050405020304" pitchFamily="18" charset="0"/>
-                      </a:endParaRPr>
-                    </a:p>
-                  </a:txBody>
-                  <a:tcPr marL="68580" marR="68580" marT="0" marB="0" anchor="ctr"/>
-                </a:tc>
-                <a:tc>
-                  <a:txBody>
-                    <a:bodyPr/>
-                    <a:lstStyle/>
-                    <a:p>
-                      <a:pPr algn="ctr" latinLnBrk="1">
-                        <a:lnSpc>
-                          <a:spcPct val="150000"/>
-                        </a:lnSpc>
-                        <a:buNone/>
-                      </a:pPr>
-                      <a:r>
-                        <a:rPr lang="en-US" sz="1600" kern="100" dirty="0">
-                          <a:effectLst/>
-                        </a:rPr>
-                        <a:t>Full Model (Node + Edge)</a:t>
-                      </a:r>
-                      <a:endParaRPr lang="ko-KR" sz="1600" kern="100" dirty="0">
-                        <a:effectLst/>
-                        <a:latin typeface="맑은 고딕" panose="020B0503020000020004" pitchFamily="50" charset="-127"/>
-                        <a:ea typeface="맑은 고딕" panose="020B0503020000020004" pitchFamily="50" charset="-127"/>
-                        <a:cs typeface="Times New Roman" panose="02020603050405020304" pitchFamily="18" charset="0"/>
-                      </a:endParaRPr>
-                    </a:p>
-                  </a:txBody>
-                  <a:tcPr marL="68580" marR="68580" marT="0" marB="0" anchor="ctr"/>
-                </a:tc>
-                <a:tc>
-                  <a:txBody>
-                    <a:bodyPr/>
-                    <a:lstStyle/>
-                    <a:p>
-                      <a:pPr algn="ctr" latinLnBrk="1">
-                        <a:lnSpc>
-                          <a:spcPct val="150000"/>
-                        </a:lnSpc>
-                        <a:buNone/>
-                      </a:pPr>
-                      <a:r>
-                        <a:rPr lang="en-US" sz="1600" kern="100" dirty="0">
-                          <a:effectLst/>
-                        </a:rPr>
-                        <a:t>Relational Transformer, edge update models</a:t>
-                      </a:r>
-                      <a:endParaRPr lang="ko-KR" sz="1600" kern="100" dirty="0">
-                        <a:effectLst/>
-                        <a:latin typeface="맑은 고딕" panose="020B0503020000020004" pitchFamily="50" charset="-127"/>
-                        <a:ea typeface="맑은 고딕" panose="020B0503020000020004" pitchFamily="50" charset="-127"/>
-                        <a:cs typeface="Times New Roman" panose="02020603050405020304" pitchFamily="18" charset="0"/>
-                      </a:endParaRPr>
-                    </a:p>
-                  </a:txBody>
-                  <a:tcPr marL="68580" marR="68580" marT="0" marB="0" anchor="ctr"/>
-                </a:tc>
-                <a:extLst>
-                  <a:ext uri="{0D108BD9-81ED-4DB2-BD59-A6C34878D82A}">
-                    <a16:rowId xmlns:a16="http://schemas.microsoft.com/office/drawing/2014/main" val="824631184"/>
-                  </a:ext>
-                </a:extLst>
-              </a:tr>
-            </a:tbl>
-          </a:graphicData>
-        </a:graphic>
-      </p:graphicFrame>
-    </p:spTree>
-    <p:extLst>
-      <p:ext uri="{BB962C8B-B14F-4D97-AF65-F5344CB8AC3E}">
-        <p14:creationId xmlns:p14="http://schemas.microsoft.com/office/powerpoint/2010/main" val="3600298602"/>
-      </p:ext>
-    </p:extLst>
-  </p:cSld>
-  <p:clrMapOvr>
-    <a:masterClrMapping/>
-  </p:clrMapOvr>
-</p:sld>
-</file>
-
-<file path=ppt/slides/slide12.xml><?xml version="1.0" encoding="utf-8"?>
-<p:sld xmlns:a="http://schemas.openxmlformats.org/drawingml/2006/main" xmlns:r="http://schemas.openxmlformats.org/officeDocument/2006/relationships" xmlns:p="http://schemas.openxmlformats.org/presentationml/2006/main">
-  <p:cSld>
-    <p:spTree>
-      <p:nvGrpSpPr>
-        <p:cNvPr id="1" name="">
-          <a:extLst>
-            <a:ext uri="{FF2B5EF4-FFF2-40B4-BE49-F238E27FC236}">
               <a16:creationId xmlns:a16="http://schemas.microsoft.com/office/drawing/2014/main" id="{C51BCD83-2E65-2041-9EC4-1CB9A0E56E9F}"/>
             </a:ext>
           </a:extLst>
@@ -4474,14 +3636,68 @@
         </p:blipFill>
         <p:spPr>
           <a:xfrm>
-            <a:off x="1678361" y="1938235"/>
-            <a:ext cx="8835278" cy="4554640"/>
+            <a:off x="1076392" y="1622324"/>
+            <a:ext cx="9886776" cy="5096694"/>
           </a:xfrm>
           <a:prstGeom prst="rect">
             <a:avLst/>
           </a:prstGeom>
         </p:spPr>
       </p:pic>
+      <p:sp>
+        <p:nvSpPr>
+          <p:cNvPr id="3" name="직사각형 2">
+            <a:extLst>
+              <a:ext uri="{FF2B5EF4-FFF2-40B4-BE49-F238E27FC236}">
+                <a16:creationId xmlns:a16="http://schemas.microsoft.com/office/drawing/2014/main" id="{30DB9405-4A3C-2021-1957-52FF0BA3DA27}"/>
+              </a:ext>
+            </a:extLst>
+          </p:cNvPr>
+          <p:cNvSpPr/>
+          <p:nvPr/>
+        </p:nvSpPr>
+        <p:spPr>
+          <a:xfrm>
+            <a:off x="8817077" y="558124"/>
+            <a:ext cx="2536723" cy="560439"/>
+          </a:xfrm>
+          <a:prstGeom prst="rect">
+            <a:avLst/>
+          </a:prstGeom>
+        </p:spPr>
+        <p:style>
+          <a:lnRef idx="2">
+            <a:schemeClr val="dk1">
+              <a:shade val="15000"/>
+            </a:schemeClr>
+          </a:lnRef>
+          <a:fillRef idx="1">
+            <a:schemeClr val="dk1"/>
+          </a:fillRef>
+          <a:effectRef idx="0">
+            <a:schemeClr val="dk1"/>
+          </a:effectRef>
+          <a:fontRef idx="minor">
+            <a:schemeClr val="lt1"/>
+          </a:fontRef>
+        </p:style>
+        <p:txBody>
+          <a:bodyPr rtlCol="0" anchor="ctr"/>
+          <a:lstStyle/>
+          <a:p>
+            <a:pPr algn="ctr"/>
+            <a:r>
+              <a:rPr lang="en-US" altLang="ko-KR" dirty="0"/>
+              <a:t>Model </a:t>
+            </a:r>
+            <a:r>
+              <a:rPr lang="en-US" altLang="ko-KR" dirty="0" err="1"/>
+              <a:t>Archtechture</a:t>
+            </a:r>
+            <a:endParaRPr lang="ko-KR" altLang="en-US" dirty="0"/>
+          </a:p>
+        </p:txBody>
+      </p:sp>
     </p:spTree>
     <p:extLst>
       <p:ext uri="{BB962C8B-B14F-4D97-AF65-F5344CB8AC3E}">
@@ -4495,7 +3711,7 @@
 </p:sld>
 </file>
 
-<file path=ppt/slides/slide13.xml><?xml version="1.0" encoding="utf-8"?>
+<file path=ppt/slides/slide11.xml><?xml version="1.0" encoding="utf-8"?>
 <p:sld xmlns:a="http://schemas.openxmlformats.org/drawingml/2006/main" xmlns:r="http://schemas.openxmlformats.org/officeDocument/2006/relationships" xmlns:p="http://schemas.openxmlformats.org/presentationml/2006/main">
   <p:cSld>
     <p:spTree>
@@ -5516,10 +4732,467 @@
           </a:graphicData>
         </a:graphic>
       </p:graphicFrame>
+      <p:sp>
+        <p:nvSpPr>
+          <p:cNvPr id="6" name="TextBox 5">
+            <a:extLst>
+              <a:ext uri="{FF2B5EF4-FFF2-40B4-BE49-F238E27FC236}">
+                <a16:creationId xmlns:a16="http://schemas.microsoft.com/office/drawing/2014/main" id="{86259544-4C2A-15BC-0A6D-BC5061D8E834}"/>
+              </a:ext>
+            </a:extLst>
+          </p:cNvPr>
+          <p:cNvSpPr txBox="1"/>
+          <p:nvPr/>
+        </p:nvSpPr>
+        <p:spPr>
+          <a:xfrm>
+            <a:off x="838200" y="1420769"/>
+            <a:ext cx="10038736" cy="369332"/>
+          </a:xfrm>
+          <a:prstGeom prst="rect">
+            <a:avLst/>
+          </a:prstGeom>
+          <a:noFill/>
+        </p:spPr>
+        <p:txBody>
+          <a:bodyPr wrap="square">
+            <a:spAutoFit/>
+          </a:bodyPr>
+          <a:lstStyle/>
+          <a:p>
+            <a:r>
+              <a:rPr lang="en-US" altLang="ko-KR" sz="1800" dirty="0">
+                <a:solidFill>
+                  <a:srgbClr val="000000"/>
+                </a:solidFill>
+                <a:latin typeface="맑은 고딕" panose="020B0503020000020004" pitchFamily="50" charset="-127"/>
+                <a:ea typeface="맑은 고딕" panose="020B0503020000020004" pitchFamily="50" charset="-127"/>
+              </a:rPr>
+              <a:t>All graph-transformer approaches can be systematically described by five dimensions</a:t>
+            </a:r>
+          </a:p>
+        </p:txBody>
+      </p:sp>
     </p:spTree>
     <p:extLst>
       <p:ext uri="{BB962C8B-B14F-4D97-AF65-F5344CB8AC3E}">
         <p14:creationId xmlns:p14="http://schemas.microsoft.com/office/powerpoint/2010/main" val="3699531607"/>
+      </p:ext>
+    </p:extLst>
+  </p:cSld>
+  <p:clrMapOvr>
+    <a:masterClrMapping/>
+  </p:clrMapOvr>
+</p:sld>
+</file>
+
+<file path=ppt/slides/slide12.xml><?xml version="1.0" encoding="utf-8"?>
+<p:sld xmlns:a="http://schemas.openxmlformats.org/drawingml/2006/main" xmlns:r="http://schemas.openxmlformats.org/officeDocument/2006/relationships" xmlns:p="http://schemas.openxmlformats.org/presentationml/2006/main">
+  <p:cSld>
+    <p:spTree>
+      <p:nvGrpSpPr>
+        <p:cNvPr id="1" name=""/>
+        <p:cNvGrpSpPr/>
+        <p:nvPr/>
+      </p:nvGrpSpPr>
+      <p:grpSpPr>
+        <a:xfrm>
+          <a:off x="0" y="0"/>
+          <a:ext cx="0" cy="0"/>
+          <a:chOff x="0" y="0"/>
+          <a:chExt cx="0" cy="0"/>
+        </a:xfrm>
+      </p:grpSpPr>
+      <p:sp>
+        <p:nvSpPr>
+          <p:cNvPr id="2" name="제목 1">
+            <a:extLst>
+              <a:ext uri="{FF2B5EF4-FFF2-40B4-BE49-F238E27FC236}">
+                <a16:creationId xmlns:a16="http://schemas.microsoft.com/office/drawing/2014/main" id="{F8AD651D-54B2-6C1F-CC59-6EB94F6CC9F7}"/>
+              </a:ext>
+            </a:extLst>
+          </p:cNvPr>
+          <p:cNvSpPr>
+            <a:spLocks noGrp="1"/>
+          </p:cNvSpPr>
+          <p:nvPr>
+            <p:ph type="title"/>
+          </p:nvPr>
+        </p:nvSpPr>
+        <p:spPr/>
+        <p:txBody>
+          <a:bodyPr>
+            <a:normAutofit/>
+          </a:bodyPr>
+          <a:lstStyle/>
+          <a:p>
+            <a:r>
+              <a:rPr lang="en-US" altLang="ko-KR" dirty="0"/>
+              <a:t>Discussion</a:t>
+            </a:r>
+            <a:endParaRPr lang="ko-KR" altLang="en-US" dirty="0"/>
+          </a:p>
+        </p:txBody>
+      </p:sp>
+      <p:sp>
+        <p:nvSpPr>
+          <p:cNvPr id="4" name="TextBox 3">
+            <a:extLst>
+              <a:ext uri="{FF2B5EF4-FFF2-40B4-BE49-F238E27FC236}">
+                <a16:creationId xmlns:a16="http://schemas.microsoft.com/office/drawing/2014/main" id="{05F25766-1E04-075F-8274-F213A92303ED}"/>
+              </a:ext>
+            </a:extLst>
+          </p:cNvPr>
+          <p:cNvSpPr txBox="1"/>
+          <p:nvPr/>
+        </p:nvSpPr>
+        <p:spPr>
+          <a:xfrm>
+            <a:off x="838200" y="1573271"/>
+            <a:ext cx="10668000" cy="4649478"/>
+          </a:xfrm>
+          <a:prstGeom prst="rect">
+            <a:avLst/>
+          </a:prstGeom>
+          <a:noFill/>
+        </p:spPr>
+        <p:txBody>
+          <a:bodyPr wrap="square">
+            <a:spAutoFit/>
+          </a:bodyPr>
+          <a:lstStyle/>
+          <a:p>
+            <a:pPr marL="342900" indent="-342900">
+              <a:lnSpc>
+                <a:spcPct val="150000"/>
+              </a:lnSpc>
+              <a:buFont typeface="Arial" panose="020B0604020202020204" pitchFamily="34" charset="0"/>
+              <a:buChar char="•"/>
+            </a:pPr>
+            <a:r>
+              <a:rPr lang="en-US" altLang="ko-KR" sz="2000" b="1" dirty="0">
+                <a:solidFill>
+                  <a:srgbClr val="000000"/>
+                </a:solidFill>
+                <a:latin typeface="맑은 고딕" panose="020B0503020000020004" pitchFamily="50" charset="-127"/>
+                <a:ea typeface="맑은 고딕" panose="020B0503020000020004" pitchFamily="50" charset="-127"/>
+              </a:rPr>
+              <a:t>Design Diversity</a:t>
+            </a:r>
+          </a:p>
+          <a:p>
+            <a:pPr>
+              <a:lnSpc>
+                <a:spcPct val="150000"/>
+              </a:lnSpc>
+            </a:pPr>
+            <a:r>
+              <a:rPr lang="en-US" altLang="ko-KR" sz="2000" dirty="0">
+                <a:solidFill>
+                  <a:srgbClr val="000000"/>
+                </a:solidFill>
+                <a:latin typeface="맑은 고딕" panose="020B0503020000020004" pitchFamily="50" charset="-127"/>
+                <a:ea typeface="맑은 고딕" panose="020B0503020000020004" pitchFamily="50" charset="-127"/>
+              </a:rPr>
+              <a:t>Models : </a:t>
+            </a:r>
+            <a:r>
+              <a:rPr lang="en-US" altLang="ko-KR" sz="2000" u="sng" dirty="0">
+                <a:solidFill>
+                  <a:srgbClr val="000000"/>
+                </a:solidFill>
+                <a:latin typeface="맑은 고딕" panose="020B0503020000020004" pitchFamily="50" charset="-127"/>
+                <a:ea typeface="맑은 고딕" panose="020B0503020000020004" pitchFamily="50" charset="-127"/>
+              </a:rPr>
+              <a:t>combine these five dimensions </a:t>
+            </a:r>
+            <a:r>
+              <a:rPr lang="en-US" altLang="ko-KR" sz="2000" dirty="0">
+                <a:solidFill>
+                  <a:srgbClr val="000000"/>
+                </a:solidFill>
+                <a:latin typeface="맑은 고딕" panose="020B0503020000020004" pitchFamily="50" charset="-127"/>
+                <a:ea typeface="맑은 고딕" panose="020B0503020000020004" pitchFamily="50" charset="-127"/>
+              </a:rPr>
+              <a:t>rather than introducing entirely new mechanism</a:t>
+            </a:r>
+          </a:p>
+          <a:p>
+            <a:pPr>
+              <a:lnSpc>
+                <a:spcPct val="150000"/>
+              </a:lnSpc>
+            </a:pPr>
+            <a:endParaRPr lang="ko-KR" altLang="en-US" sz="2000" dirty="0">
+              <a:solidFill>
+                <a:srgbClr val="000000"/>
+              </a:solidFill>
+              <a:latin typeface="맑은 고딕" panose="020B0503020000020004" pitchFamily="50" charset="-127"/>
+              <a:ea typeface="맑은 고딕" panose="020B0503020000020004" pitchFamily="50" charset="-127"/>
+            </a:endParaRPr>
+          </a:p>
+          <a:p>
+            <a:pPr marL="342900" indent="-342900">
+              <a:lnSpc>
+                <a:spcPct val="150000"/>
+              </a:lnSpc>
+              <a:buFont typeface="Arial" panose="020B0604020202020204" pitchFamily="34" charset="0"/>
+              <a:buChar char="•"/>
+            </a:pPr>
+            <a:r>
+              <a:rPr lang="en-US" altLang="ko-KR" sz="2000" b="1" dirty="0">
+                <a:solidFill>
+                  <a:srgbClr val="000000"/>
+                </a:solidFill>
+                <a:latin typeface="맑은 고딕" panose="020B0503020000020004" pitchFamily="50" charset="-127"/>
+                <a:ea typeface="맑은 고딕" panose="020B0503020000020004" pitchFamily="50" charset="-127"/>
+              </a:rPr>
+              <a:t>Trade-off</a:t>
+            </a:r>
+          </a:p>
+          <a:p>
+            <a:pPr>
+              <a:lnSpc>
+                <a:spcPct val="150000"/>
+              </a:lnSpc>
+            </a:pPr>
+            <a:r>
+              <a:rPr lang="en-US" altLang="ko-KR" sz="2000" dirty="0">
+                <a:solidFill>
+                  <a:srgbClr val="000000"/>
+                </a:solidFill>
+                <a:latin typeface="맑은 고딕" panose="020B0503020000020004" pitchFamily="50" charset="-127"/>
+                <a:ea typeface="맑은 고딕" panose="020B0503020000020004" pitchFamily="50" charset="-127"/>
+              </a:rPr>
+              <a:t>	- Simpler strategies (encoded + bias) : efficient</a:t>
+            </a:r>
+          </a:p>
+          <a:p>
+            <a:pPr>
+              <a:lnSpc>
+                <a:spcPct val="150000"/>
+              </a:lnSpc>
+            </a:pPr>
+            <a:r>
+              <a:rPr lang="en-US" altLang="ko-KR" sz="2000" dirty="0">
+                <a:solidFill>
+                  <a:srgbClr val="000000"/>
+                </a:solidFill>
+                <a:latin typeface="맑은 고딕" panose="020B0503020000020004" pitchFamily="50" charset="-127"/>
+                <a:ea typeface="맑은 고딕" panose="020B0503020000020004" pitchFamily="50" charset="-127"/>
+              </a:rPr>
+              <a:t>	- Deeper integration (relational attention) : higher expressiveness</a:t>
+            </a:r>
+          </a:p>
+          <a:p>
+            <a:pPr>
+              <a:lnSpc>
+                <a:spcPct val="150000"/>
+              </a:lnSpc>
+            </a:pPr>
+            <a:endParaRPr lang="ko-KR" altLang="en-US" sz="2000" dirty="0">
+              <a:solidFill>
+                <a:srgbClr val="000000"/>
+              </a:solidFill>
+              <a:latin typeface="맑은 고딕" panose="020B0503020000020004" pitchFamily="50" charset="-127"/>
+              <a:ea typeface="맑은 고딕" panose="020B0503020000020004" pitchFamily="50" charset="-127"/>
+            </a:endParaRPr>
+          </a:p>
+          <a:p>
+            <a:pPr marL="342900" indent="-342900">
+              <a:lnSpc>
+                <a:spcPct val="150000"/>
+              </a:lnSpc>
+              <a:buFont typeface="Arial" panose="020B0604020202020204" pitchFamily="34" charset="0"/>
+              <a:buChar char="•"/>
+            </a:pPr>
+            <a:r>
+              <a:rPr lang="en-US" altLang="ko-KR" sz="2000" b="1" dirty="0">
+                <a:solidFill>
+                  <a:srgbClr val="000000"/>
+                </a:solidFill>
+                <a:latin typeface="맑은 고딕" panose="020B0503020000020004" pitchFamily="50" charset="-127"/>
+                <a:ea typeface="맑은 고딕" panose="020B0503020000020004" pitchFamily="50" charset="-127"/>
+              </a:rPr>
+              <a:t>Practical Guideline</a:t>
+            </a:r>
+          </a:p>
+          <a:p>
+            <a:pPr>
+              <a:lnSpc>
+                <a:spcPct val="150000"/>
+              </a:lnSpc>
+            </a:pPr>
+            <a:r>
+              <a:rPr lang="en-US" altLang="ko-KR" sz="2000" dirty="0">
+                <a:solidFill>
+                  <a:srgbClr val="000000"/>
+                </a:solidFill>
+                <a:latin typeface="맑은 고딕" panose="020B0503020000020004" pitchFamily="50" charset="-127"/>
+                <a:ea typeface="맑은 고딕" panose="020B0503020000020004" pitchFamily="50" charset="-127"/>
+              </a:rPr>
+              <a:t>	- Attention bias : large graph, low complexity</a:t>
+            </a:r>
+          </a:p>
+          <a:p>
+            <a:pPr>
+              <a:lnSpc>
+                <a:spcPct val="150000"/>
+              </a:lnSpc>
+            </a:pPr>
+            <a:r>
+              <a:rPr lang="en-US" altLang="ko-KR" sz="2000" dirty="0">
+                <a:solidFill>
+                  <a:srgbClr val="000000"/>
+                </a:solidFill>
+                <a:latin typeface="맑은 고딕" panose="020B0503020000020004" pitchFamily="50" charset="-127"/>
+                <a:ea typeface="맑은 고딕" panose="020B0503020000020004" pitchFamily="50" charset="-127"/>
+              </a:rPr>
+              <a:t>	- Relational Attention : complex graph data</a:t>
+            </a:r>
+          </a:p>
+        </p:txBody>
+      </p:sp>
+    </p:spTree>
+    <p:extLst>
+      <p:ext uri="{BB962C8B-B14F-4D97-AF65-F5344CB8AC3E}">
+        <p14:creationId xmlns:p14="http://schemas.microsoft.com/office/powerpoint/2010/main" val="2076747086"/>
+      </p:ext>
+    </p:extLst>
+  </p:cSld>
+  <p:clrMapOvr>
+    <a:masterClrMapping/>
+  </p:clrMapOvr>
+</p:sld>
+</file>
+
+<file path=ppt/slides/slide13.xml><?xml version="1.0" encoding="utf-8"?>
+<p:sld xmlns:a="http://schemas.openxmlformats.org/drawingml/2006/main" xmlns:r="http://schemas.openxmlformats.org/officeDocument/2006/relationships" xmlns:p="http://schemas.openxmlformats.org/presentationml/2006/main">
+  <p:cSld>
+    <p:spTree>
+      <p:nvGrpSpPr>
+        <p:cNvPr id="1" name=""/>
+        <p:cNvGrpSpPr/>
+        <p:nvPr/>
+      </p:nvGrpSpPr>
+      <p:grpSpPr>
+        <a:xfrm>
+          <a:off x="0" y="0"/>
+          <a:ext cx="0" cy="0"/>
+          <a:chOff x="0" y="0"/>
+          <a:chExt cx="0" cy="0"/>
+        </a:xfrm>
+      </p:grpSpPr>
+      <p:sp>
+        <p:nvSpPr>
+          <p:cNvPr id="2" name="제목 1">
+            <a:extLst>
+              <a:ext uri="{FF2B5EF4-FFF2-40B4-BE49-F238E27FC236}">
+                <a16:creationId xmlns:a16="http://schemas.microsoft.com/office/drawing/2014/main" id="{96D2A0EC-0D85-2E8E-5CCF-2E7DE6D7880B}"/>
+              </a:ext>
+            </a:extLst>
+          </p:cNvPr>
+          <p:cNvSpPr>
+            <a:spLocks noGrp="1"/>
+          </p:cNvSpPr>
+          <p:nvPr>
+            <p:ph type="title"/>
+          </p:nvPr>
+        </p:nvSpPr>
+        <p:spPr/>
+        <p:txBody>
+          <a:bodyPr/>
+          <a:lstStyle/>
+          <a:p>
+            <a:r>
+              <a:rPr lang="en-US" altLang="ko-KR" dirty="0"/>
+              <a:t>Conclusion</a:t>
+            </a:r>
+            <a:endParaRPr lang="ko-KR" altLang="en-US" dirty="0"/>
+          </a:p>
+        </p:txBody>
+      </p:sp>
+      <p:sp>
+        <p:nvSpPr>
+          <p:cNvPr id="3" name="내용 개체 틀 2">
+            <a:extLst>
+              <a:ext uri="{FF2B5EF4-FFF2-40B4-BE49-F238E27FC236}">
+                <a16:creationId xmlns:a16="http://schemas.microsoft.com/office/drawing/2014/main" id="{C31E76F6-F642-C257-3562-E994A72912B7}"/>
+              </a:ext>
+            </a:extLst>
+          </p:cNvPr>
+          <p:cNvSpPr>
+            <a:spLocks noGrp="1"/>
+          </p:cNvSpPr>
+          <p:nvPr>
+            <p:ph idx="1"/>
+          </p:nvPr>
+        </p:nvSpPr>
+        <p:spPr/>
+        <p:txBody>
+          <a:bodyPr/>
+          <a:lstStyle/>
+          <a:p>
+            <a:pPr>
+              <a:lnSpc>
+                <a:spcPct val="150000"/>
+              </a:lnSpc>
+            </a:pPr>
+            <a:r>
+              <a:rPr lang="en-US" altLang="ko-KR" dirty="0"/>
+              <a:t>Unify graph-transformer models with five design dimensions</a:t>
+            </a:r>
+            <a:endParaRPr lang="ko-KR" altLang="en-US" dirty="0"/>
+          </a:p>
+          <a:p>
+            <a:pPr>
+              <a:lnSpc>
+                <a:spcPct val="150000"/>
+              </a:lnSpc>
+            </a:pPr>
+            <a:r>
+              <a:rPr lang="en-US" altLang="ko-KR" dirty="0"/>
+              <a:t>Explain how existing methods differ and relate</a:t>
+            </a:r>
+            <a:endParaRPr lang="ko-KR" altLang="en-US" dirty="0"/>
+          </a:p>
+          <a:p>
+            <a:pPr>
+              <a:lnSpc>
+                <a:spcPct val="150000"/>
+              </a:lnSpc>
+            </a:pPr>
+            <a:r>
+              <a:rPr lang="en-US" altLang="ko-KR" dirty="0"/>
+              <a:t>Graph integration is not a single technique, but a combination of design choices</a:t>
+            </a:r>
+            <a:endParaRPr lang="ko-KR" altLang="en-US" dirty="0"/>
+          </a:p>
+          <a:p>
+            <a:pPr>
+              <a:lnSpc>
+                <a:spcPct val="150000"/>
+              </a:lnSpc>
+            </a:pPr>
+            <a:r>
+              <a:rPr lang="en-US" altLang="ko-KR" dirty="0"/>
+              <a:t>Understanding these dimensions helps design better, task-specific models.</a:t>
+            </a:r>
+          </a:p>
+          <a:p>
+            <a:pPr>
+              <a:lnSpc>
+                <a:spcPct val="150000"/>
+              </a:lnSpc>
+            </a:pPr>
+            <a:endParaRPr lang="ko-KR" altLang="en-US" dirty="0"/>
+          </a:p>
+        </p:txBody>
+      </p:sp>
+    </p:spTree>
+    <p:extLst>
+      <p:ext uri="{BB962C8B-B14F-4D97-AF65-F5344CB8AC3E}">
+        <p14:creationId xmlns:p14="http://schemas.microsoft.com/office/powerpoint/2010/main" val="1536938781"/>
       </p:ext>
     </p:extLst>
   </p:cSld>
@@ -5551,151 +5224,6 @@
           <p:cNvPr id="2" name="제목 1">
             <a:extLst>
               <a:ext uri="{FF2B5EF4-FFF2-40B4-BE49-F238E27FC236}">
-                <a16:creationId xmlns:a16="http://schemas.microsoft.com/office/drawing/2014/main" id="{F8AD651D-54B2-6C1F-CC59-6EB94F6CC9F7}"/>
-              </a:ext>
-            </a:extLst>
-          </p:cNvPr>
-          <p:cNvSpPr>
-            <a:spLocks noGrp="1"/>
-          </p:cNvSpPr>
-          <p:nvPr>
-            <p:ph type="title"/>
-          </p:nvPr>
-        </p:nvSpPr>
-        <p:spPr/>
-        <p:txBody>
-          <a:bodyPr>
-            <a:normAutofit/>
-          </a:bodyPr>
-          <a:lstStyle/>
-          <a:p>
-            <a:r>
-              <a:rPr lang="en-US" altLang="ko-KR" b="1" dirty="0"/>
-              <a:t>Discussion</a:t>
-            </a:r>
-            <a:endParaRPr lang="ko-KR" altLang="en-US" dirty="0"/>
-          </a:p>
-        </p:txBody>
-      </p:sp>
-    </p:spTree>
-    <p:extLst>
-      <p:ext uri="{BB962C8B-B14F-4D97-AF65-F5344CB8AC3E}">
-        <p14:creationId xmlns:p14="http://schemas.microsoft.com/office/powerpoint/2010/main" val="2076747086"/>
-      </p:ext>
-    </p:extLst>
-  </p:cSld>
-  <p:clrMapOvr>
-    <a:masterClrMapping/>
-  </p:clrMapOvr>
-</p:sld>
-</file>
-
-<file path=ppt/slides/slide15.xml><?xml version="1.0" encoding="utf-8"?>
-<p:sld xmlns:a="http://schemas.openxmlformats.org/drawingml/2006/main" xmlns:r="http://schemas.openxmlformats.org/officeDocument/2006/relationships" xmlns:p="http://schemas.openxmlformats.org/presentationml/2006/main">
-  <p:cSld>
-    <p:spTree>
-      <p:nvGrpSpPr>
-        <p:cNvPr id="1" name=""/>
-        <p:cNvGrpSpPr/>
-        <p:nvPr/>
-      </p:nvGrpSpPr>
-      <p:grpSpPr>
-        <a:xfrm>
-          <a:off x="0" y="0"/>
-          <a:ext cx="0" cy="0"/>
-          <a:chOff x="0" y="0"/>
-          <a:chExt cx="0" cy="0"/>
-        </a:xfrm>
-      </p:grpSpPr>
-      <p:sp>
-        <p:nvSpPr>
-          <p:cNvPr id="2" name="제목 1">
-            <a:extLst>
-              <a:ext uri="{FF2B5EF4-FFF2-40B4-BE49-F238E27FC236}">
-                <a16:creationId xmlns:a16="http://schemas.microsoft.com/office/drawing/2014/main" id="{96D2A0EC-0D85-2E8E-5CCF-2E7DE6D7880B}"/>
-              </a:ext>
-            </a:extLst>
-          </p:cNvPr>
-          <p:cNvSpPr>
-            <a:spLocks noGrp="1"/>
-          </p:cNvSpPr>
-          <p:nvPr>
-            <p:ph type="title"/>
-          </p:nvPr>
-        </p:nvSpPr>
-        <p:spPr/>
-        <p:txBody>
-          <a:bodyPr/>
-          <a:lstStyle/>
-          <a:p>
-            <a:r>
-              <a:rPr lang="en-US" altLang="ko-KR" dirty="0"/>
-              <a:t>Conclusion</a:t>
-            </a:r>
-            <a:endParaRPr lang="ko-KR" altLang="en-US" dirty="0"/>
-          </a:p>
-        </p:txBody>
-      </p:sp>
-      <p:sp>
-        <p:nvSpPr>
-          <p:cNvPr id="3" name="내용 개체 틀 2">
-            <a:extLst>
-              <a:ext uri="{FF2B5EF4-FFF2-40B4-BE49-F238E27FC236}">
-                <a16:creationId xmlns:a16="http://schemas.microsoft.com/office/drawing/2014/main" id="{C31E76F6-F642-C257-3562-E994A72912B7}"/>
-              </a:ext>
-            </a:extLst>
-          </p:cNvPr>
-          <p:cNvSpPr>
-            <a:spLocks noGrp="1"/>
-          </p:cNvSpPr>
-          <p:nvPr>
-            <p:ph idx="1"/>
-          </p:nvPr>
-        </p:nvSpPr>
-        <p:spPr/>
-        <p:txBody>
-          <a:bodyPr/>
-          <a:lstStyle/>
-          <a:p>
-            <a:endParaRPr lang="ko-KR" altLang="en-US"/>
-          </a:p>
-        </p:txBody>
-      </p:sp>
-    </p:spTree>
-    <p:extLst>
-      <p:ext uri="{BB962C8B-B14F-4D97-AF65-F5344CB8AC3E}">
-        <p14:creationId xmlns:p14="http://schemas.microsoft.com/office/powerpoint/2010/main" val="1536938781"/>
-      </p:ext>
-    </p:extLst>
-  </p:cSld>
-  <p:clrMapOvr>
-    <a:masterClrMapping/>
-  </p:clrMapOvr>
-</p:sld>
-</file>
-
-<file path=ppt/slides/slide16.xml><?xml version="1.0" encoding="utf-8"?>
-<p:sld xmlns:a="http://schemas.openxmlformats.org/drawingml/2006/main" xmlns:r="http://schemas.openxmlformats.org/officeDocument/2006/relationships" xmlns:p="http://schemas.openxmlformats.org/presentationml/2006/main">
-  <p:cSld>
-    <p:spTree>
-      <p:nvGrpSpPr>
-        <p:cNvPr id="1" name=""/>
-        <p:cNvGrpSpPr/>
-        <p:nvPr/>
-      </p:nvGrpSpPr>
-      <p:grpSpPr>
-        <a:xfrm>
-          <a:off x="0" y="0"/>
-          <a:ext cx="0" cy="0"/>
-          <a:chOff x="0" y="0"/>
-          <a:chExt cx="0" cy="0"/>
-        </a:xfrm>
-      </p:grpSpPr>
-      <p:sp>
-        <p:nvSpPr>
-          <p:cNvPr id="2" name="제목 1">
-            <a:extLst>
-              <a:ext uri="{FF2B5EF4-FFF2-40B4-BE49-F238E27FC236}">
                 <a16:creationId xmlns:a16="http://schemas.microsoft.com/office/drawing/2014/main" id="{A1481FD5-C4A4-CECE-C9DE-6041CF783159}"/>
               </a:ext>
             </a:extLst>
@@ -5760,188 +5288,6 @@
 </file>
 
 <file path=ppt/slides/slide2.xml><?xml version="1.0" encoding="utf-8"?>
-<p:sld xmlns:a="http://schemas.openxmlformats.org/drawingml/2006/main" xmlns:r="http://schemas.openxmlformats.org/officeDocument/2006/relationships" xmlns:p="http://schemas.openxmlformats.org/presentationml/2006/main">
-  <p:cSld>
-    <p:spTree>
-      <p:nvGrpSpPr>
-        <p:cNvPr id="1" name=""/>
-        <p:cNvGrpSpPr/>
-        <p:nvPr/>
-      </p:nvGrpSpPr>
-      <p:grpSpPr>
-        <a:xfrm>
-          <a:off x="0" y="0"/>
-          <a:ext cx="0" cy="0"/>
-          <a:chOff x="0" y="0"/>
-          <a:chExt cx="0" cy="0"/>
-        </a:xfrm>
-      </p:grpSpPr>
-      <p:sp>
-        <p:nvSpPr>
-          <p:cNvPr id="2" name="제목 1">
-            <a:extLst>
-              <a:ext uri="{FF2B5EF4-FFF2-40B4-BE49-F238E27FC236}">
-                <a16:creationId xmlns:a16="http://schemas.microsoft.com/office/drawing/2014/main" id="{24F63DF0-DB6E-4196-F0FC-9A8D67B7DB74}"/>
-              </a:ext>
-            </a:extLst>
-          </p:cNvPr>
-          <p:cNvSpPr>
-            <a:spLocks noGrp="1"/>
-          </p:cNvSpPr>
-          <p:nvPr>
-            <p:ph type="title"/>
-          </p:nvPr>
-        </p:nvSpPr>
-        <p:spPr/>
-        <p:txBody>
-          <a:bodyPr>
-            <a:normAutofit/>
-          </a:bodyPr>
-          <a:lstStyle/>
-          <a:p>
-            <a:r>
-              <a:rPr lang="ko-KR" altLang="ko-KR" dirty="0" err="1">
-                <a:latin typeface="Segoe UI" panose="020B0502040204020203" pitchFamily="34" charset="0"/>
-              </a:rPr>
-              <a:t>Motivation</a:t>
-            </a:r>
-            <a:endParaRPr lang="ko-KR" altLang="en-US" dirty="0"/>
-          </a:p>
-        </p:txBody>
-      </p:sp>
-      <p:sp>
-        <p:nvSpPr>
-          <p:cNvPr id="3" name="내용 개체 틀 2">
-            <a:extLst>
-              <a:ext uri="{FF2B5EF4-FFF2-40B4-BE49-F238E27FC236}">
-                <a16:creationId xmlns:a16="http://schemas.microsoft.com/office/drawing/2014/main" id="{C00216A1-933E-D433-BD35-359A620BD2E9}"/>
-              </a:ext>
-            </a:extLst>
-          </p:cNvPr>
-          <p:cNvSpPr>
-            <a:spLocks noGrp="1"/>
-          </p:cNvSpPr>
-          <p:nvPr>
-            <p:ph idx="1"/>
-          </p:nvPr>
-        </p:nvSpPr>
-        <p:spPr/>
-        <p:txBody>
-          <a:bodyPr/>
-          <a:lstStyle/>
-          <a:p>
-            <a:endParaRPr lang="ko-KR" altLang="en-US" dirty="0"/>
-          </a:p>
-        </p:txBody>
-      </p:sp>
-    </p:spTree>
-    <p:extLst>
-      <p:ext uri="{BB962C8B-B14F-4D97-AF65-F5344CB8AC3E}">
-        <p14:creationId xmlns:p14="http://schemas.microsoft.com/office/powerpoint/2010/main" val="2098866481"/>
-      </p:ext>
-    </p:extLst>
-  </p:cSld>
-  <p:clrMapOvr>
-    <a:masterClrMapping/>
-  </p:clrMapOvr>
-</p:sld>
-</file>
-
-<file path=ppt/slides/slide3.xml><?xml version="1.0" encoding="utf-8"?>
-<p:sld xmlns:a="http://schemas.openxmlformats.org/drawingml/2006/main" xmlns:r="http://schemas.openxmlformats.org/officeDocument/2006/relationships" xmlns:p="http://schemas.openxmlformats.org/presentationml/2006/main">
-  <p:cSld>
-    <p:spTree>
-      <p:nvGrpSpPr>
-        <p:cNvPr id="1" name="">
-          <a:extLst>
-            <a:ext uri="{FF2B5EF4-FFF2-40B4-BE49-F238E27FC236}">
-              <a16:creationId xmlns:a16="http://schemas.microsoft.com/office/drawing/2014/main" id="{9E43A3D2-DDC3-5882-7907-A8B2BE83E506}"/>
-            </a:ext>
-          </a:extLst>
-        </p:cNvPr>
-        <p:cNvGrpSpPr/>
-        <p:nvPr/>
-      </p:nvGrpSpPr>
-      <p:grpSpPr>
-        <a:xfrm>
-          <a:off x="0" y="0"/>
-          <a:ext cx="0" cy="0"/>
-          <a:chOff x="0" y="0"/>
-          <a:chExt cx="0" cy="0"/>
-        </a:xfrm>
-      </p:grpSpPr>
-      <p:sp>
-        <p:nvSpPr>
-          <p:cNvPr id="2" name="제목 1">
-            <a:extLst>
-              <a:ext uri="{FF2B5EF4-FFF2-40B4-BE49-F238E27FC236}">
-                <a16:creationId xmlns:a16="http://schemas.microsoft.com/office/drawing/2014/main" id="{4C38C794-2F42-93FB-9E85-B61A46033BA2}"/>
-              </a:ext>
-            </a:extLst>
-          </p:cNvPr>
-          <p:cNvSpPr>
-            <a:spLocks noGrp="1"/>
-          </p:cNvSpPr>
-          <p:nvPr>
-            <p:ph type="title"/>
-          </p:nvPr>
-        </p:nvSpPr>
-        <p:spPr/>
-        <p:txBody>
-          <a:bodyPr>
-            <a:normAutofit/>
-          </a:bodyPr>
-          <a:lstStyle/>
-          <a:p>
-            <a:r>
-              <a:rPr lang="ko-KR" altLang="ko-KR" dirty="0" err="1">
-                <a:latin typeface="Segoe UI" panose="020B0502040204020203" pitchFamily="34" charset="0"/>
-              </a:rPr>
-              <a:t>Motivation</a:t>
-            </a:r>
-            <a:endParaRPr lang="ko-KR" altLang="en-US" dirty="0"/>
-          </a:p>
-        </p:txBody>
-      </p:sp>
-      <p:sp>
-        <p:nvSpPr>
-          <p:cNvPr id="3" name="내용 개체 틀 2">
-            <a:extLst>
-              <a:ext uri="{FF2B5EF4-FFF2-40B4-BE49-F238E27FC236}">
-                <a16:creationId xmlns:a16="http://schemas.microsoft.com/office/drawing/2014/main" id="{17B91784-7EC1-1E2B-E8D3-975B39D62C19}"/>
-              </a:ext>
-            </a:extLst>
-          </p:cNvPr>
-          <p:cNvSpPr>
-            <a:spLocks noGrp="1"/>
-          </p:cNvSpPr>
-          <p:nvPr>
-            <p:ph idx="1"/>
-          </p:nvPr>
-        </p:nvSpPr>
-        <p:spPr/>
-        <p:txBody>
-          <a:bodyPr/>
-          <a:lstStyle/>
-          <a:p>
-            <a:endParaRPr lang="ko-KR" altLang="en-US" dirty="0"/>
-          </a:p>
-        </p:txBody>
-      </p:sp>
-    </p:spTree>
-    <p:extLst>
-      <p:ext uri="{BB962C8B-B14F-4D97-AF65-F5344CB8AC3E}">
-        <p14:creationId xmlns:p14="http://schemas.microsoft.com/office/powerpoint/2010/main" val="2546717626"/>
-      </p:ext>
-    </p:extLst>
-  </p:cSld>
-  <p:clrMapOvr>
-    <a:masterClrMapping/>
-  </p:clrMapOvr>
-</p:sld>
-</file>
-
-<file path=ppt/slides/slide4.xml><?xml version="1.0" encoding="utf-8"?>
 <p:sld xmlns:a="http://schemas.openxmlformats.org/drawingml/2006/main" xmlns:r="http://schemas.openxmlformats.org/officeDocument/2006/relationships" xmlns:p="http://schemas.openxmlformats.org/presentationml/2006/main">
   <p:cSld>
     <p:spTree>
@@ -6013,11 +5359,213 @@
             <p:ph idx="1"/>
           </p:nvPr>
         </p:nvSpPr>
-        <p:spPr/>
-        <p:txBody>
-          <a:bodyPr/>
+        <p:spPr>
+          <a:xfrm>
+            <a:off x="838200" y="1612490"/>
+            <a:ext cx="10134600" cy="5152103"/>
+          </a:xfrm>
+        </p:spPr>
+        <p:txBody>
+          <a:bodyPr>
+            <a:normAutofit/>
+          </a:bodyPr>
           <a:lstStyle/>
           <a:p>
+            <a:pPr>
+              <a:lnSpc>
+                <a:spcPct val="100000"/>
+              </a:lnSpc>
+            </a:pPr>
+            <a:r>
+              <a:rPr lang="ko-KR" altLang="ko-KR" b="1" dirty="0" err="1"/>
+              <a:t>Transformers</a:t>
+            </a:r>
+            <a:r>
+              <a:rPr lang="ko-KR" altLang="ko-KR" b="1" dirty="0"/>
+              <a:t>: </a:t>
+            </a:r>
+            <a:r>
+              <a:rPr lang="en-US" altLang="ko-KR" dirty="0"/>
+              <a:t>L</a:t>
+            </a:r>
+            <a:r>
+              <a:rPr lang="ko-KR" altLang="ko-KR" dirty="0" err="1"/>
+              <a:t>ack</a:t>
+            </a:r>
+            <a:r>
+              <a:rPr lang="ko-KR" altLang="ko-KR" dirty="0"/>
+              <a:t> </a:t>
+            </a:r>
+            <a:r>
+              <a:rPr lang="ko-KR" altLang="ko-KR" dirty="0" err="1"/>
+              <a:t>structural</a:t>
+            </a:r>
+            <a:r>
+              <a:rPr lang="ko-KR" altLang="ko-KR" dirty="0"/>
+              <a:t> </a:t>
+            </a:r>
+            <a:r>
+              <a:rPr lang="ko-KR" altLang="ko-KR" dirty="0" err="1"/>
+              <a:t>awareness</a:t>
+            </a:r>
+            <a:endParaRPr lang="ko-KR" altLang="ko-KR" dirty="0"/>
+          </a:p>
+          <a:p>
+            <a:pPr marL="0" indent="0">
+              <a:lnSpc>
+                <a:spcPct val="100000"/>
+              </a:lnSpc>
+              <a:buNone/>
+            </a:pPr>
+            <a:r>
+              <a:rPr lang="en-US" altLang="ko-KR" b="1" dirty="0"/>
+              <a:t>  </a:t>
+            </a:r>
+            <a:r>
+              <a:rPr lang="ko-KR" altLang="ko-KR" b="1" dirty="0" err="1"/>
+              <a:t>Structural</a:t>
+            </a:r>
+            <a:r>
+              <a:rPr lang="ko-KR" altLang="ko-KR" b="1" dirty="0"/>
+              <a:t> </a:t>
+            </a:r>
+            <a:r>
+              <a:rPr lang="ko-KR" altLang="ko-KR" b="1" dirty="0" err="1"/>
+              <a:t>Information</a:t>
+            </a:r>
+            <a:r>
+              <a:rPr lang="ko-KR" altLang="ko-KR" b="1" dirty="0"/>
+              <a:t> </a:t>
+            </a:r>
+            <a:r>
+              <a:rPr lang="en-US" altLang="ko-KR" dirty="0"/>
+              <a:t>→</a:t>
+            </a:r>
+            <a:r>
+              <a:rPr lang="ko-KR" altLang="ko-KR" dirty="0"/>
+              <a:t> </a:t>
+            </a:r>
+            <a:r>
+              <a:rPr lang="ko-KR" altLang="ko-KR" dirty="0" err="1"/>
+              <a:t>Enhance</a:t>
+            </a:r>
+            <a:r>
+              <a:rPr lang="ko-KR" altLang="ko-KR" dirty="0"/>
+              <a:t> </a:t>
+            </a:r>
+            <a:r>
+              <a:rPr lang="ko-KR" altLang="ko-KR" dirty="0" err="1"/>
+              <a:t>Transformer</a:t>
+            </a:r>
+            <a:r>
+              <a:rPr lang="ko-KR" altLang="ko-KR" dirty="0"/>
+              <a:t> </a:t>
+            </a:r>
+            <a:r>
+              <a:rPr lang="ko-KR" altLang="ko-KR" dirty="0" err="1"/>
+              <a:t>Performance</a:t>
+            </a:r>
+            <a:endParaRPr lang="en-US" altLang="ko-KR" dirty="0"/>
+          </a:p>
+          <a:p>
+            <a:pPr>
+              <a:lnSpc>
+                <a:spcPct val="100000"/>
+              </a:lnSpc>
+            </a:pPr>
+            <a:endParaRPr lang="en-US" altLang="ko-KR" b="1" dirty="0"/>
+          </a:p>
+          <a:p>
+            <a:pPr>
+              <a:lnSpc>
+                <a:spcPct val="100000"/>
+              </a:lnSpc>
+            </a:pPr>
+            <a:r>
+              <a:rPr lang="en-US" altLang="ko-KR" b="1" dirty="0"/>
+              <a:t>Integrate Graphs into Transformers</a:t>
+            </a:r>
+          </a:p>
+          <a:p>
+            <a:pPr lvl="1">
+              <a:lnSpc>
+                <a:spcPct val="100000"/>
+              </a:lnSpc>
+            </a:pPr>
+            <a:r>
+              <a:rPr lang="en-US" altLang="ko-KR" dirty="0"/>
+              <a:t>Utilizing Self-Attention Mechanisms: </a:t>
+            </a:r>
+            <a:r>
+              <a:rPr lang="en-US" altLang="ko-KR" dirty="0" err="1"/>
+              <a:t>Graphormer</a:t>
+            </a:r>
+            <a:r>
+              <a:rPr lang="en-US" altLang="ko-KR" dirty="0"/>
+              <a:t>, Attention bias</a:t>
+            </a:r>
+          </a:p>
+          <a:p>
+            <a:pPr lvl="1">
+              <a:lnSpc>
+                <a:spcPct val="100000"/>
+              </a:lnSpc>
+            </a:pPr>
+            <a:r>
+              <a:rPr lang="en-US" altLang="ko-KR" dirty="0"/>
+              <a:t>Positional Encoding (PE): Encoding structural/topological information of nodes</a:t>
+            </a:r>
+          </a:p>
+          <a:p>
+            <a:pPr marL="0" indent="0">
+              <a:lnSpc>
+                <a:spcPct val="100000"/>
+              </a:lnSpc>
+              <a:buNone/>
+            </a:pPr>
+            <a:r>
+              <a:rPr lang="en-US" altLang="ko-KR" dirty="0"/>
+              <a:t>→</a:t>
+            </a:r>
+            <a:r>
+              <a:rPr lang="ko-KR" altLang="ko-KR" dirty="0"/>
+              <a:t> </a:t>
+            </a:r>
+            <a:r>
+              <a:rPr lang="en-US" altLang="ko-KR" dirty="0"/>
+              <a:t>Most studies focus only on specific components or propose isolated architectures.</a:t>
+            </a:r>
+          </a:p>
+          <a:p>
+            <a:pPr marL="0" indent="0">
+              <a:lnSpc>
+                <a:spcPct val="100000"/>
+              </a:lnSpc>
+              <a:buNone/>
+            </a:pPr>
+            <a:endParaRPr lang="en-US" altLang="ko-KR" dirty="0"/>
+          </a:p>
+          <a:p>
+            <a:pPr>
+              <a:lnSpc>
+                <a:spcPct val="100000"/>
+              </a:lnSpc>
+            </a:pPr>
+            <a:r>
+              <a:rPr lang="en-US" altLang="ko-KR" b="1" dirty="0"/>
+              <a:t>Objective of This Study</a:t>
+            </a:r>
+          </a:p>
+          <a:p>
+            <a:pPr lvl="1">
+              <a:lnSpc>
+                <a:spcPct val="100000"/>
+              </a:lnSpc>
+            </a:pPr>
+            <a:r>
+              <a:rPr lang="en-US" altLang="ko-KR" dirty="0"/>
+              <a:t>Establishing a Unified Framework for Graph Integration in Transformers.</a:t>
+            </a:r>
             <a:endParaRPr lang="ko-KR" altLang="en-US" dirty="0"/>
           </a:p>
         </p:txBody>
@@ -6035,7 +5583,7 @@
 </p:sld>
 </file>
 
-<file path=ppt/slides/slide5.xml><?xml version="1.0" encoding="utf-8"?>
+<file path=ppt/slides/slide3.xml><?xml version="1.0" encoding="utf-8"?>
 <p:sld xmlns:a="http://schemas.openxmlformats.org/drawingml/2006/main" xmlns:r="http://schemas.openxmlformats.org/officeDocument/2006/relationships" xmlns:p="http://schemas.openxmlformats.org/presentationml/2006/main">
   <p:cSld>
     <p:spTree>
@@ -6133,8 +5681,8 @@
         </p:nvSpPr>
         <p:spPr>
           <a:xfrm>
-            <a:off x="1251993" y="1944544"/>
-            <a:ext cx="1412112" cy="2592729"/>
+            <a:off x="956834" y="2839280"/>
+            <a:ext cx="1412112" cy="1781879"/>
           </a:xfrm>
           <a:prstGeom prst="rect">
             <a:avLst/>
@@ -6200,8 +5748,8 @@
         </p:nvSpPr>
         <p:spPr>
           <a:xfrm>
-            <a:off x="3299266" y="1944545"/>
-            <a:ext cx="1750676" cy="2592729"/>
+            <a:off x="3004107" y="2839281"/>
+            <a:ext cx="1750676" cy="1781879"/>
           </a:xfrm>
           <a:prstGeom prst="rect">
             <a:avLst/>
@@ -6267,8 +5815,8 @@
         </p:nvSpPr>
         <p:spPr>
           <a:xfrm>
-            <a:off x="5685103" y="1944547"/>
-            <a:ext cx="1412111" cy="2592729"/>
+            <a:off x="5389944" y="2839283"/>
+            <a:ext cx="1412111" cy="1781879"/>
           </a:xfrm>
           <a:prstGeom prst="rect">
             <a:avLst/>
@@ -6334,8 +5882,8 @@
         </p:nvSpPr>
         <p:spPr>
           <a:xfrm>
-            <a:off x="7732375" y="1944544"/>
-            <a:ext cx="1412112" cy="2592729"/>
+            <a:off x="7437216" y="2839280"/>
+            <a:ext cx="1412112" cy="1781879"/>
           </a:xfrm>
           <a:prstGeom prst="rect">
             <a:avLst/>
@@ -6401,8 +5949,8 @@
         </p:nvSpPr>
         <p:spPr>
           <a:xfrm>
-            <a:off x="9779647" y="1944543"/>
-            <a:ext cx="1574153" cy="2592729"/>
+            <a:off x="9484488" y="2839279"/>
+            <a:ext cx="1574153" cy="1781879"/>
           </a:xfrm>
           <a:prstGeom prst="rect">
             <a:avLst/>
@@ -6472,7 +6020,7 @@
         </p:nvCxnSpPr>
         <p:spPr>
           <a:xfrm>
-            <a:off x="2664105" y="3240909"/>
+            <a:off x="2368946" y="3730220"/>
             <a:ext cx="635161" cy="1"/>
           </a:xfrm>
           <a:prstGeom prst="straightConnector1">
@@ -6515,7 +6063,7 @@
         </p:nvCxnSpPr>
         <p:spPr>
           <a:xfrm>
-            <a:off x="5049942" y="3240910"/>
+            <a:off x="4754783" y="3730221"/>
             <a:ext cx="635161" cy="2"/>
           </a:xfrm>
           <a:prstGeom prst="straightConnector1">
@@ -6558,7 +6106,7 @@
         </p:nvCxnSpPr>
         <p:spPr>
           <a:xfrm flipV="1">
-            <a:off x="7097214" y="3240909"/>
+            <a:off x="6802055" y="3730220"/>
             <a:ext cx="635161" cy="3"/>
           </a:xfrm>
           <a:prstGeom prst="straightConnector1">
@@ -6601,7 +6149,7 @@
         </p:nvCxnSpPr>
         <p:spPr>
           <a:xfrm flipV="1">
-            <a:off x="9144487" y="3240908"/>
+            <a:off x="8849328" y="3730219"/>
             <a:ext cx="635160" cy="1"/>
           </a:xfrm>
           <a:prstGeom prst="straightConnector1">
@@ -6639,7 +6187,7 @@
 </p:sld>
 </file>
 
-<file path=ppt/slides/slide6.xml><?xml version="1.0" encoding="utf-8"?>
+<file path=ppt/slides/slide4.xml><?xml version="1.0" encoding="utf-8"?>
 <p:sld xmlns:a="http://schemas.openxmlformats.org/drawingml/2006/main" xmlns:r="http://schemas.openxmlformats.org/officeDocument/2006/relationships" xmlns:p="http://schemas.openxmlformats.org/presentationml/2006/main">
   <p:cSld>
     <p:spTree>
@@ -6725,6 +6273,12 @@
               </a:rPr>
               <a:t>Transformers</a:t>
             </a:r>
+            <a:r>
+              <a:rPr lang="en-US" altLang="ko-KR" dirty="0">
+                <a:latin typeface="Segoe UI" panose="020B0502040204020203" pitchFamily="34" charset="0"/>
+              </a:rPr>
+              <a:t> </a:t>
+            </a:r>
             <a:endParaRPr lang="ko-KR" altLang="en-US" dirty="0"/>
           </a:p>
         </p:txBody>
@@ -6759,14 +6313,266 @@
         </p:blipFill>
         <p:spPr>
           <a:xfrm>
-            <a:off x="2900191" y="1825625"/>
-            <a:ext cx="6391617" cy="4351338"/>
+            <a:off x="678101" y="1578402"/>
+            <a:ext cx="6971396" cy="4746045"/>
           </a:xfrm>
           <a:prstGeom prst="rect">
             <a:avLst/>
           </a:prstGeom>
         </p:spPr>
       </p:pic>
+      <p:sp>
+        <p:nvSpPr>
+          <p:cNvPr id="4" name="TextBox 3">
+            <a:extLst>
+              <a:ext uri="{FF2B5EF4-FFF2-40B4-BE49-F238E27FC236}">
+                <a16:creationId xmlns:a16="http://schemas.microsoft.com/office/drawing/2014/main" id="{5858B4E2-C569-952A-E892-31F4ACEA237D}"/>
+              </a:ext>
+            </a:extLst>
+          </p:cNvPr>
+          <p:cNvSpPr txBox="1"/>
+          <p:nvPr/>
+        </p:nvSpPr>
+        <p:spPr>
+          <a:xfrm>
+            <a:off x="7964129" y="2207666"/>
+            <a:ext cx="4051215" cy="3416320"/>
+          </a:xfrm>
+          <a:prstGeom prst="rect">
+            <a:avLst/>
+          </a:prstGeom>
+          <a:noFill/>
+        </p:spPr>
+        <p:txBody>
+          <a:bodyPr wrap="square">
+            <a:spAutoFit/>
+          </a:bodyPr>
+          <a:lstStyle/>
+          <a:p>
+            <a:endParaRPr lang="en-US" altLang="ko-KR" sz="1800" b="1" dirty="0">
+              <a:solidFill>
+                <a:srgbClr val="000000"/>
+              </a:solidFill>
+              <a:latin typeface="맑은 고딕" panose="020B0503020000020004" pitchFamily="50" charset="-127"/>
+              <a:ea typeface="맑은 고딕" panose="020B0503020000020004" pitchFamily="50" charset="-127"/>
+            </a:endParaRPr>
+          </a:p>
+          <a:p>
+            <a:r>
+              <a:rPr lang="en-US" altLang="ko-KR" sz="1800" b="1" dirty="0">
+                <a:solidFill>
+                  <a:srgbClr val="000000"/>
+                </a:solidFill>
+                <a:latin typeface="맑은 고딕" panose="020B0503020000020004" pitchFamily="50" charset="-127"/>
+                <a:ea typeface="맑은 고딕" panose="020B0503020000020004" pitchFamily="50" charset="-127"/>
+              </a:rPr>
+              <a:t>General Graph </a:t>
+            </a:r>
+          </a:p>
+          <a:p>
+            <a:r>
+              <a:rPr lang="en-US" altLang="ko-KR" sz="1800" dirty="0">
+                <a:solidFill>
+                  <a:srgbClr val="000000"/>
+                </a:solidFill>
+                <a:latin typeface="맑은 고딕" panose="020B0503020000020004" pitchFamily="50" charset="-127"/>
+                <a:ea typeface="맑은 고딕" panose="020B0503020000020004" pitchFamily="50" charset="-127"/>
+              </a:rPr>
+              <a:t>Homogeneous relational entity</a:t>
+            </a:r>
+          </a:p>
+          <a:p>
+            <a:endParaRPr lang="en-US" altLang="ko-KR" sz="1800" dirty="0">
+              <a:solidFill>
+                <a:srgbClr val="000000"/>
+              </a:solidFill>
+              <a:latin typeface="맑은 고딕" panose="020B0503020000020004" pitchFamily="50" charset="-127"/>
+              <a:ea typeface="맑은 고딕" panose="020B0503020000020004" pitchFamily="50" charset="-127"/>
+            </a:endParaRPr>
+          </a:p>
+          <a:p>
+            <a:r>
+              <a:rPr lang="en-US" altLang="ko-KR" sz="1800" b="1" dirty="0">
+                <a:solidFill>
+                  <a:srgbClr val="000000"/>
+                </a:solidFill>
+                <a:latin typeface="맑은 고딕" panose="020B0503020000020004" pitchFamily="50" charset="-127"/>
+                <a:ea typeface="맑은 고딕" panose="020B0503020000020004" pitchFamily="50" charset="-127"/>
+              </a:rPr>
+              <a:t>Program Structure Graph </a:t>
+            </a:r>
+            <a:endParaRPr lang="en-US" altLang="ko-KR" b="1" dirty="0">
+              <a:solidFill>
+                <a:srgbClr val="000000"/>
+              </a:solidFill>
+              <a:latin typeface="맑은 고딕" panose="020B0503020000020004" pitchFamily="50" charset="-127"/>
+              <a:ea typeface="맑은 고딕" panose="020B0503020000020004" pitchFamily="50" charset="-127"/>
+            </a:endParaRPr>
+          </a:p>
+          <a:p>
+            <a:r>
+              <a:rPr lang="en-US" altLang="ko-KR" sz="1800" dirty="0">
+                <a:solidFill>
+                  <a:srgbClr val="000000"/>
+                </a:solidFill>
+                <a:latin typeface="맑은 고딕" panose="020B0503020000020004" pitchFamily="50" charset="-127"/>
+                <a:ea typeface="맑은 고딕" panose="020B0503020000020004" pitchFamily="50" charset="-127"/>
+              </a:rPr>
+              <a:t>Code structure dependency graph</a:t>
+            </a:r>
+          </a:p>
+          <a:p>
+            <a:endParaRPr lang="en-US" altLang="ko-KR" sz="1800" dirty="0">
+              <a:solidFill>
+                <a:srgbClr val="000000"/>
+              </a:solidFill>
+              <a:latin typeface="맑은 고딕" panose="020B0503020000020004" pitchFamily="50" charset="-127"/>
+              <a:ea typeface="맑은 고딕" panose="020B0503020000020004" pitchFamily="50" charset="-127"/>
+            </a:endParaRPr>
+          </a:p>
+          <a:p>
+            <a:r>
+              <a:rPr lang="en-US" altLang="ko-KR" sz="1800" b="1" dirty="0">
+                <a:solidFill>
+                  <a:srgbClr val="000000"/>
+                </a:solidFill>
+                <a:latin typeface="맑은 고딕" panose="020B0503020000020004" pitchFamily="50" charset="-127"/>
+                <a:ea typeface="맑은 고딕" panose="020B0503020000020004" pitchFamily="50" charset="-127"/>
+              </a:rPr>
+              <a:t>Heterogeneous Graph </a:t>
+            </a:r>
+            <a:endParaRPr lang="en-US" altLang="ko-KR" b="1" dirty="0">
+              <a:solidFill>
+                <a:srgbClr val="000000"/>
+              </a:solidFill>
+              <a:latin typeface="맑은 고딕" panose="020B0503020000020004" pitchFamily="50" charset="-127"/>
+              <a:ea typeface="맑은 고딕" panose="020B0503020000020004" pitchFamily="50" charset="-127"/>
+            </a:endParaRPr>
+          </a:p>
+          <a:p>
+            <a:r>
+              <a:rPr lang="en-US" altLang="ko-KR" sz="1800" dirty="0">
+                <a:solidFill>
+                  <a:srgbClr val="000000"/>
+                </a:solidFill>
+                <a:latin typeface="맑은 고딕" panose="020B0503020000020004" pitchFamily="50" charset="-127"/>
+                <a:ea typeface="맑은 고딕" panose="020B0503020000020004" pitchFamily="50" charset="-127"/>
+              </a:rPr>
+              <a:t>Multi-type node edges</a:t>
+            </a:r>
+          </a:p>
+          <a:p>
+            <a:endParaRPr lang="en-US" altLang="ko-KR" sz="1800" dirty="0">
+              <a:solidFill>
+                <a:srgbClr val="000000"/>
+              </a:solidFill>
+              <a:latin typeface="맑은 고딕" panose="020B0503020000020004" pitchFamily="50" charset="-127"/>
+              <a:ea typeface="맑은 고딕" panose="020B0503020000020004" pitchFamily="50" charset="-127"/>
+            </a:endParaRPr>
+          </a:p>
+          <a:p>
+            <a:r>
+              <a:rPr lang="en-US" altLang="ko-KR" sz="1800" b="1" dirty="0">
+                <a:solidFill>
+                  <a:srgbClr val="000000"/>
+                </a:solidFill>
+                <a:latin typeface="맑은 고딕" panose="020B0503020000020004" pitchFamily="50" charset="-127"/>
+                <a:ea typeface="맑은 고딕" panose="020B0503020000020004" pitchFamily="50" charset="-127"/>
+              </a:rPr>
+              <a:t>Hybrid Graph </a:t>
+            </a:r>
+            <a:endParaRPr lang="en-US" altLang="ko-KR" b="1" dirty="0">
+              <a:solidFill>
+                <a:srgbClr val="000000"/>
+              </a:solidFill>
+              <a:latin typeface="맑은 고딕" panose="020B0503020000020004" pitchFamily="50" charset="-127"/>
+              <a:ea typeface="맑은 고딕" panose="020B0503020000020004" pitchFamily="50" charset="-127"/>
+            </a:endParaRPr>
+          </a:p>
+          <a:p>
+            <a:r>
+              <a:rPr lang="en-US" altLang="ko-KR" sz="1800" dirty="0">
+                <a:solidFill>
+                  <a:srgbClr val="000000"/>
+                </a:solidFill>
+                <a:latin typeface="맑은 고딕" panose="020B0503020000020004" pitchFamily="50" charset="-127"/>
+                <a:ea typeface="맑은 고딕" panose="020B0503020000020004" pitchFamily="50" charset="-127"/>
+              </a:rPr>
+              <a:t>Multip</a:t>
+            </a:r>
+            <a:r>
+              <a:rPr lang="en-US" altLang="ko-KR" dirty="0">
+                <a:solidFill>
+                  <a:srgbClr val="000000"/>
+                </a:solidFill>
+                <a:latin typeface="맑은 고딕" panose="020B0503020000020004" pitchFamily="50" charset="-127"/>
+                <a:ea typeface="맑은 고딕" panose="020B0503020000020004" pitchFamily="50" charset="-127"/>
+              </a:rPr>
+              <a:t>le graphs</a:t>
+            </a:r>
+            <a:r>
+              <a:rPr lang="en-US" altLang="ko-KR" sz="1800" dirty="0">
+                <a:solidFill>
+                  <a:srgbClr val="000000"/>
+                </a:solidFill>
+                <a:latin typeface="맑은 고딕" panose="020B0503020000020004" pitchFamily="50" charset="-127"/>
+                <a:ea typeface="맑은 고딕" panose="020B0503020000020004" pitchFamily="50" charset="-127"/>
+              </a:rPr>
+              <a:t> combined</a:t>
+            </a:r>
+          </a:p>
+        </p:txBody>
+      </p:sp>
+      <p:sp>
+        <p:nvSpPr>
+          <p:cNvPr id="6" name="직사각형 5">
+            <a:extLst>
+              <a:ext uri="{FF2B5EF4-FFF2-40B4-BE49-F238E27FC236}">
+                <a16:creationId xmlns:a16="http://schemas.microsoft.com/office/drawing/2014/main" id="{1839E9E5-3BF5-086F-594F-3FC0671BA07D}"/>
+              </a:ext>
+            </a:extLst>
+          </p:cNvPr>
+          <p:cNvSpPr/>
+          <p:nvPr/>
+        </p:nvSpPr>
+        <p:spPr>
+          <a:xfrm>
+            <a:off x="8817077" y="558124"/>
+            <a:ext cx="2536723" cy="560439"/>
+          </a:xfrm>
+          <a:prstGeom prst="rect">
+            <a:avLst/>
+          </a:prstGeom>
+        </p:spPr>
+        <p:style>
+          <a:lnRef idx="2">
+            <a:schemeClr val="dk1">
+              <a:shade val="15000"/>
+            </a:schemeClr>
+          </a:lnRef>
+          <a:fillRef idx="1">
+            <a:schemeClr val="dk1"/>
+          </a:fillRef>
+          <a:effectRef idx="0">
+            <a:schemeClr val="dk1"/>
+          </a:effectRef>
+          <a:fontRef idx="minor">
+            <a:schemeClr val="lt1"/>
+          </a:fontRef>
+        </p:style>
+        <p:txBody>
+          <a:bodyPr rtlCol="0" anchor="ctr"/>
+          <a:lstStyle/>
+          <a:p>
+            <a:pPr algn="ctr"/>
+            <a:r>
+              <a:rPr lang="en-US" altLang="ko-KR" dirty="0"/>
+              <a:t>Graph Type</a:t>
+            </a:r>
+            <a:endParaRPr lang="ko-KR" altLang="en-US" dirty="0"/>
+          </a:p>
+        </p:txBody>
+      </p:sp>
     </p:spTree>
     <p:extLst>
       <p:ext uri="{BB962C8B-B14F-4D97-AF65-F5344CB8AC3E}">
@@ -6780,7 +6586,7 @@
 </p:sld>
 </file>
 
-<file path=ppt/slides/slide7.xml><?xml version="1.0" encoding="utf-8"?>
+<file path=ppt/slides/slide5.xml><?xml version="1.0" encoding="utf-8"?>
 <p:sld xmlns:a="http://schemas.openxmlformats.org/drawingml/2006/main" xmlns:r="http://schemas.openxmlformats.org/officeDocument/2006/relationships" xmlns:p="http://schemas.openxmlformats.org/presentationml/2006/main">
   <p:cSld>
     <p:spTree>
@@ -6900,7 +6706,7 @@
         </p:blipFill>
         <p:spPr>
           <a:xfrm>
-            <a:off x="3411484" y="1947396"/>
+            <a:off x="186505" y="2516754"/>
             <a:ext cx="5369031" cy="3393825"/>
           </a:xfrm>
           <a:prstGeom prst="rect">
@@ -6908,6 +6714,229 @@
           </a:prstGeom>
         </p:spPr>
       </p:pic>
+      <p:sp>
+        <p:nvSpPr>
+          <p:cNvPr id="4" name="TextBox 3">
+            <a:extLst>
+              <a:ext uri="{FF2B5EF4-FFF2-40B4-BE49-F238E27FC236}">
+                <a16:creationId xmlns:a16="http://schemas.microsoft.com/office/drawing/2014/main" id="{0A7A47F9-2E80-72ED-91EF-2D5700BD3256}"/>
+              </a:ext>
+            </a:extLst>
+          </p:cNvPr>
+          <p:cNvSpPr txBox="1"/>
+          <p:nvPr/>
+        </p:nvSpPr>
+        <p:spPr>
+          <a:xfrm>
+            <a:off x="5663380" y="1883600"/>
+            <a:ext cx="6528620" cy="4609275"/>
+          </a:xfrm>
+          <a:prstGeom prst="rect">
+            <a:avLst/>
+          </a:prstGeom>
+          <a:noFill/>
+        </p:spPr>
+        <p:txBody>
+          <a:bodyPr wrap="square">
+            <a:spAutoFit/>
+          </a:bodyPr>
+          <a:lstStyle/>
+          <a:p>
+            <a:pPr>
+              <a:lnSpc>
+                <a:spcPct val="150000"/>
+              </a:lnSpc>
+            </a:pPr>
+            <a:r>
+              <a:rPr lang="en-US" altLang="ko-KR" sz="1800" b="1" dirty="0">
+                <a:solidFill>
+                  <a:srgbClr val="000000"/>
+                </a:solidFill>
+                <a:latin typeface="맑은 고딕" panose="020B0503020000020004" pitchFamily="50" charset="-127"/>
+                <a:ea typeface="맑은 고딕" panose="020B0503020000020004" pitchFamily="50" charset="-127"/>
+              </a:rPr>
+              <a:t>Implicit Representation</a:t>
+            </a:r>
+          </a:p>
+          <a:p>
+            <a:pPr>
+              <a:lnSpc>
+                <a:spcPct val="150000"/>
+              </a:lnSpc>
+            </a:pPr>
+            <a:r>
+              <a:rPr lang="en-US" altLang="ko-KR" sz="1800" dirty="0">
+                <a:solidFill>
+                  <a:srgbClr val="000000"/>
+                </a:solidFill>
+                <a:latin typeface="맑은 고딕" panose="020B0503020000020004" pitchFamily="50" charset="-127"/>
+                <a:ea typeface="맑은 고딕" panose="020B0503020000020004" pitchFamily="50" charset="-127"/>
+              </a:rPr>
+              <a:t>Learn graph structure indirectly through the computation process inside the network</a:t>
+            </a:r>
+          </a:p>
+          <a:p>
+            <a:pPr>
+              <a:lnSpc>
+                <a:spcPct val="150000"/>
+              </a:lnSpc>
+            </a:pPr>
+            <a:endParaRPr lang="ko-KR" altLang="en-US" sz="1800" b="1" dirty="0">
+              <a:solidFill>
+                <a:srgbClr val="000000"/>
+              </a:solidFill>
+              <a:latin typeface="맑은 고딕" panose="020B0503020000020004" pitchFamily="50" charset="-127"/>
+              <a:ea typeface="맑은 고딕" panose="020B0503020000020004" pitchFamily="50" charset="-127"/>
+            </a:endParaRPr>
+          </a:p>
+          <a:p>
+            <a:pPr>
+              <a:lnSpc>
+                <a:spcPct val="150000"/>
+              </a:lnSpc>
+            </a:pPr>
+            <a:r>
+              <a:rPr lang="en-US" altLang="ko-KR" sz="1800" b="1" dirty="0">
+                <a:solidFill>
+                  <a:srgbClr val="000000"/>
+                </a:solidFill>
+                <a:latin typeface="맑은 고딕" panose="020B0503020000020004" pitchFamily="50" charset="-127"/>
+                <a:ea typeface="맑은 고딕" panose="020B0503020000020004" pitchFamily="50" charset="-127"/>
+              </a:rPr>
+              <a:t>Explicit Representation</a:t>
+            </a:r>
+          </a:p>
+          <a:p>
+            <a:pPr>
+              <a:lnSpc>
+                <a:spcPct val="150000"/>
+              </a:lnSpc>
+            </a:pPr>
+            <a:r>
+              <a:rPr lang="en-US" altLang="ko-KR" sz="1800" dirty="0">
+                <a:solidFill>
+                  <a:srgbClr val="000000"/>
+                </a:solidFill>
+                <a:latin typeface="맑은 고딕" panose="020B0503020000020004" pitchFamily="50" charset="-127"/>
+                <a:ea typeface="맑은 고딕" panose="020B0503020000020004" pitchFamily="50" charset="-127"/>
+              </a:rPr>
+              <a:t>Captures the overall graph structure in embeddings that preserve topology</a:t>
+            </a:r>
+          </a:p>
+          <a:p>
+            <a:pPr>
+              <a:lnSpc>
+                <a:spcPct val="150000"/>
+              </a:lnSpc>
+            </a:pPr>
+            <a:endParaRPr lang="ko-KR" altLang="en-US" sz="1800" dirty="0">
+              <a:solidFill>
+                <a:srgbClr val="000000"/>
+              </a:solidFill>
+              <a:latin typeface="맑은 고딕" panose="020B0503020000020004" pitchFamily="50" charset="-127"/>
+              <a:ea typeface="맑은 고딕" panose="020B0503020000020004" pitchFamily="50" charset="-127"/>
+            </a:endParaRPr>
+          </a:p>
+          <a:p>
+            <a:pPr>
+              <a:lnSpc>
+                <a:spcPct val="150000"/>
+              </a:lnSpc>
+            </a:pPr>
+            <a:r>
+              <a:rPr lang="en-US" altLang="ko-KR" sz="1800" b="1" dirty="0">
+                <a:solidFill>
+                  <a:srgbClr val="000000"/>
+                </a:solidFill>
+                <a:latin typeface="맑은 고딕" panose="020B0503020000020004" pitchFamily="50" charset="-127"/>
+                <a:ea typeface="맑은 고딕" panose="020B0503020000020004" pitchFamily="50" charset="-127"/>
+              </a:rPr>
+              <a:t>Encoded Representation</a:t>
+            </a:r>
+          </a:p>
+          <a:p>
+            <a:pPr>
+              <a:lnSpc>
+                <a:spcPct val="150000"/>
+              </a:lnSpc>
+            </a:pPr>
+            <a:r>
+              <a:rPr lang="en-US" altLang="ko-KR" sz="1800" dirty="0">
+                <a:solidFill>
+                  <a:srgbClr val="000000"/>
+                </a:solidFill>
+                <a:latin typeface="맑은 고딕" panose="020B0503020000020004" pitchFamily="50" charset="-127"/>
+                <a:ea typeface="맑은 고딕" panose="020B0503020000020004" pitchFamily="50" charset="-127"/>
+              </a:rPr>
+              <a:t>Graph structure is converted into simple numeric features</a:t>
+            </a:r>
+          </a:p>
+          <a:p>
+            <a:pPr>
+              <a:lnSpc>
+                <a:spcPct val="150000"/>
+              </a:lnSpc>
+            </a:pPr>
+            <a:endParaRPr lang="en-US" altLang="ko-KR" sz="1800" dirty="0">
+              <a:solidFill>
+                <a:srgbClr val="000000"/>
+              </a:solidFill>
+              <a:latin typeface="맑은 고딕" panose="020B0503020000020004" pitchFamily="50" charset="-127"/>
+              <a:ea typeface="맑은 고딕" panose="020B0503020000020004" pitchFamily="50" charset="-127"/>
+            </a:endParaRPr>
+          </a:p>
+        </p:txBody>
+      </p:sp>
+      <p:sp>
+        <p:nvSpPr>
+          <p:cNvPr id="6" name="직사각형 5">
+            <a:extLst>
+              <a:ext uri="{FF2B5EF4-FFF2-40B4-BE49-F238E27FC236}">
+                <a16:creationId xmlns:a16="http://schemas.microsoft.com/office/drawing/2014/main" id="{E41A287B-25C6-2B92-5E47-EDBF322248B5}"/>
+              </a:ext>
+            </a:extLst>
+          </p:cNvPr>
+          <p:cNvSpPr/>
+          <p:nvPr/>
+        </p:nvSpPr>
+        <p:spPr>
+          <a:xfrm>
+            <a:off x="8817077" y="558124"/>
+            <a:ext cx="2536723" cy="560439"/>
+          </a:xfrm>
+          <a:prstGeom prst="rect">
+            <a:avLst/>
+          </a:prstGeom>
+        </p:spPr>
+        <p:style>
+          <a:lnRef idx="2">
+            <a:schemeClr val="dk1">
+              <a:shade val="15000"/>
+            </a:schemeClr>
+          </a:lnRef>
+          <a:fillRef idx="1">
+            <a:schemeClr val="dk1"/>
+          </a:fillRef>
+          <a:effectRef idx="0">
+            <a:schemeClr val="dk1"/>
+          </a:effectRef>
+          <a:fontRef idx="minor">
+            <a:schemeClr val="lt1"/>
+          </a:fontRef>
+        </p:style>
+        <p:txBody>
+          <a:bodyPr rtlCol="0" anchor="ctr"/>
+          <a:lstStyle/>
+          <a:p>
+            <a:pPr algn="ctr"/>
+            <a:r>
+              <a:rPr lang="en-US" altLang="ko-KR" dirty="0"/>
+              <a:t>Graph Representation Strategy</a:t>
+            </a:r>
+            <a:endParaRPr lang="ko-KR" altLang="en-US" dirty="0"/>
+          </a:p>
+        </p:txBody>
+      </p:sp>
     </p:spTree>
     <p:extLst>
       <p:ext uri="{BB962C8B-B14F-4D97-AF65-F5344CB8AC3E}">
@@ -6921,7 +6950,7 @@
 </p:sld>
 </file>
 
-<file path=ppt/slides/slide8.xml><?xml version="1.0" encoding="utf-8"?>
+<file path=ppt/slides/slide6.xml><?xml version="1.0" encoding="utf-8"?>
 <p:sld xmlns:a="http://schemas.openxmlformats.org/drawingml/2006/main" xmlns:r="http://schemas.openxmlformats.org/officeDocument/2006/relationships" xmlns:p="http://schemas.openxmlformats.org/presentationml/2006/main">
   <p:cSld>
     <p:spTree>
@@ -7041,14 +7070,298 @@
         </p:blipFill>
         <p:spPr>
           <a:xfrm>
-            <a:off x="3110539" y="1592918"/>
-            <a:ext cx="4934915" cy="3280532"/>
+            <a:off x="668593" y="1760432"/>
+            <a:ext cx="6187157" cy="4112972"/>
           </a:xfrm>
           <a:prstGeom prst="rect">
             <a:avLst/>
           </a:prstGeom>
         </p:spPr>
       </p:pic>
+      <p:sp>
+        <p:nvSpPr>
+          <p:cNvPr id="4" name="TextBox 3">
+            <a:extLst>
+              <a:ext uri="{FF2B5EF4-FFF2-40B4-BE49-F238E27FC236}">
+                <a16:creationId xmlns:a16="http://schemas.microsoft.com/office/drawing/2014/main" id="{6C603363-8C03-AC63-FD68-5CB711AE1A73}"/>
+              </a:ext>
+            </a:extLst>
+          </p:cNvPr>
+          <p:cNvSpPr txBox="1"/>
+          <p:nvPr/>
+        </p:nvSpPr>
+        <p:spPr>
+          <a:xfrm>
+            <a:off x="7216878" y="1885541"/>
+            <a:ext cx="4896464" cy="4193777"/>
+          </a:xfrm>
+          <a:prstGeom prst="rect">
+            <a:avLst/>
+          </a:prstGeom>
+          <a:noFill/>
+        </p:spPr>
+        <p:txBody>
+          <a:bodyPr wrap="square">
+            <a:spAutoFit/>
+          </a:bodyPr>
+          <a:lstStyle/>
+          <a:p>
+            <a:pPr>
+              <a:lnSpc>
+                <a:spcPct val="150000"/>
+              </a:lnSpc>
+            </a:pPr>
+            <a:r>
+              <a:rPr lang="en-US" altLang="ko-KR" sz="1800" b="1" dirty="0">
+                <a:solidFill>
+                  <a:srgbClr val="000000"/>
+                </a:solidFill>
+                <a:latin typeface="맑은 고딕" panose="020B0503020000020004" pitchFamily="50" charset="-127"/>
+                <a:ea typeface="맑은 고딕" panose="020B0503020000020004" pitchFamily="50" charset="-127"/>
+              </a:rPr>
+              <a:t>Encoding Type</a:t>
+            </a:r>
+          </a:p>
+          <a:p>
+            <a:pPr>
+              <a:lnSpc>
+                <a:spcPct val="150000"/>
+              </a:lnSpc>
+            </a:pPr>
+            <a:r>
+              <a:rPr lang="en-US" altLang="ko-KR" dirty="0">
+                <a:solidFill>
+                  <a:srgbClr val="000000"/>
+                </a:solidFill>
+                <a:latin typeface="맑은 고딕" panose="020B0503020000020004" pitchFamily="50" charset="-127"/>
+                <a:ea typeface="맑은 고딕" panose="020B0503020000020004" pitchFamily="50" charset="-127"/>
+              </a:rPr>
+              <a:t>P</a:t>
+            </a:r>
+            <a:r>
+              <a:rPr lang="en-US" altLang="ko-KR" sz="1800" dirty="0">
+                <a:solidFill>
+                  <a:srgbClr val="000000"/>
+                </a:solidFill>
+                <a:latin typeface="맑은 고딕" panose="020B0503020000020004" pitchFamily="50" charset="-127"/>
+                <a:ea typeface="맑은 고딕" panose="020B0503020000020004" pitchFamily="50" charset="-127"/>
+              </a:rPr>
+              <a:t>ositions represented per node (absolute) </a:t>
+            </a:r>
+          </a:p>
+          <a:p>
+            <a:pPr>
+              <a:lnSpc>
+                <a:spcPct val="150000"/>
+              </a:lnSpc>
+            </a:pPr>
+            <a:r>
+              <a:rPr lang="en-US" altLang="ko-KR" sz="1800" dirty="0">
+                <a:solidFill>
+                  <a:srgbClr val="000000"/>
+                </a:solidFill>
+                <a:latin typeface="맑은 고딕" panose="020B0503020000020004" pitchFamily="50" charset="-127"/>
+                <a:ea typeface="맑은 고딕" panose="020B0503020000020004" pitchFamily="50" charset="-127"/>
+              </a:rPr>
+              <a:t>or between node pairs (relative)</a:t>
+            </a:r>
+          </a:p>
+          <a:p>
+            <a:pPr>
+              <a:lnSpc>
+                <a:spcPct val="150000"/>
+              </a:lnSpc>
+            </a:pPr>
+            <a:endParaRPr lang="ko-KR" altLang="en-US" sz="1800" dirty="0">
+              <a:solidFill>
+                <a:srgbClr val="000000"/>
+              </a:solidFill>
+              <a:latin typeface="맑은 고딕" panose="020B0503020000020004" pitchFamily="50" charset="-127"/>
+              <a:ea typeface="맑은 고딕" panose="020B0503020000020004" pitchFamily="50" charset="-127"/>
+            </a:endParaRPr>
+          </a:p>
+          <a:p>
+            <a:pPr>
+              <a:lnSpc>
+                <a:spcPct val="150000"/>
+              </a:lnSpc>
+            </a:pPr>
+            <a:r>
+              <a:rPr lang="en-US" altLang="ko-KR" sz="1800" b="1" dirty="0">
+                <a:solidFill>
+                  <a:srgbClr val="000000"/>
+                </a:solidFill>
+                <a:latin typeface="맑은 고딕" panose="020B0503020000020004" pitchFamily="50" charset="-127"/>
+                <a:ea typeface="맑은 고딕" panose="020B0503020000020004" pitchFamily="50" charset="-127"/>
+              </a:rPr>
+              <a:t>Information Type</a:t>
+            </a:r>
+          </a:p>
+          <a:p>
+            <a:pPr>
+              <a:lnSpc>
+                <a:spcPct val="150000"/>
+              </a:lnSpc>
+            </a:pPr>
+            <a:r>
+              <a:rPr lang="en-US" altLang="ko-KR" dirty="0">
+                <a:solidFill>
+                  <a:srgbClr val="000000"/>
+                </a:solidFill>
+                <a:latin typeface="맑은 고딕" panose="020B0503020000020004" pitchFamily="50" charset="-127"/>
+                <a:ea typeface="맑은 고딕" panose="020B0503020000020004" pitchFamily="50" charset="-127"/>
+              </a:rPr>
+              <a:t>Which</a:t>
+            </a:r>
+            <a:r>
+              <a:rPr lang="en-US" altLang="ko-KR" sz="1800" dirty="0">
+                <a:solidFill>
+                  <a:srgbClr val="000000"/>
+                </a:solidFill>
+                <a:latin typeface="맑은 고딕" panose="020B0503020000020004" pitchFamily="50" charset="-127"/>
+                <a:ea typeface="맑은 고딕" panose="020B0503020000020004" pitchFamily="50" charset="-127"/>
+              </a:rPr>
+              <a:t> structural information is used</a:t>
+            </a:r>
+            <a:endParaRPr lang="en-US" altLang="ko-KR" dirty="0">
+              <a:solidFill>
+                <a:srgbClr val="000000"/>
+              </a:solidFill>
+              <a:latin typeface="맑은 고딕" panose="020B0503020000020004" pitchFamily="50" charset="-127"/>
+              <a:ea typeface="맑은 고딕" panose="020B0503020000020004" pitchFamily="50" charset="-127"/>
+            </a:endParaRPr>
+          </a:p>
+          <a:p>
+            <a:pPr>
+              <a:lnSpc>
+                <a:spcPct val="150000"/>
+              </a:lnSpc>
+            </a:pPr>
+            <a:endParaRPr lang="ko-KR" altLang="en-US" sz="1800" dirty="0">
+              <a:solidFill>
+                <a:srgbClr val="000000"/>
+              </a:solidFill>
+              <a:latin typeface="맑은 고딕" panose="020B0503020000020004" pitchFamily="50" charset="-127"/>
+              <a:ea typeface="맑은 고딕" panose="020B0503020000020004" pitchFamily="50" charset="-127"/>
+            </a:endParaRPr>
+          </a:p>
+          <a:p>
+            <a:pPr>
+              <a:lnSpc>
+                <a:spcPct val="150000"/>
+              </a:lnSpc>
+            </a:pPr>
+            <a:r>
+              <a:rPr lang="en-US" altLang="ko-KR" sz="1800" b="1" dirty="0">
+                <a:solidFill>
+                  <a:srgbClr val="000000"/>
+                </a:solidFill>
+                <a:latin typeface="맑은 고딕" panose="020B0503020000020004" pitchFamily="50" charset="-127"/>
+                <a:ea typeface="맑은 고딕" panose="020B0503020000020004" pitchFamily="50" charset="-127"/>
+              </a:rPr>
+              <a:t>Embedding Method</a:t>
+            </a:r>
+          </a:p>
+          <a:p>
+            <a:pPr>
+              <a:lnSpc>
+                <a:spcPct val="150000"/>
+              </a:lnSpc>
+            </a:pPr>
+            <a:r>
+              <a:rPr lang="en-US" altLang="ko-KR" dirty="0">
+                <a:solidFill>
+                  <a:srgbClr val="000000"/>
+                </a:solidFill>
+                <a:latin typeface="맑은 고딕" panose="020B0503020000020004" pitchFamily="50" charset="-127"/>
+                <a:ea typeface="맑은 고딕" panose="020B0503020000020004" pitchFamily="50" charset="-127"/>
+              </a:rPr>
+              <a:t>H</a:t>
+            </a:r>
+            <a:r>
+              <a:rPr lang="en-US" altLang="ko-KR" sz="1800" dirty="0">
+                <a:solidFill>
+                  <a:srgbClr val="000000"/>
+                </a:solidFill>
+                <a:latin typeface="맑은 고딕" panose="020B0503020000020004" pitchFamily="50" charset="-127"/>
+                <a:ea typeface="맑은 고딕" panose="020B0503020000020004" pitchFamily="50" charset="-127"/>
+              </a:rPr>
+              <a:t>ow structural information is converted </a:t>
+            </a:r>
+          </a:p>
+          <a:p>
+            <a:pPr>
+              <a:lnSpc>
+                <a:spcPct val="150000"/>
+              </a:lnSpc>
+            </a:pPr>
+            <a:r>
+              <a:rPr lang="en-US" altLang="ko-KR" sz="1800" dirty="0">
+                <a:solidFill>
+                  <a:srgbClr val="000000"/>
+                </a:solidFill>
+                <a:latin typeface="맑은 고딕" panose="020B0503020000020004" pitchFamily="50" charset="-127"/>
+                <a:ea typeface="맑은 고딕" panose="020B0503020000020004" pitchFamily="50" charset="-127"/>
+              </a:rPr>
+              <a:t>into vector representations</a:t>
+            </a:r>
+          </a:p>
+        </p:txBody>
+      </p:sp>
+      <p:sp>
+        <p:nvSpPr>
+          <p:cNvPr id="6" name="직사각형 5">
+            <a:extLst>
+              <a:ext uri="{FF2B5EF4-FFF2-40B4-BE49-F238E27FC236}">
+                <a16:creationId xmlns:a16="http://schemas.microsoft.com/office/drawing/2014/main" id="{5D3953B1-A1CE-E7D8-EF7C-34594122399A}"/>
+              </a:ext>
+            </a:extLst>
+          </p:cNvPr>
+          <p:cNvSpPr/>
+          <p:nvPr/>
+        </p:nvSpPr>
+        <p:spPr>
+          <a:xfrm>
+            <a:off x="8817077" y="558124"/>
+            <a:ext cx="2536723" cy="560439"/>
+          </a:xfrm>
+          <a:prstGeom prst="rect">
+            <a:avLst/>
+          </a:prstGeom>
+        </p:spPr>
+        <p:style>
+          <a:lnRef idx="2">
+            <a:schemeClr val="dk1">
+              <a:shade val="15000"/>
+            </a:schemeClr>
+          </a:lnRef>
+          <a:fillRef idx="1">
+            <a:schemeClr val="dk1"/>
+          </a:fillRef>
+          <a:effectRef idx="0">
+            <a:schemeClr val="dk1"/>
+          </a:effectRef>
+          <a:fontRef idx="minor">
+            <a:schemeClr val="lt1"/>
+          </a:fontRef>
+        </p:style>
+        <p:txBody>
+          <a:bodyPr rtlCol="0" anchor="ctr"/>
+          <a:lstStyle/>
+          <a:p>
+            <a:pPr algn="ctr"/>
+            <a:r>
+              <a:rPr lang="en-US" altLang="ko-KR" dirty="0" err="1"/>
+              <a:t>Positinal</a:t>
+            </a:r>
+            <a:r>
+              <a:rPr lang="en-US" altLang="ko-KR" dirty="0"/>
+              <a:t> Encoding</a:t>
+            </a:r>
+            <a:endParaRPr lang="ko-KR" altLang="en-US" dirty="0"/>
+          </a:p>
+        </p:txBody>
+      </p:sp>
     </p:spTree>
     <p:extLst>
       <p:ext uri="{BB962C8B-B14F-4D97-AF65-F5344CB8AC3E}">
@@ -7062,7 +7375,7 @@
 </p:sld>
 </file>
 
-<file path=ppt/slides/slide9.xml><?xml version="1.0" encoding="utf-8"?>
+<file path=ppt/slides/slide7.xml><?xml version="1.0" encoding="utf-8"?>
 <p:sld xmlns:a="http://schemas.openxmlformats.org/drawingml/2006/main" xmlns:r="http://schemas.openxmlformats.org/officeDocument/2006/relationships" xmlns:p="http://schemas.openxmlformats.org/presentationml/2006/main">
   <p:cSld>
     <p:spTree>
@@ -7182,18 +7495,1012 @@
         </p:blipFill>
         <p:spPr>
           <a:xfrm>
-            <a:off x="838200" y="2169076"/>
-            <a:ext cx="10515600" cy="3664435"/>
+            <a:off x="336753" y="1956619"/>
+            <a:ext cx="11266349" cy="3926053"/>
           </a:xfrm>
           <a:prstGeom prst="rect">
             <a:avLst/>
           </a:prstGeom>
         </p:spPr>
       </p:pic>
+      <p:sp>
+        <p:nvSpPr>
+          <p:cNvPr id="3" name="직사각형 2">
+            <a:extLst>
+              <a:ext uri="{FF2B5EF4-FFF2-40B4-BE49-F238E27FC236}">
+                <a16:creationId xmlns:a16="http://schemas.microsoft.com/office/drawing/2014/main" id="{02FD9CA8-3CAF-1ACC-BF8F-88F1E81288C2}"/>
+              </a:ext>
+            </a:extLst>
+          </p:cNvPr>
+          <p:cNvSpPr/>
+          <p:nvPr/>
+        </p:nvSpPr>
+        <p:spPr>
+          <a:xfrm>
+            <a:off x="8817077" y="558124"/>
+            <a:ext cx="2536723" cy="560439"/>
+          </a:xfrm>
+          <a:prstGeom prst="rect">
+            <a:avLst/>
+          </a:prstGeom>
+        </p:spPr>
+        <p:style>
+          <a:lnRef idx="2">
+            <a:schemeClr val="dk1">
+              <a:shade val="15000"/>
+            </a:schemeClr>
+          </a:lnRef>
+          <a:fillRef idx="1">
+            <a:schemeClr val="dk1"/>
+          </a:fillRef>
+          <a:effectRef idx="0">
+            <a:schemeClr val="dk1"/>
+          </a:effectRef>
+          <a:fontRef idx="minor">
+            <a:schemeClr val="lt1"/>
+          </a:fontRef>
+        </p:style>
+        <p:txBody>
+          <a:bodyPr rtlCol="0" anchor="ctr"/>
+          <a:lstStyle/>
+          <a:p>
+            <a:pPr algn="ctr"/>
+            <a:r>
+              <a:rPr lang="en-US" altLang="ko-KR" dirty="0" err="1"/>
+              <a:t>Positinal</a:t>
+            </a:r>
+            <a:r>
+              <a:rPr lang="en-US" altLang="ko-KR" dirty="0"/>
+              <a:t> Encoding</a:t>
+            </a:r>
+            <a:endParaRPr lang="ko-KR" altLang="en-US" dirty="0"/>
+          </a:p>
+        </p:txBody>
+      </p:sp>
     </p:spTree>
     <p:extLst>
       <p:ext uri="{BB962C8B-B14F-4D97-AF65-F5344CB8AC3E}">
         <p14:creationId xmlns:p14="http://schemas.microsoft.com/office/powerpoint/2010/main" val="3336347251"/>
+      </p:ext>
+    </p:extLst>
+  </p:cSld>
+  <p:clrMapOvr>
+    <a:masterClrMapping/>
+  </p:clrMapOvr>
+</p:sld>
+</file>
+
+<file path=ppt/slides/slide8.xml><?xml version="1.0" encoding="utf-8"?>
+<p:sld xmlns:a="http://schemas.openxmlformats.org/drawingml/2006/main" xmlns:r="http://schemas.openxmlformats.org/officeDocument/2006/relationships" xmlns:p="http://schemas.openxmlformats.org/presentationml/2006/main">
+  <p:cSld>
+    <p:spTree>
+      <p:nvGrpSpPr>
+        <p:cNvPr id="1" name="">
+          <a:extLst>
+            <a:ext uri="{FF2B5EF4-FFF2-40B4-BE49-F238E27FC236}">
+              <a16:creationId xmlns:a16="http://schemas.microsoft.com/office/drawing/2014/main" id="{D6FEE05C-768B-50C5-6555-D3317A210AA6}"/>
+            </a:ext>
+          </a:extLst>
+        </p:cNvPr>
+        <p:cNvGrpSpPr/>
+        <p:nvPr/>
+      </p:nvGrpSpPr>
+      <p:grpSpPr>
+        <a:xfrm>
+          <a:off x="0" y="0"/>
+          <a:ext cx="0" cy="0"/>
+          <a:chOff x="0" y="0"/>
+          <a:chExt cx="0" cy="0"/>
+        </a:xfrm>
+      </p:grpSpPr>
+      <p:sp>
+        <p:nvSpPr>
+          <p:cNvPr id="2" name="제목 1">
+            <a:extLst>
+              <a:ext uri="{FF2B5EF4-FFF2-40B4-BE49-F238E27FC236}">
+                <a16:creationId xmlns:a16="http://schemas.microsoft.com/office/drawing/2014/main" id="{89CE8072-FC78-57A4-7448-1A07D3D2CAC0}"/>
+              </a:ext>
+            </a:extLst>
+          </p:cNvPr>
+          <p:cNvSpPr>
+            <a:spLocks noGrp="1"/>
+          </p:cNvSpPr>
+          <p:nvPr>
+            <p:ph type="title"/>
+          </p:nvPr>
+        </p:nvSpPr>
+        <p:spPr/>
+        <p:txBody>
+          <a:bodyPr/>
+          <a:lstStyle/>
+          <a:p>
+            <a:r>
+              <a:rPr lang="ko-KR" altLang="ko-KR" dirty="0" err="1">
+                <a:latin typeface="Segoe UI" panose="020B0502040204020203" pitchFamily="34" charset="0"/>
+              </a:rPr>
+              <a:t>Graph</a:t>
+            </a:r>
+            <a:r>
+              <a:rPr lang="ko-KR" altLang="ko-KR" dirty="0">
+                <a:latin typeface="Segoe UI" panose="020B0502040204020203" pitchFamily="34" charset="0"/>
+              </a:rPr>
+              <a:t> </a:t>
+            </a:r>
+            <a:r>
+              <a:rPr lang="ko-KR" altLang="ko-KR" dirty="0" err="1">
+                <a:latin typeface="Segoe UI" panose="020B0502040204020203" pitchFamily="34" charset="0"/>
+              </a:rPr>
+              <a:t>Integration</a:t>
+            </a:r>
+            <a:r>
+              <a:rPr lang="ko-KR" altLang="ko-KR" dirty="0">
+                <a:latin typeface="Segoe UI" panose="020B0502040204020203" pitchFamily="34" charset="0"/>
+              </a:rPr>
+              <a:t> </a:t>
+            </a:r>
+            <a:r>
+              <a:rPr lang="ko-KR" altLang="ko-KR" dirty="0" err="1">
+                <a:latin typeface="Segoe UI" panose="020B0502040204020203" pitchFamily="34" charset="0"/>
+              </a:rPr>
+              <a:t>in</a:t>
+            </a:r>
+            <a:r>
+              <a:rPr lang="ko-KR" altLang="ko-KR" dirty="0">
+                <a:latin typeface="Segoe UI" panose="020B0502040204020203" pitchFamily="34" charset="0"/>
+              </a:rPr>
+              <a:t> </a:t>
+            </a:r>
+            <a:r>
+              <a:rPr lang="ko-KR" altLang="ko-KR" dirty="0" err="1">
+                <a:latin typeface="Segoe UI" panose="020B0502040204020203" pitchFamily="34" charset="0"/>
+              </a:rPr>
+              <a:t>Transformers</a:t>
+            </a:r>
+            <a:endParaRPr lang="ko-KR" altLang="en-US" dirty="0"/>
+          </a:p>
+        </p:txBody>
+      </p:sp>
+      <p:pic>
+        <p:nvPicPr>
+          <p:cNvPr id="5" name="내용 개체 틀 4">
+            <a:extLst>
+              <a:ext uri="{FF2B5EF4-FFF2-40B4-BE49-F238E27FC236}">
+                <a16:creationId xmlns:a16="http://schemas.microsoft.com/office/drawing/2014/main" id="{AFDDEA74-2C54-3130-804A-1EAEC47B71A5}"/>
+              </a:ext>
+            </a:extLst>
+          </p:cNvPr>
+          <p:cNvPicPr>
+            <a:picLocks noGrp="1" noChangeAspect="1"/>
+          </p:cNvPicPr>
+          <p:nvPr>
+            <p:ph idx="1"/>
+          </p:nvPr>
+        </p:nvPicPr>
+        <p:blipFill>
+          <a:blip r:embed="rId2">
+            <a:extLst>
+              <a:ext uri="{28A0092B-C50C-407E-A947-70E740481C1C}">
+                <a14:useLocalDpi xmlns:a14="http://schemas.microsoft.com/office/drawing/2010/main" val="0"/>
+              </a:ext>
+            </a:extLst>
+          </a:blip>
+          <a:stretch>
+            <a:fillRect/>
+          </a:stretch>
+        </p:blipFill>
+        <p:spPr>
+          <a:xfrm>
+            <a:off x="509519" y="2143432"/>
+            <a:ext cx="11172962" cy="3992123"/>
+          </a:xfrm>
+          <a:prstGeom prst="rect">
+            <a:avLst/>
+          </a:prstGeom>
+        </p:spPr>
+      </p:pic>
+      <p:sp>
+        <p:nvSpPr>
+          <p:cNvPr id="3" name="직사각형 2">
+            <a:extLst>
+              <a:ext uri="{FF2B5EF4-FFF2-40B4-BE49-F238E27FC236}">
+                <a16:creationId xmlns:a16="http://schemas.microsoft.com/office/drawing/2014/main" id="{8F2CDB59-3F46-9D9F-BBB0-30FBA278A9E7}"/>
+              </a:ext>
+            </a:extLst>
+          </p:cNvPr>
+          <p:cNvSpPr/>
+          <p:nvPr/>
+        </p:nvSpPr>
+        <p:spPr>
+          <a:xfrm>
+            <a:off x="8817077" y="558124"/>
+            <a:ext cx="2536723" cy="560439"/>
+          </a:xfrm>
+          <a:prstGeom prst="rect">
+            <a:avLst/>
+          </a:prstGeom>
+        </p:spPr>
+        <p:style>
+          <a:lnRef idx="2">
+            <a:schemeClr val="dk1">
+              <a:shade val="15000"/>
+            </a:schemeClr>
+          </a:lnRef>
+          <a:fillRef idx="1">
+            <a:schemeClr val="dk1"/>
+          </a:fillRef>
+          <a:effectRef idx="0">
+            <a:schemeClr val="dk1"/>
+          </a:effectRef>
+          <a:fontRef idx="minor">
+            <a:schemeClr val="lt1"/>
+          </a:fontRef>
+        </p:style>
+        <p:txBody>
+          <a:bodyPr rtlCol="0" anchor="ctr"/>
+          <a:lstStyle/>
+          <a:p>
+            <a:pPr algn="ctr"/>
+            <a:r>
+              <a:rPr lang="en-US" altLang="ko-KR" dirty="0" err="1"/>
+              <a:t>Positinal</a:t>
+            </a:r>
+            <a:r>
+              <a:rPr lang="en-US" altLang="ko-KR" dirty="0"/>
+              <a:t> Encoding</a:t>
+            </a:r>
+            <a:endParaRPr lang="ko-KR" altLang="en-US" dirty="0"/>
+          </a:p>
+        </p:txBody>
+      </p:sp>
+    </p:spTree>
+    <p:extLst>
+      <p:ext uri="{BB962C8B-B14F-4D97-AF65-F5344CB8AC3E}">
+        <p14:creationId xmlns:p14="http://schemas.microsoft.com/office/powerpoint/2010/main" val="289401519"/>
+      </p:ext>
+    </p:extLst>
+  </p:cSld>
+  <p:clrMapOvr>
+    <a:masterClrMapping/>
+  </p:clrMapOvr>
+</p:sld>
+</file>
+
+<file path=ppt/slides/slide9.xml><?xml version="1.0" encoding="utf-8"?>
+<p:sld xmlns:a="http://schemas.openxmlformats.org/drawingml/2006/main" xmlns:r="http://schemas.openxmlformats.org/officeDocument/2006/relationships" xmlns:p="http://schemas.openxmlformats.org/presentationml/2006/main">
+  <p:cSld>
+    <p:spTree>
+      <p:nvGrpSpPr>
+        <p:cNvPr id="1" name="">
+          <a:extLst>
+            <a:ext uri="{FF2B5EF4-FFF2-40B4-BE49-F238E27FC236}">
+              <a16:creationId xmlns:a16="http://schemas.microsoft.com/office/drawing/2014/main" id="{DEAD304B-A995-D620-4AF5-CF23B45A423F}"/>
+            </a:ext>
+          </a:extLst>
+        </p:cNvPr>
+        <p:cNvGrpSpPr/>
+        <p:nvPr/>
+      </p:nvGrpSpPr>
+      <p:grpSpPr>
+        <a:xfrm>
+          <a:off x="0" y="0"/>
+          <a:ext cx="0" cy="0"/>
+          <a:chOff x="0" y="0"/>
+          <a:chExt cx="0" cy="0"/>
+        </a:xfrm>
+      </p:grpSpPr>
+      <p:sp>
+        <p:nvSpPr>
+          <p:cNvPr id="2" name="제목 1">
+            <a:extLst>
+              <a:ext uri="{FF2B5EF4-FFF2-40B4-BE49-F238E27FC236}">
+                <a16:creationId xmlns:a16="http://schemas.microsoft.com/office/drawing/2014/main" id="{7D275DD0-D5EB-7FF3-A0CD-758EA1EEDA0B}"/>
+              </a:ext>
+            </a:extLst>
+          </p:cNvPr>
+          <p:cNvSpPr>
+            <a:spLocks noGrp="1"/>
+          </p:cNvSpPr>
+          <p:nvPr>
+            <p:ph type="title"/>
+          </p:nvPr>
+        </p:nvSpPr>
+        <p:spPr/>
+        <p:txBody>
+          <a:bodyPr/>
+          <a:lstStyle/>
+          <a:p>
+            <a:r>
+              <a:rPr lang="ko-KR" altLang="ko-KR" dirty="0" err="1">
+                <a:latin typeface="Segoe UI" panose="020B0502040204020203" pitchFamily="34" charset="0"/>
+              </a:rPr>
+              <a:t>Graph</a:t>
+            </a:r>
+            <a:r>
+              <a:rPr lang="ko-KR" altLang="ko-KR" dirty="0">
+                <a:latin typeface="Segoe UI" panose="020B0502040204020203" pitchFamily="34" charset="0"/>
+              </a:rPr>
+              <a:t> </a:t>
+            </a:r>
+            <a:r>
+              <a:rPr lang="ko-KR" altLang="ko-KR" dirty="0" err="1">
+                <a:latin typeface="Segoe UI" panose="020B0502040204020203" pitchFamily="34" charset="0"/>
+              </a:rPr>
+              <a:t>Integration</a:t>
+            </a:r>
+            <a:r>
+              <a:rPr lang="ko-KR" altLang="ko-KR" dirty="0">
+                <a:latin typeface="Segoe UI" panose="020B0502040204020203" pitchFamily="34" charset="0"/>
+              </a:rPr>
+              <a:t> </a:t>
+            </a:r>
+            <a:r>
+              <a:rPr lang="ko-KR" altLang="ko-KR" dirty="0" err="1">
+                <a:latin typeface="Segoe UI" panose="020B0502040204020203" pitchFamily="34" charset="0"/>
+              </a:rPr>
+              <a:t>in</a:t>
+            </a:r>
+            <a:r>
+              <a:rPr lang="ko-KR" altLang="ko-KR" dirty="0">
+                <a:latin typeface="Segoe UI" panose="020B0502040204020203" pitchFamily="34" charset="0"/>
+              </a:rPr>
+              <a:t> </a:t>
+            </a:r>
+            <a:r>
+              <a:rPr lang="ko-KR" altLang="ko-KR" dirty="0" err="1">
+                <a:latin typeface="Segoe UI" panose="020B0502040204020203" pitchFamily="34" charset="0"/>
+              </a:rPr>
+              <a:t>Transformers</a:t>
+            </a:r>
+            <a:endParaRPr lang="ko-KR" altLang="en-US" dirty="0"/>
+          </a:p>
+        </p:txBody>
+      </p:sp>
+      <p:graphicFrame>
+        <p:nvGraphicFramePr>
+          <p:cNvPr id="4" name="내용 개체 틀 3">
+            <a:extLst>
+              <a:ext uri="{FF2B5EF4-FFF2-40B4-BE49-F238E27FC236}">
+                <a16:creationId xmlns:a16="http://schemas.microsoft.com/office/drawing/2014/main" id="{7D514CE5-873F-FF0A-DF1F-69E7501F556E}"/>
+              </a:ext>
+            </a:extLst>
+          </p:cNvPr>
+          <p:cNvGraphicFramePr>
+            <a:graphicFrameLocks noGrp="1"/>
+          </p:cNvGraphicFramePr>
+          <p:nvPr>
+            <p:ph idx="1"/>
+            <p:extLst>
+              <p:ext uri="{D42A27DB-BD31-4B8C-83A1-F6EECF244321}">
+                <p14:modId xmlns:p14="http://schemas.microsoft.com/office/powerpoint/2010/main" val="62978129"/>
+              </p:ext>
+            </p:extLst>
+          </p:nvPr>
+        </p:nvGraphicFramePr>
+        <p:xfrm>
+          <a:off x="678565" y="2141315"/>
+          <a:ext cx="10834870" cy="3970117"/>
+        </p:xfrm>
+        <a:graphic>
+          <a:graphicData uri="http://schemas.openxmlformats.org/drawingml/2006/table">
+            <a:tbl>
+              <a:tblPr firstRow="1" firstCol="1" bandRow="1">
+                <a:tableStyleId>{5C22544A-7EE6-4342-B048-85BDC9FD1C3A}</a:tableStyleId>
+              </a:tblPr>
+              <a:tblGrid>
+                <a:gridCol w="2836764">
+                  <a:extLst>
+                    <a:ext uri="{9D8B030D-6E8A-4147-A177-3AD203B41FA5}">
+                      <a16:colId xmlns:a16="http://schemas.microsoft.com/office/drawing/2014/main" val="3819763343"/>
+                    </a:ext>
+                  </a:extLst>
+                </a:gridCol>
+                <a:gridCol w="2997843">
+                  <a:extLst>
+                    <a:ext uri="{9D8B030D-6E8A-4147-A177-3AD203B41FA5}">
+                      <a16:colId xmlns:a16="http://schemas.microsoft.com/office/drawing/2014/main" val="1910606925"/>
+                    </a:ext>
+                  </a:extLst>
+                </a:gridCol>
+                <a:gridCol w="5000263">
+                  <a:extLst>
+                    <a:ext uri="{9D8B030D-6E8A-4147-A177-3AD203B41FA5}">
+                      <a16:colId xmlns:a16="http://schemas.microsoft.com/office/drawing/2014/main" val="3277269182"/>
+                    </a:ext>
+                  </a:extLst>
+                </a:gridCol>
+              </a:tblGrid>
+              <a:tr h="658109">
+                <a:tc>
+                  <a:txBody>
+                    <a:bodyPr/>
+                    <a:lstStyle/>
+                    <a:p>
+                      <a:pPr algn="ctr" latinLnBrk="1">
+                        <a:lnSpc>
+                          <a:spcPct val="150000"/>
+                        </a:lnSpc>
+                        <a:buNone/>
+                      </a:pPr>
+                      <a:r>
+                        <a:rPr lang="en-US" sz="1600" kern="100" dirty="0">
+                          <a:effectLst/>
+                        </a:rPr>
+                        <a:t>Strategy</a:t>
+                      </a:r>
+                      <a:endParaRPr lang="ko-KR" sz="1600" kern="100" dirty="0">
+                        <a:effectLst/>
+                        <a:latin typeface="맑은 고딕" panose="020B0503020000020004" pitchFamily="50" charset="-127"/>
+                        <a:ea typeface="맑은 고딕" panose="020B0503020000020004" pitchFamily="50" charset="-127"/>
+                        <a:cs typeface="Times New Roman" panose="02020603050405020304" pitchFamily="18" charset="0"/>
+                      </a:endParaRPr>
+                    </a:p>
+                  </a:txBody>
+                  <a:tcPr marL="68580" marR="68580" marT="0" marB="0" anchor="ctr"/>
+                </a:tc>
+                <a:tc>
+                  <a:txBody>
+                    <a:bodyPr/>
+                    <a:lstStyle/>
+                    <a:p>
+                      <a:pPr algn="ctr" latinLnBrk="1">
+                        <a:lnSpc>
+                          <a:spcPct val="150000"/>
+                        </a:lnSpc>
+                        <a:buNone/>
+                      </a:pPr>
+                      <a:r>
+                        <a:rPr lang="en-US" sz="1600" kern="100" dirty="0">
+                          <a:effectLst/>
+                        </a:rPr>
+                        <a:t>Integration Level</a:t>
+                      </a:r>
+                      <a:endParaRPr lang="ko-KR" sz="1600" kern="100" dirty="0">
+                        <a:effectLst/>
+                        <a:latin typeface="맑은 고딕" panose="020B0503020000020004" pitchFamily="50" charset="-127"/>
+                        <a:ea typeface="맑은 고딕" panose="020B0503020000020004" pitchFamily="50" charset="-127"/>
+                        <a:cs typeface="Times New Roman" panose="02020603050405020304" pitchFamily="18" charset="0"/>
+                      </a:endParaRPr>
+                    </a:p>
+                  </a:txBody>
+                  <a:tcPr marL="68580" marR="68580" marT="0" marB="0" anchor="ctr"/>
+                </a:tc>
+                <a:tc>
+                  <a:txBody>
+                    <a:bodyPr/>
+                    <a:lstStyle/>
+                    <a:p>
+                      <a:pPr algn="ctr" latinLnBrk="1">
+                        <a:lnSpc>
+                          <a:spcPct val="150000"/>
+                        </a:lnSpc>
+                        <a:buNone/>
+                      </a:pPr>
+                      <a:r>
+                        <a:rPr lang="en-US" sz="1600" kern="100">
+                          <a:effectLst/>
+                        </a:rPr>
+                        <a:t>Representative Examples</a:t>
+                      </a:r>
+                      <a:endParaRPr lang="ko-KR" sz="1600" kern="100">
+                        <a:effectLst/>
+                        <a:latin typeface="맑은 고딕" panose="020B0503020000020004" pitchFamily="50" charset="-127"/>
+                        <a:ea typeface="맑은 고딕" panose="020B0503020000020004" pitchFamily="50" charset="-127"/>
+                        <a:cs typeface="Times New Roman" panose="02020603050405020304" pitchFamily="18" charset="0"/>
+                      </a:endParaRPr>
+                    </a:p>
+                  </a:txBody>
+                  <a:tcPr marL="68580" marR="68580" marT="0" marB="0" anchor="ctr"/>
+                </a:tc>
+                <a:extLst>
+                  <a:ext uri="{0D108BD9-81ED-4DB2-BD59-A6C34878D82A}">
+                    <a16:rowId xmlns:a16="http://schemas.microsoft.com/office/drawing/2014/main" val="4032219245"/>
+                  </a:ext>
+                </a:extLst>
+              </a:tr>
+              <a:tr h="658109">
+                <a:tc>
+                  <a:txBody>
+                    <a:bodyPr/>
+                    <a:lstStyle/>
+                    <a:p>
+                      <a:pPr algn="ctr" latinLnBrk="1">
+                        <a:lnSpc>
+                          <a:spcPct val="150000"/>
+                        </a:lnSpc>
+                        <a:buNone/>
+                      </a:pPr>
+                      <a:r>
+                        <a:rPr lang="en-US" sz="1600" kern="100" dirty="0">
+                          <a:effectLst/>
+                        </a:rPr>
+                        <a:t>Graph Tokenization</a:t>
+                      </a:r>
+                      <a:endParaRPr lang="ko-KR" sz="1600" kern="100" dirty="0">
+                        <a:effectLst/>
+                        <a:latin typeface="맑은 고딕" panose="020B0503020000020004" pitchFamily="50" charset="-127"/>
+                        <a:ea typeface="맑은 고딕" panose="020B0503020000020004" pitchFamily="50" charset="-127"/>
+                        <a:cs typeface="Times New Roman" panose="02020603050405020304" pitchFamily="18" charset="0"/>
+                      </a:endParaRPr>
+                    </a:p>
+                  </a:txBody>
+                  <a:tcPr marL="68580" marR="68580" marT="0" marB="0" anchor="ctr"/>
+                </a:tc>
+                <a:tc>
+                  <a:txBody>
+                    <a:bodyPr/>
+                    <a:lstStyle/>
+                    <a:p>
+                      <a:pPr algn="ctr" latinLnBrk="1">
+                        <a:lnSpc>
+                          <a:spcPct val="150000"/>
+                        </a:lnSpc>
+                        <a:buNone/>
+                      </a:pPr>
+                      <a:r>
+                        <a:rPr lang="en-US" sz="1600" kern="100" dirty="0">
+                          <a:effectLst/>
+                        </a:rPr>
+                        <a:t>Pre-processing</a:t>
+                      </a:r>
+                      <a:endParaRPr lang="ko-KR" sz="1600" kern="100" dirty="0">
+                        <a:effectLst/>
+                        <a:latin typeface="맑은 고딕" panose="020B0503020000020004" pitchFamily="50" charset="-127"/>
+                        <a:ea typeface="맑은 고딕" panose="020B0503020000020004" pitchFamily="50" charset="-127"/>
+                        <a:cs typeface="Times New Roman" panose="02020603050405020304" pitchFamily="18" charset="0"/>
+                      </a:endParaRPr>
+                    </a:p>
+                  </a:txBody>
+                  <a:tcPr marL="68580" marR="68580" marT="0" marB="0" anchor="ctr"/>
+                </a:tc>
+                <a:tc>
+                  <a:txBody>
+                    <a:bodyPr/>
+                    <a:lstStyle/>
+                    <a:p>
+                      <a:pPr algn="ctr" latinLnBrk="1">
+                        <a:lnSpc>
+                          <a:spcPct val="150000"/>
+                        </a:lnSpc>
+                        <a:buNone/>
+                      </a:pPr>
+                      <a:r>
+                        <a:rPr lang="en-US" sz="1600" kern="100" dirty="0">
+                          <a:effectLst/>
+                        </a:rPr>
+                        <a:t>Node-token transformer, linearized graph models</a:t>
+                      </a:r>
+                      <a:endParaRPr lang="ko-KR" sz="1600" kern="100" dirty="0">
+                        <a:effectLst/>
+                        <a:latin typeface="맑은 고딕" panose="020B0503020000020004" pitchFamily="50" charset="-127"/>
+                        <a:ea typeface="맑은 고딕" panose="020B0503020000020004" pitchFamily="50" charset="-127"/>
+                        <a:cs typeface="Times New Roman" panose="02020603050405020304" pitchFamily="18" charset="0"/>
+                      </a:endParaRPr>
+                    </a:p>
+                  </a:txBody>
+                  <a:tcPr marL="68580" marR="68580" marT="0" marB="0" anchor="ctr"/>
+                </a:tc>
+                <a:extLst>
+                  <a:ext uri="{0D108BD9-81ED-4DB2-BD59-A6C34878D82A}">
+                    <a16:rowId xmlns:a16="http://schemas.microsoft.com/office/drawing/2014/main" val="3281645520"/>
+                  </a:ext>
+                </a:extLst>
+              </a:tr>
+              <a:tr h="658109">
+                <a:tc>
+                  <a:txBody>
+                    <a:bodyPr/>
+                    <a:lstStyle/>
+                    <a:p>
+                      <a:pPr algn="ctr" latinLnBrk="1">
+                        <a:lnSpc>
+                          <a:spcPct val="150000"/>
+                        </a:lnSpc>
+                        <a:buNone/>
+                      </a:pPr>
+                      <a:r>
+                        <a:rPr lang="en-US" sz="1600" kern="100" dirty="0">
+                          <a:effectLst/>
+                        </a:rPr>
+                        <a:t>Input-level Integration</a:t>
+                      </a:r>
+                      <a:endParaRPr lang="ko-KR" sz="1600" kern="100" dirty="0">
+                        <a:effectLst/>
+                        <a:latin typeface="맑은 고딕" panose="020B0503020000020004" pitchFamily="50" charset="-127"/>
+                        <a:ea typeface="맑은 고딕" panose="020B0503020000020004" pitchFamily="50" charset="-127"/>
+                        <a:cs typeface="Times New Roman" panose="02020603050405020304" pitchFamily="18" charset="0"/>
+                      </a:endParaRPr>
+                    </a:p>
+                  </a:txBody>
+                  <a:tcPr marL="68580" marR="68580" marT="0" marB="0" anchor="ctr"/>
+                </a:tc>
+                <a:tc>
+                  <a:txBody>
+                    <a:bodyPr/>
+                    <a:lstStyle/>
+                    <a:p>
+                      <a:pPr algn="ctr" latinLnBrk="1">
+                        <a:lnSpc>
+                          <a:spcPct val="150000"/>
+                        </a:lnSpc>
+                        <a:buNone/>
+                      </a:pPr>
+                      <a:r>
+                        <a:rPr lang="en-US" sz="1600" kern="100" dirty="0">
+                          <a:effectLst/>
+                        </a:rPr>
+                        <a:t>Input Embedding</a:t>
+                      </a:r>
+                      <a:endParaRPr lang="ko-KR" sz="1600" kern="100" dirty="0">
+                        <a:effectLst/>
+                        <a:latin typeface="맑은 고딕" panose="020B0503020000020004" pitchFamily="50" charset="-127"/>
+                        <a:ea typeface="맑은 고딕" panose="020B0503020000020004" pitchFamily="50" charset="-127"/>
+                        <a:cs typeface="Times New Roman" panose="02020603050405020304" pitchFamily="18" charset="0"/>
+                      </a:endParaRPr>
+                    </a:p>
+                  </a:txBody>
+                  <a:tcPr marL="68580" marR="68580" marT="0" marB="0" anchor="ctr"/>
+                </a:tc>
+                <a:tc>
+                  <a:txBody>
+                    <a:bodyPr/>
+                    <a:lstStyle/>
+                    <a:p>
+                      <a:pPr algn="ctr" latinLnBrk="1">
+                        <a:lnSpc>
+                          <a:spcPct val="150000"/>
+                        </a:lnSpc>
+                        <a:buNone/>
+                      </a:pPr>
+                      <a:r>
+                        <a:rPr lang="en-US" sz="1600" kern="100" dirty="0">
+                          <a:effectLst/>
+                        </a:rPr>
+                        <a:t>PE-based models, feature augmentation</a:t>
+                      </a:r>
+                      <a:endParaRPr lang="ko-KR" sz="1600" kern="100" dirty="0">
+                        <a:effectLst/>
+                        <a:latin typeface="맑은 고딕" panose="020B0503020000020004" pitchFamily="50" charset="-127"/>
+                        <a:ea typeface="맑은 고딕" panose="020B0503020000020004" pitchFamily="50" charset="-127"/>
+                        <a:cs typeface="Times New Roman" panose="02020603050405020304" pitchFamily="18" charset="0"/>
+                      </a:endParaRPr>
+                    </a:p>
+                  </a:txBody>
+                  <a:tcPr marL="68580" marR="68580" marT="0" marB="0" anchor="ctr"/>
+                </a:tc>
+                <a:extLst>
+                  <a:ext uri="{0D108BD9-81ED-4DB2-BD59-A6C34878D82A}">
+                    <a16:rowId xmlns:a16="http://schemas.microsoft.com/office/drawing/2014/main" val="2468496733"/>
+                  </a:ext>
+                </a:extLst>
+              </a:tr>
+              <a:tr h="658109">
+                <a:tc>
+                  <a:txBody>
+                    <a:bodyPr/>
+                    <a:lstStyle/>
+                    <a:p>
+                      <a:pPr algn="ctr" latinLnBrk="1">
+                        <a:lnSpc>
+                          <a:spcPct val="150000"/>
+                        </a:lnSpc>
+                        <a:buNone/>
+                      </a:pPr>
+                      <a:r>
+                        <a:rPr lang="en-US" sz="1600" kern="100">
+                          <a:effectLst/>
+                        </a:rPr>
+                        <a:t>Attention-level Integration</a:t>
+                      </a:r>
+                      <a:endParaRPr lang="ko-KR" sz="1600" kern="100">
+                        <a:effectLst/>
+                        <a:latin typeface="맑은 고딕" panose="020B0503020000020004" pitchFamily="50" charset="-127"/>
+                        <a:ea typeface="맑은 고딕" panose="020B0503020000020004" pitchFamily="50" charset="-127"/>
+                        <a:cs typeface="Times New Roman" panose="02020603050405020304" pitchFamily="18" charset="0"/>
+                      </a:endParaRPr>
+                    </a:p>
+                  </a:txBody>
+                  <a:tcPr marL="68580" marR="68580" marT="0" marB="0" anchor="ctr"/>
+                </a:tc>
+                <a:tc>
+                  <a:txBody>
+                    <a:bodyPr/>
+                    <a:lstStyle/>
+                    <a:p>
+                      <a:pPr algn="ctr" latinLnBrk="1">
+                        <a:lnSpc>
+                          <a:spcPct val="150000"/>
+                        </a:lnSpc>
+                        <a:buNone/>
+                      </a:pPr>
+                      <a:r>
+                        <a:rPr lang="en-US" sz="1600" kern="100" dirty="0">
+                          <a:effectLst/>
+                        </a:rPr>
+                        <a:t>Attention Score</a:t>
+                      </a:r>
+                      <a:endParaRPr lang="ko-KR" sz="1600" kern="100" dirty="0">
+                        <a:effectLst/>
+                        <a:latin typeface="맑은 고딕" panose="020B0503020000020004" pitchFamily="50" charset="-127"/>
+                        <a:ea typeface="맑은 고딕" panose="020B0503020000020004" pitchFamily="50" charset="-127"/>
+                        <a:cs typeface="Times New Roman" panose="02020603050405020304" pitchFamily="18" charset="0"/>
+                      </a:endParaRPr>
+                    </a:p>
+                  </a:txBody>
+                  <a:tcPr marL="68580" marR="68580" marT="0" marB="0" anchor="ctr"/>
+                </a:tc>
+                <a:tc>
+                  <a:txBody>
+                    <a:bodyPr/>
+                    <a:lstStyle/>
+                    <a:p>
+                      <a:pPr algn="ctr" latinLnBrk="1">
+                        <a:lnSpc>
+                          <a:spcPct val="150000"/>
+                        </a:lnSpc>
+                        <a:buNone/>
+                      </a:pPr>
+                      <a:r>
+                        <a:rPr lang="en-US" sz="1600" kern="100" dirty="0" err="1">
+                          <a:effectLst/>
+                        </a:rPr>
+                        <a:t>Graphormer</a:t>
+                      </a:r>
+                      <a:r>
+                        <a:rPr lang="en-US" sz="1600" kern="100" dirty="0">
+                          <a:effectLst/>
+                        </a:rPr>
+                        <a:t> </a:t>
+                      </a:r>
+                      <a:endParaRPr lang="ko-KR" sz="1600" kern="100" dirty="0">
+                        <a:effectLst/>
+                        <a:latin typeface="맑은 고딕" panose="020B0503020000020004" pitchFamily="50" charset="-127"/>
+                        <a:ea typeface="맑은 고딕" panose="020B0503020000020004" pitchFamily="50" charset="-127"/>
+                        <a:cs typeface="Times New Roman" panose="02020603050405020304" pitchFamily="18" charset="0"/>
+                      </a:endParaRPr>
+                    </a:p>
+                  </a:txBody>
+                  <a:tcPr marL="68580" marR="68580" marT="0" marB="0" anchor="ctr"/>
+                </a:tc>
+                <a:extLst>
+                  <a:ext uri="{0D108BD9-81ED-4DB2-BD59-A6C34878D82A}">
+                    <a16:rowId xmlns:a16="http://schemas.microsoft.com/office/drawing/2014/main" val="3897676288"/>
+                  </a:ext>
+                </a:extLst>
+              </a:tr>
+              <a:tr h="658109">
+                <a:tc>
+                  <a:txBody>
+                    <a:bodyPr/>
+                    <a:lstStyle/>
+                    <a:p>
+                      <a:pPr algn="ctr" latinLnBrk="1">
+                        <a:lnSpc>
+                          <a:spcPct val="150000"/>
+                        </a:lnSpc>
+                        <a:buNone/>
+                      </a:pPr>
+                      <a:r>
+                        <a:rPr lang="en-US" sz="1600" kern="100">
+                          <a:effectLst/>
+                        </a:rPr>
+                        <a:t>QKV-level Integration</a:t>
+                      </a:r>
+                      <a:endParaRPr lang="ko-KR" sz="1600" kern="100">
+                        <a:effectLst/>
+                        <a:latin typeface="맑은 고딕" panose="020B0503020000020004" pitchFamily="50" charset="-127"/>
+                        <a:ea typeface="맑은 고딕" panose="020B0503020000020004" pitchFamily="50" charset="-127"/>
+                        <a:cs typeface="Times New Roman" panose="02020603050405020304" pitchFamily="18" charset="0"/>
+                      </a:endParaRPr>
+                    </a:p>
+                  </a:txBody>
+                  <a:tcPr marL="68580" marR="68580" marT="0" marB="0" anchor="ctr"/>
+                </a:tc>
+                <a:tc>
+                  <a:txBody>
+                    <a:bodyPr/>
+                    <a:lstStyle/>
+                    <a:p>
+                      <a:pPr algn="ctr" latinLnBrk="1">
+                        <a:lnSpc>
+                          <a:spcPct val="150000"/>
+                        </a:lnSpc>
+                        <a:buNone/>
+                      </a:pPr>
+                      <a:r>
+                        <a:rPr lang="en-US" sz="1600" kern="100" dirty="0">
+                          <a:effectLst/>
+                        </a:rPr>
+                        <a:t>Attention Representation</a:t>
+                      </a:r>
+                      <a:endParaRPr lang="ko-KR" sz="1600" kern="100" dirty="0">
+                        <a:effectLst/>
+                        <a:latin typeface="맑은 고딕" panose="020B0503020000020004" pitchFamily="50" charset="-127"/>
+                        <a:ea typeface="맑은 고딕" panose="020B0503020000020004" pitchFamily="50" charset="-127"/>
+                        <a:cs typeface="Times New Roman" panose="02020603050405020304" pitchFamily="18" charset="0"/>
+                      </a:endParaRPr>
+                    </a:p>
+                  </a:txBody>
+                  <a:tcPr marL="68580" marR="68580" marT="0" marB="0" anchor="ctr"/>
+                </a:tc>
+                <a:tc>
+                  <a:txBody>
+                    <a:bodyPr/>
+                    <a:lstStyle/>
+                    <a:p>
+                      <a:pPr algn="ctr" latinLnBrk="1">
+                        <a:lnSpc>
+                          <a:spcPct val="150000"/>
+                        </a:lnSpc>
+                        <a:buNone/>
+                      </a:pPr>
+                      <a:r>
+                        <a:rPr lang="en-US" sz="1600" kern="100" dirty="0">
+                          <a:effectLst/>
+                        </a:rPr>
+                        <a:t>Relational Attention, edge-aware QKV</a:t>
+                      </a:r>
+                      <a:endParaRPr lang="ko-KR" sz="1600" kern="100" dirty="0">
+                        <a:effectLst/>
+                        <a:latin typeface="맑은 고딕" panose="020B0503020000020004" pitchFamily="50" charset="-127"/>
+                        <a:ea typeface="맑은 고딕" panose="020B0503020000020004" pitchFamily="50" charset="-127"/>
+                        <a:cs typeface="Times New Roman" panose="02020603050405020304" pitchFamily="18" charset="0"/>
+                      </a:endParaRPr>
+                    </a:p>
+                  </a:txBody>
+                  <a:tcPr marL="68580" marR="68580" marT="0" marB="0" anchor="ctr"/>
+                </a:tc>
+                <a:extLst>
+                  <a:ext uri="{0D108BD9-81ED-4DB2-BD59-A6C34878D82A}">
+                    <a16:rowId xmlns:a16="http://schemas.microsoft.com/office/drawing/2014/main" val="2776702727"/>
+                  </a:ext>
+                </a:extLst>
+              </a:tr>
+              <a:tr h="679572">
+                <a:tc>
+                  <a:txBody>
+                    <a:bodyPr/>
+                    <a:lstStyle/>
+                    <a:p>
+                      <a:pPr algn="ctr" latinLnBrk="1">
+                        <a:lnSpc>
+                          <a:spcPct val="150000"/>
+                        </a:lnSpc>
+                        <a:buNone/>
+                      </a:pPr>
+                      <a:r>
+                        <a:rPr lang="en-US" sz="1600" kern="100">
+                          <a:effectLst/>
+                        </a:rPr>
+                        <a:t>Edge-level Integration</a:t>
+                      </a:r>
+                      <a:endParaRPr lang="ko-KR" sz="1600" kern="100">
+                        <a:effectLst/>
+                        <a:latin typeface="맑은 고딕" panose="020B0503020000020004" pitchFamily="50" charset="-127"/>
+                        <a:ea typeface="맑은 고딕" panose="020B0503020000020004" pitchFamily="50" charset="-127"/>
+                        <a:cs typeface="Times New Roman" panose="02020603050405020304" pitchFamily="18" charset="0"/>
+                      </a:endParaRPr>
+                    </a:p>
+                  </a:txBody>
+                  <a:tcPr marL="68580" marR="68580" marT="0" marB="0" anchor="ctr"/>
+                </a:tc>
+                <a:tc>
+                  <a:txBody>
+                    <a:bodyPr/>
+                    <a:lstStyle/>
+                    <a:p>
+                      <a:pPr algn="ctr" latinLnBrk="1">
+                        <a:lnSpc>
+                          <a:spcPct val="150000"/>
+                        </a:lnSpc>
+                        <a:buNone/>
+                      </a:pPr>
+                      <a:r>
+                        <a:rPr lang="en-US" sz="1600" kern="100" dirty="0">
+                          <a:effectLst/>
+                        </a:rPr>
+                        <a:t>Full Model (Node + Edge)</a:t>
+                      </a:r>
+                      <a:endParaRPr lang="ko-KR" sz="1600" kern="100" dirty="0">
+                        <a:effectLst/>
+                        <a:latin typeface="맑은 고딕" panose="020B0503020000020004" pitchFamily="50" charset="-127"/>
+                        <a:ea typeface="맑은 고딕" panose="020B0503020000020004" pitchFamily="50" charset="-127"/>
+                        <a:cs typeface="Times New Roman" panose="02020603050405020304" pitchFamily="18" charset="0"/>
+                      </a:endParaRPr>
+                    </a:p>
+                  </a:txBody>
+                  <a:tcPr marL="68580" marR="68580" marT="0" marB="0" anchor="ctr"/>
+                </a:tc>
+                <a:tc>
+                  <a:txBody>
+                    <a:bodyPr/>
+                    <a:lstStyle/>
+                    <a:p>
+                      <a:pPr algn="ctr" latinLnBrk="1">
+                        <a:lnSpc>
+                          <a:spcPct val="150000"/>
+                        </a:lnSpc>
+                        <a:buNone/>
+                      </a:pPr>
+                      <a:r>
+                        <a:rPr lang="en-US" sz="1600" kern="100" dirty="0">
+                          <a:effectLst/>
+                        </a:rPr>
+                        <a:t>Relational Transformer, edge update models</a:t>
+                      </a:r>
+                      <a:endParaRPr lang="ko-KR" sz="1600" kern="100" dirty="0">
+                        <a:effectLst/>
+                        <a:latin typeface="맑은 고딕" panose="020B0503020000020004" pitchFamily="50" charset="-127"/>
+                        <a:ea typeface="맑은 고딕" panose="020B0503020000020004" pitchFamily="50" charset="-127"/>
+                        <a:cs typeface="Times New Roman" panose="02020603050405020304" pitchFamily="18" charset="0"/>
+                      </a:endParaRPr>
+                    </a:p>
+                  </a:txBody>
+                  <a:tcPr marL="68580" marR="68580" marT="0" marB="0" anchor="ctr"/>
+                </a:tc>
+                <a:extLst>
+                  <a:ext uri="{0D108BD9-81ED-4DB2-BD59-A6C34878D82A}">
+                    <a16:rowId xmlns:a16="http://schemas.microsoft.com/office/drawing/2014/main" val="824631184"/>
+                  </a:ext>
+                </a:extLst>
+              </a:tr>
+            </a:tbl>
+          </a:graphicData>
+        </a:graphic>
+      </p:graphicFrame>
+      <p:sp>
+        <p:nvSpPr>
+          <p:cNvPr id="8" name="직사각형 7">
+            <a:extLst>
+              <a:ext uri="{FF2B5EF4-FFF2-40B4-BE49-F238E27FC236}">
+                <a16:creationId xmlns:a16="http://schemas.microsoft.com/office/drawing/2014/main" id="{D1D90621-AAD6-FD3D-2118-8CAA46D7C406}"/>
+              </a:ext>
+            </a:extLst>
+          </p:cNvPr>
+          <p:cNvSpPr/>
+          <p:nvPr/>
+        </p:nvSpPr>
+        <p:spPr>
+          <a:xfrm>
+            <a:off x="8817077" y="558124"/>
+            <a:ext cx="2536723" cy="560439"/>
+          </a:xfrm>
+          <a:prstGeom prst="rect">
+            <a:avLst/>
+          </a:prstGeom>
+        </p:spPr>
+        <p:style>
+          <a:lnRef idx="2">
+            <a:schemeClr val="dk1">
+              <a:shade val="15000"/>
+            </a:schemeClr>
+          </a:lnRef>
+          <a:fillRef idx="1">
+            <a:schemeClr val="dk1"/>
+          </a:fillRef>
+          <a:effectRef idx="0">
+            <a:schemeClr val="dk1"/>
+          </a:effectRef>
+          <a:fontRef idx="minor">
+            <a:schemeClr val="lt1"/>
+          </a:fontRef>
+        </p:style>
+        <p:txBody>
+          <a:bodyPr rtlCol="0" anchor="ctr"/>
+          <a:lstStyle/>
+          <a:p>
+            <a:pPr algn="ctr"/>
+            <a:r>
+              <a:rPr lang="en-US" altLang="ko-KR" dirty="0"/>
+              <a:t>Integration Strategy</a:t>
+            </a:r>
+            <a:endParaRPr lang="ko-KR" altLang="en-US" dirty="0"/>
+          </a:p>
+        </p:txBody>
+      </p:sp>
+    </p:spTree>
+    <p:extLst>
+      <p:ext uri="{BB962C8B-B14F-4D97-AF65-F5344CB8AC3E}">
+        <p14:creationId xmlns:p14="http://schemas.microsoft.com/office/powerpoint/2010/main" val="3600298602"/>
       </p:ext>
     </p:extLst>
   </p:cSld>
